--- a/presentation/presentation.pptx
+++ b/presentation/presentation.pptx
@@ -3280,7 +3280,7 @@
                   <a:srgbClr val="86868B"/>
                 </a:solidFill>
               </a:rPr>
-              <a:t>Sangeeth Deleep Menon  ·  NUID 002524579
+              <a:t>Sangeeth Deleep Menon  ·  NUID 002524579  ·  Raj Gupta  ·  NUID 002068701
 Khoury College of Computer Sciences  ·  Northeastern University</a:t>
             </a:r>
           </a:p>

--- a/presentation/presentation.pptx
+++ b/presentation/presentation.pptx
@@ -12,9 +12,6 @@
     <p:sldId id="260" r:id="rId11"/>
     <p:sldId id="261" r:id="rId12"/>
     <p:sldId id="262" r:id="rId13"/>
-    <p:sldId id="263" r:id="rId14"/>
-    <p:sldId id="264" r:id="rId15"/>
-    <p:sldId id="265" r:id="rId16"/>
   </p:sldIdLst>
   <p:sldSz cx="12188952" cy="6858000" type="screen4x3"/>
   <p:notesSz cx="6858000" cy="9144000"/>
@@ -3182,7 +3179,7 @@
         </p:nvSpPr>
         <p:spPr>
           <a:xfrm>
-            <a:off x="5641848" y="2560320"/>
+            <a:off x="5641848" y="2606040"/>
             <a:ext cx="914400" cy="25400"/>
           </a:xfrm>
           <a:prstGeom prst="rect">
@@ -3225,7 +3222,7 @@
         </p:nvSpPr>
         <p:spPr>
           <a:xfrm>
-            <a:off x="914400" y="2743200"/>
+            <a:off x="914400" y="2788920"/>
             <a:ext cx="10360152" cy="548640"/>
           </a:xfrm>
           <a:prstGeom prst="rect">
@@ -3259,8 +3256,8 @@
         </p:nvSpPr>
         <p:spPr>
           <a:xfrm>
-            <a:off x="0" y="3840480"/>
-            <a:ext cx="12188952" cy="457200"/>
+            <a:off x="0" y="3931920"/>
+            <a:ext cx="12188952" cy="548640"/>
           </a:xfrm>
           <a:prstGeom prst="rect">
             <a:avLst/>
@@ -3282,587 +3279,6 @@
               </a:rPr>
               <a:t>Sangeeth Deleep Menon  ·  NUID 002524579  ·  Raj Gupta  ·  NUID 002068701
 Khoury College of Computer Sciences  ·  Northeastern University</a:t>
-            </a:r>
-          </a:p>
-        </p:txBody>
-      </p:sp>
-    </p:spTree>
-  </p:cSld>
-  <p:clrMapOvr>
-    <a:masterClrMapping/>
-  </p:clrMapOvr>
-</p:sld>
-</file>
-
-<file path=ppt/slides/slide10.xml><?xml version="1.0" encoding="utf-8"?>
-<p:sld xmlns:a="http://schemas.openxmlformats.org/drawingml/2006/main" xmlns:p="http://schemas.openxmlformats.org/presentationml/2006/main" xmlns:r="http://schemas.openxmlformats.org/officeDocument/2006/relationships">
-  <p:cSld>
-    <p:bg>
-      <p:bgPr>
-        <a:solidFill>
-          <a:srgbClr val="0A0A0A"/>
-        </a:solidFill>
-        <a:effectLst/>
-      </p:bgPr>
-    </p:bg>
-    <p:spTree>
-      <p:nvGrpSpPr>
-        <p:cNvPr id="1" name=""/>
-        <p:cNvGrpSpPr/>
-        <p:nvPr/>
-      </p:nvGrpSpPr>
-      <p:grpSpPr/>
-      <p:sp>
-        <p:nvSpPr>
-          <p:cNvPr id="2" name="TextBox 1"/>
-          <p:cNvSpPr txBox="1"/>
-          <p:nvPr/>
-        </p:nvSpPr>
-        <p:spPr>
-          <a:xfrm>
-            <a:off x="0" y="411480"/>
-            <a:ext cx="12188952" cy="365760"/>
-          </a:xfrm>
-          <a:prstGeom prst="rect">
-            <a:avLst/>
-          </a:prstGeom>
-          <a:noFill/>
-        </p:spPr>
-        <p:txBody>
-          <a:bodyPr wrap="square">
-            <a:spAutoFit/>
-          </a:bodyPr>
-          <a:lstStyle/>
-          <a:p>
-            <a:pPr algn="ctr"/>
-            <a:r>
-              <a:rPr sz="1100" b="1" i="0">
-                <a:solidFill>
-                  <a:srgbClr val="2997FF"/>
-                </a:solidFill>
-              </a:rPr>
-              <a:t>SUMMARY</a:t>
-            </a:r>
-          </a:p>
-        </p:txBody>
-      </p:sp>
-      <p:sp>
-        <p:nvSpPr>
-          <p:cNvPr id="3" name="TextBox 2"/>
-          <p:cNvSpPr txBox="1"/>
-          <p:nvPr/>
-        </p:nvSpPr>
-        <p:spPr>
-          <a:xfrm>
-            <a:off x="457200" y="822960"/>
-            <a:ext cx="11274552" cy="1280160"/>
-          </a:xfrm>
-          <a:prstGeom prst="rect">
-            <a:avLst/>
-          </a:prstGeom>
-          <a:noFill/>
-        </p:spPr>
-        <p:txBody>
-          <a:bodyPr wrap="square">
-            <a:spAutoFit/>
-          </a:bodyPr>
-          <a:lstStyle/>
-          <a:p>
-            <a:pPr algn="ctr"/>
-            <a:r>
-              <a:rPr sz="3400" b="1" i="0">
-                <a:solidFill>
-                  <a:srgbClr val="F5F5F7"/>
-                </a:solidFill>
-              </a:rPr>
-              <a:t>Any object the network knows
-becomes its own AR anchor.</a:t>
-            </a:r>
-          </a:p>
-        </p:txBody>
-      </p:sp>
-      <p:sp>
-        <p:nvSpPr>
-          <p:cNvPr id="4" name="Rectangle 3"/>
-          <p:cNvSpPr/>
-          <p:nvPr/>
-        </p:nvSpPr>
-        <p:spPr>
-          <a:xfrm>
-            <a:off x="457200" y="2468880"/>
-            <a:ext cx="2743200" cy="1463040"/>
-          </a:xfrm>
-          <a:prstGeom prst="rect">
-            <a:avLst/>
-          </a:prstGeom>
-          <a:solidFill>
-            <a:srgbClr val="161617"/>
-          </a:solidFill>
-          <a:ln w="12700">
-            <a:solidFill>
-              <a:srgbClr val="2D2D2F"/>
-            </a:solidFill>
-          </a:ln>
-        </p:spPr>
-        <p:style>
-          <a:lnRef idx="1">
-            <a:schemeClr val="accent1"/>
-          </a:lnRef>
-          <a:fillRef idx="3">
-            <a:schemeClr val="accent1"/>
-          </a:fillRef>
-          <a:effectRef idx="2">
-            <a:schemeClr val="accent1"/>
-          </a:effectRef>
-          <a:fontRef idx="minor">
-            <a:schemeClr val="lt1"/>
-          </a:fontRef>
-        </p:style>
-        <p:txBody>
-          <a:bodyPr rtlCol="0" anchor="ctr"/>
-          <a:lstStyle/>
-          <a:p>
-            <a:pPr algn="ctr"/>
-          </a:p>
-        </p:txBody>
-      </p:sp>
-      <p:sp>
-        <p:nvSpPr>
-          <p:cNvPr id="5" name="TextBox 4"/>
-          <p:cNvSpPr txBox="1"/>
-          <p:nvPr/>
-        </p:nvSpPr>
-        <p:spPr>
-          <a:xfrm>
-            <a:off x="457200" y="2606040"/>
-            <a:ext cx="2743200" cy="640080"/>
-          </a:xfrm>
-          <a:prstGeom prst="rect">
-            <a:avLst/>
-          </a:prstGeom>
-          <a:noFill/>
-        </p:spPr>
-        <p:txBody>
-          <a:bodyPr wrap="square">
-            <a:spAutoFit/>
-          </a:bodyPr>
-          <a:lstStyle/>
-          <a:p>
-            <a:pPr algn="ctr"/>
-            <a:r>
-              <a:rPr sz="3600" b="1" i="0">
-                <a:solidFill>
-                  <a:srgbClr val="2997FF"/>
-                </a:solidFill>
-              </a:rPr>
-              <a:t>10</a:t>
-            </a:r>
-          </a:p>
-        </p:txBody>
-      </p:sp>
-      <p:sp>
-        <p:nvSpPr>
-          <p:cNvPr id="6" name="TextBox 5"/>
-          <p:cNvSpPr txBox="1"/>
-          <p:nvPr/>
-        </p:nvSpPr>
-        <p:spPr>
-          <a:xfrm>
-            <a:off x="457200" y="3291840"/>
-            <a:ext cx="2743200" cy="365760"/>
-          </a:xfrm>
-          <a:prstGeom prst="rect">
-            <a:avLst/>
-          </a:prstGeom>
-          <a:noFill/>
-        </p:spPr>
-        <p:txBody>
-          <a:bodyPr wrap="square">
-            <a:spAutoFit/>
-          </a:bodyPr>
-          <a:lstStyle/>
-          <a:p>
-            <a:pPr algn="ctr"/>
-            <a:r>
-              <a:rPr sz="1200" b="0" i="0">
-                <a:solidFill>
-                  <a:srgbClr val="86868B"/>
-                </a:solidFill>
-              </a:rPr>
-              <a:t>object classes</a:t>
-            </a:r>
-          </a:p>
-        </p:txBody>
-      </p:sp>
-      <p:sp>
-        <p:nvSpPr>
-          <p:cNvPr id="7" name="Rectangle 6"/>
-          <p:cNvSpPr/>
-          <p:nvPr/>
-        </p:nvSpPr>
-        <p:spPr>
-          <a:xfrm>
-            <a:off x="3383280" y="2468880"/>
-            <a:ext cx="2743200" cy="1463040"/>
-          </a:xfrm>
-          <a:prstGeom prst="rect">
-            <a:avLst/>
-          </a:prstGeom>
-          <a:solidFill>
-            <a:srgbClr val="161617"/>
-          </a:solidFill>
-          <a:ln w="12700">
-            <a:solidFill>
-              <a:srgbClr val="2D2D2F"/>
-            </a:solidFill>
-          </a:ln>
-        </p:spPr>
-        <p:style>
-          <a:lnRef idx="1">
-            <a:schemeClr val="accent1"/>
-          </a:lnRef>
-          <a:fillRef idx="3">
-            <a:schemeClr val="accent1"/>
-          </a:fillRef>
-          <a:effectRef idx="2">
-            <a:schemeClr val="accent1"/>
-          </a:effectRef>
-          <a:fontRef idx="minor">
-            <a:schemeClr val="lt1"/>
-          </a:fontRef>
-        </p:style>
-        <p:txBody>
-          <a:bodyPr rtlCol="0" anchor="ctr"/>
-          <a:lstStyle/>
-          <a:p>
-            <a:pPr algn="ctr"/>
-          </a:p>
-        </p:txBody>
-      </p:sp>
-      <p:sp>
-        <p:nvSpPr>
-          <p:cNvPr id="8" name="TextBox 7"/>
-          <p:cNvSpPr txBox="1"/>
-          <p:nvPr/>
-        </p:nvSpPr>
-        <p:spPr>
-          <a:xfrm>
-            <a:off x="3383280" y="2606040"/>
-            <a:ext cx="2743200" cy="640080"/>
-          </a:xfrm>
-          <a:prstGeom prst="rect">
-            <a:avLst/>
-          </a:prstGeom>
-          <a:noFill/>
-        </p:spPr>
-        <p:txBody>
-          <a:bodyPr wrap="square">
-            <a:spAutoFit/>
-          </a:bodyPr>
-          <a:lstStyle/>
-          <a:p>
-            <a:pPr algn="ctr"/>
-            <a:r>
-              <a:rPr sz="3600" b="1" i="0">
-                <a:solidFill>
-                  <a:srgbClr val="30D158"/>
-                </a:solidFill>
-              </a:rPr>
-              <a:t>84.1%</a:t>
-            </a:r>
-          </a:p>
-        </p:txBody>
-      </p:sp>
-      <p:sp>
-        <p:nvSpPr>
-          <p:cNvPr id="9" name="TextBox 8"/>
-          <p:cNvSpPr txBox="1"/>
-          <p:nvPr/>
-        </p:nvSpPr>
-        <p:spPr>
-          <a:xfrm>
-            <a:off x="3383280" y="3291840"/>
-            <a:ext cx="2743200" cy="365760"/>
-          </a:xfrm>
-          <a:prstGeom prst="rect">
-            <a:avLst/>
-          </a:prstGeom>
-          <a:noFill/>
-        </p:spPr>
-        <p:txBody>
-          <a:bodyPr wrap="square">
-            <a:spAutoFit/>
-          </a:bodyPr>
-          <a:lstStyle/>
-          <a:p>
-            <a:pPr algn="ctr"/>
-            <a:r>
-              <a:rPr sz="1200" b="0" i="0">
-                <a:solidFill>
-                  <a:srgbClr val="86868B"/>
-                </a:solidFill>
-              </a:rPr>
-              <a:t>test accuracy</a:t>
-            </a:r>
-          </a:p>
-        </p:txBody>
-      </p:sp>
-      <p:sp>
-        <p:nvSpPr>
-          <p:cNvPr id="10" name="Rectangle 9"/>
-          <p:cNvSpPr/>
-          <p:nvPr/>
-        </p:nvSpPr>
-        <p:spPr>
-          <a:xfrm>
-            <a:off x="6309360" y="2468880"/>
-            <a:ext cx="2743200" cy="1463040"/>
-          </a:xfrm>
-          <a:prstGeom prst="rect">
-            <a:avLst/>
-          </a:prstGeom>
-          <a:solidFill>
-            <a:srgbClr val="161617"/>
-          </a:solidFill>
-          <a:ln w="12700">
-            <a:solidFill>
-              <a:srgbClr val="2D2D2F"/>
-            </a:solidFill>
-          </a:ln>
-        </p:spPr>
-        <p:style>
-          <a:lnRef idx="1">
-            <a:schemeClr val="accent1"/>
-          </a:lnRef>
-          <a:fillRef idx="3">
-            <a:schemeClr val="accent1"/>
-          </a:fillRef>
-          <a:effectRef idx="2">
-            <a:schemeClr val="accent1"/>
-          </a:effectRef>
-          <a:fontRef idx="minor">
-            <a:schemeClr val="lt1"/>
-          </a:fontRef>
-        </p:style>
-        <p:txBody>
-          <a:bodyPr rtlCol="0" anchor="ctr"/>
-          <a:lstStyle/>
-          <a:p>
-            <a:pPr algn="ctr"/>
-          </a:p>
-        </p:txBody>
-      </p:sp>
-      <p:sp>
-        <p:nvSpPr>
-          <p:cNvPr id="11" name="TextBox 10"/>
-          <p:cNvSpPr txBox="1"/>
-          <p:nvPr/>
-        </p:nvSpPr>
-        <p:spPr>
-          <a:xfrm>
-            <a:off x="6309360" y="2606040"/>
-            <a:ext cx="2743200" cy="640080"/>
-          </a:xfrm>
-          <a:prstGeom prst="rect">
-            <a:avLst/>
-          </a:prstGeom>
-          <a:noFill/>
-        </p:spPr>
-        <p:txBody>
-          <a:bodyPr wrap="square">
-            <a:spAutoFit/>
-          </a:bodyPr>
-          <a:lstStyle/>
-          <a:p>
-            <a:pPr algn="ctr"/>
-            <a:r>
-              <a:rPr sz="3600" b="1" i="0">
-                <a:solidFill>
-                  <a:srgbClr val="F5F5F7"/>
-                </a:solidFill>
-              </a:rPr>
-              <a:t>30 fps</a:t>
-            </a:r>
-          </a:p>
-        </p:txBody>
-      </p:sp>
-      <p:sp>
-        <p:nvSpPr>
-          <p:cNvPr id="12" name="TextBox 11"/>
-          <p:cNvSpPr txBox="1"/>
-          <p:nvPr/>
-        </p:nvSpPr>
-        <p:spPr>
-          <a:xfrm>
-            <a:off x="6309360" y="3291840"/>
-            <a:ext cx="2743200" cy="365760"/>
-          </a:xfrm>
-          <a:prstGeom prst="rect">
-            <a:avLst/>
-          </a:prstGeom>
-          <a:noFill/>
-        </p:spPr>
-        <p:txBody>
-          <a:bodyPr wrap="square">
-            <a:spAutoFit/>
-          </a:bodyPr>
-          <a:lstStyle/>
-          <a:p>
-            <a:pPr algn="ctr"/>
-            <a:r>
-              <a:rPr sz="1200" b="0" i="0">
-                <a:solidFill>
-                  <a:srgbClr val="86868B"/>
-                </a:solidFill>
-              </a:rPr>
-              <a:t>live inference</a:t>
-            </a:r>
-          </a:p>
-        </p:txBody>
-      </p:sp>
-      <p:sp>
-        <p:nvSpPr>
-          <p:cNvPr id="13" name="Rectangle 12"/>
-          <p:cNvSpPr/>
-          <p:nvPr/>
-        </p:nvSpPr>
-        <p:spPr>
-          <a:xfrm>
-            <a:off x="9235440" y="2468880"/>
-            <a:ext cx="2743200" cy="1463040"/>
-          </a:xfrm>
-          <a:prstGeom prst="rect">
-            <a:avLst/>
-          </a:prstGeom>
-          <a:solidFill>
-            <a:srgbClr val="161617"/>
-          </a:solidFill>
-          <a:ln w="12700">
-            <a:solidFill>
-              <a:srgbClr val="2D2D2F"/>
-            </a:solidFill>
-          </a:ln>
-        </p:spPr>
-        <p:style>
-          <a:lnRef idx="1">
-            <a:schemeClr val="accent1"/>
-          </a:lnRef>
-          <a:fillRef idx="3">
-            <a:schemeClr val="accent1"/>
-          </a:fillRef>
-          <a:effectRef idx="2">
-            <a:schemeClr val="accent1"/>
-          </a:effectRef>
-          <a:fontRef idx="minor">
-            <a:schemeClr val="lt1"/>
-          </a:fontRef>
-        </p:style>
-        <p:txBody>
-          <a:bodyPr rtlCol="0" anchor="ctr"/>
-          <a:lstStyle/>
-          <a:p>
-            <a:pPr algn="ctr"/>
-          </a:p>
-        </p:txBody>
-      </p:sp>
-      <p:sp>
-        <p:nvSpPr>
-          <p:cNvPr id="14" name="TextBox 13"/>
-          <p:cNvSpPr txBox="1"/>
-          <p:nvPr/>
-        </p:nvSpPr>
-        <p:spPr>
-          <a:xfrm>
-            <a:off x="9235440" y="2606040"/>
-            <a:ext cx="2743200" cy="640080"/>
-          </a:xfrm>
-          <a:prstGeom prst="rect">
-            <a:avLst/>
-          </a:prstGeom>
-          <a:noFill/>
-        </p:spPr>
-        <p:txBody>
-          <a:bodyPr wrap="square">
-            <a:spAutoFit/>
-          </a:bodyPr>
-          <a:lstStyle/>
-          <a:p>
-            <a:pPr algn="ctr"/>
-            <a:r>
-              <a:rPr sz="3600" b="1" i="0">
-                <a:solidFill>
-                  <a:srgbClr val="FFD60A"/>
-                </a:solidFill>
-              </a:rPr>
-              <a:t>0</a:t>
-            </a:r>
-          </a:p>
-        </p:txBody>
-      </p:sp>
-      <p:sp>
-        <p:nvSpPr>
-          <p:cNvPr id="15" name="TextBox 14"/>
-          <p:cNvSpPr txBox="1"/>
-          <p:nvPr/>
-        </p:nvSpPr>
-        <p:spPr>
-          <a:xfrm>
-            <a:off x="9235440" y="3291840"/>
-            <a:ext cx="2743200" cy="365760"/>
-          </a:xfrm>
-          <a:prstGeom prst="rect">
-            <a:avLst/>
-          </a:prstGeom>
-          <a:noFill/>
-        </p:spPr>
-        <p:txBody>
-          <a:bodyPr wrap="square">
-            <a:spAutoFit/>
-          </a:bodyPr>
-          <a:lstStyle/>
-          <a:p>
-            <a:pPr algn="ctr"/>
-            <a:r>
-              <a:rPr sz="1200" b="0" i="0">
-                <a:solidFill>
-                  <a:srgbClr val="86868B"/>
-                </a:solidFill>
-              </a:rPr>
-              <a:t>printed markers needed</a:t>
-            </a:r>
-          </a:p>
-        </p:txBody>
-      </p:sp>
-      <p:sp>
-        <p:nvSpPr>
-          <p:cNvPr id="16" name="TextBox 15"/>
-          <p:cNvSpPr txBox="1"/>
-          <p:nvPr/>
-        </p:nvSpPr>
-        <p:spPr>
-          <a:xfrm>
-            <a:off x="0" y="5120640"/>
-            <a:ext cx="12188952" cy="365760"/>
-          </a:xfrm>
-          <a:prstGeom prst="rect">
-            <a:avLst/>
-          </a:prstGeom>
-          <a:noFill/>
-        </p:spPr>
-        <p:txBody>
-          <a:bodyPr wrap="square">
-            <a:spAutoFit/>
-          </a:bodyPr>
-          <a:lstStyle/>
-          <a:p>
-            <a:pPr algn="ctr"/>
-            <a:r>
-              <a:rPr sz="1200" b="0" i="0">
-                <a:solidFill>
-                  <a:srgbClr val="86868B"/>
-                </a:solidFill>
-              </a:rPr>
-              <a:t>Sangeeth Deleep Menon  ·  CS5330 Spring 2026  ·  Northeastern University</a:t>
             </a:r>
           </a:p>
         </p:txBody>
@@ -3901,8 +3317,8 @@
         </p:nvSpPr>
         <p:spPr>
           <a:xfrm>
-            <a:off x="0" y="411480"/>
-            <a:ext cx="12188952" cy="365760"/>
+            <a:off x="0" y="365760"/>
+            <a:ext cx="12188952" cy="320040"/>
           </a:xfrm>
           <a:prstGeom prst="rect">
             <a:avLst/>
@@ -3922,7 +3338,7 @@
                   <a:srgbClr val="2997FF"/>
                 </a:solidFill>
               </a:rPr>
-              <a:t>THE PROBLEM</a:t>
+              <a:t>MOTIVATION</a:t>
             </a:r>
           </a:p>
         </p:txBody>
@@ -3936,7 +3352,7 @@
         <p:spPr>
           <a:xfrm>
             <a:off x="457200" y="777240"/>
-            <a:ext cx="11274552" cy="1097280"/>
+            <a:ext cx="11274552" cy="1280160"/>
           </a:xfrm>
           <a:prstGeom prst="rect">
             <a:avLst/>
@@ -3970,8 +3386,8 @@
         </p:nvSpPr>
         <p:spPr>
           <a:xfrm>
-            <a:off x="914400" y="2103120"/>
-            <a:ext cx="4572000" cy="1371600"/>
+            <a:off x="914400" y="2194560"/>
+            <a:ext cx="4572000" cy="1417320"/>
           </a:xfrm>
           <a:prstGeom prst="rect">
             <a:avLst/>
@@ -4015,8 +3431,8 @@
         </p:nvSpPr>
         <p:spPr>
           <a:xfrm>
-            <a:off x="1051560" y="2240279"/>
-            <a:ext cx="4297680" cy="228600"/>
+            <a:off x="1042416" y="2304288"/>
+            <a:ext cx="4315968" cy="237744"/>
           </a:xfrm>
           <a:prstGeom prst="rect">
             <a:avLst/>
@@ -4049,8 +3465,8 @@
         </p:nvSpPr>
         <p:spPr>
           <a:xfrm>
-            <a:off x="1051560" y="2468879"/>
-            <a:ext cx="4297680" cy="640080"/>
+            <a:off x="1042416" y="2560320"/>
+            <a:ext cx="4315968" cy="594360"/>
           </a:xfrm>
           <a:prstGeom prst="rect">
             <a:avLst/>
@@ -4083,8 +3499,8 @@
         </p:nvSpPr>
         <p:spPr>
           <a:xfrm>
-            <a:off x="1051560" y="3063239"/>
-            <a:ext cx="4297680" cy="457200"/>
+            <a:off x="1042416" y="3182112"/>
+            <a:ext cx="4315968" cy="338328"/>
           </a:xfrm>
           <a:prstGeom prst="rect">
             <a:avLst/>
@@ -4104,7 +3520,7 @@
                   <a:srgbClr val="86868B"/>
                 </a:solidFill>
               </a:rPr>
-              <a:t>3D graphics overlaid using a chessboard calibration target</a:t>
+              <a:t>3D graphics overlaid using a chessboard calibration target to estimate camera pose</a:t>
             </a:r>
           </a:p>
         </p:txBody>
@@ -4117,8 +3533,8 @@
         </p:nvSpPr>
         <p:spPr>
           <a:xfrm>
-            <a:off x="5943600" y="2103120"/>
-            <a:ext cx="4572000" cy="1371600"/>
+            <a:off x="5943600" y="2194560"/>
+            <a:ext cx="4572000" cy="1417320"/>
           </a:xfrm>
           <a:prstGeom prst="rect">
             <a:avLst/>
@@ -4162,8 +3578,8 @@
         </p:nvSpPr>
         <p:spPr>
           <a:xfrm>
-            <a:off x="6080760" y="2240279"/>
-            <a:ext cx="4297680" cy="228600"/>
+            <a:off x="6071616" y="2304288"/>
+            <a:ext cx="4315968" cy="237744"/>
           </a:xfrm>
           <a:prstGeom prst="rect">
             <a:avLst/>
@@ -4196,8 +3612,8 @@
         </p:nvSpPr>
         <p:spPr>
           <a:xfrm>
-            <a:off x="6080760" y="2468879"/>
-            <a:ext cx="4297680" cy="640080"/>
+            <a:off x="6071616" y="2560320"/>
+            <a:ext cx="4315968" cy="594360"/>
           </a:xfrm>
           <a:prstGeom prst="rect">
             <a:avLst/>
@@ -4230,8 +3646,8 @@
         </p:nvSpPr>
         <p:spPr>
           <a:xfrm>
-            <a:off x="6080760" y="3063239"/>
-            <a:ext cx="4297680" cy="457200"/>
+            <a:off x="6071616" y="3182112"/>
+            <a:ext cx="4315968" cy="338328"/>
           </a:xfrm>
           <a:prstGeom prst="rect">
             <a:avLst/>
@@ -4251,7 +3667,7 @@
                   <a:srgbClr val="86868B"/>
                 </a:solidFill>
               </a:rPr>
-              <a:t>CNNs and Vision Transformers trained to classify images</a:t>
+              <a:t>CNNs and Vision Transformers trained to classify images from a camera</a:t>
             </a:r>
           </a:p>
         </p:txBody>
@@ -4264,7 +3680,7 @@
         </p:nvSpPr>
         <p:spPr>
           <a:xfrm>
-            <a:off x="914400" y="3749039"/>
+            <a:off x="914400" y="3840480"/>
             <a:ext cx="10360152" cy="685800"/>
           </a:xfrm>
           <a:prstGeom prst="rect">
@@ -4309,7 +3725,7 @@
         </p:nvSpPr>
         <p:spPr>
           <a:xfrm>
-            <a:off x="914400" y="3794760"/>
+            <a:off x="914400" y="3913632"/>
             <a:ext cx="10360152" cy="548640"/>
           </a:xfrm>
           <a:prstGeom prst="rect">
@@ -4330,7 +3746,7 @@
                   <a:srgbClr val="2997FF"/>
                 </a:solidFill>
               </a:rPr>
-              <a:t>This project combines both — no marker required</a:t>
+              <a:t>This project combines both. No marker required.</a:t>
             </a:r>
           </a:p>
         </p:txBody>
@@ -4369,8 +3785,8 @@
         </p:nvSpPr>
         <p:spPr>
           <a:xfrm>
-            <a:off x="0" y="411480"/>
-            <a:ext cx="12188952" cy="365760"/>
+            <a:off x="0" y="365760"/>
+            <a:ext cx="12188952" cy="320040"/>
           </a:xfrm>
           <a:prstGeom prst="rect">
             <a:avLst/>
@@ -4390,7 +3806,7 @@
                   <a:srgbClr val="2997FF"/>
                 </a:solidFill>
               </a:rPr>
-              <a:t>SYSTEM OVERVIEW</a:t>
+              <a:t>DATA AND PIPELINE</a:t>
             </a:r>
           </a:p>
         </p:txBody>
@@ -4403,7 +3819,7 @@
         </p:nvSpPr>
         <p:spPr>
           <a:xfrm>
-            <a:off x="457200" y="777240"/>
+            <a:off x="457200" y="749808"/>
             <a:ext cx="11274552" cy="914400"/>
           </a:xfrm>
           <a:prstGeom prst="rect">
@@ -4419,25 +3835,1147 @@
           <a:p>
             <a:pPr algn="ctr"/>
             <a:r>
-              <a:rPr sz="3600" b="1" i="0">
+              <a:rPr sz="2800" b="1" i="0">
                 <a:solidFill>
                   <a:srgbClr val="F5F5F7"/>
                 </a:solidFill>
               </a:rPr>
-              <a:t>A three-step pipeline</a:t>
-            </a:r>
-          </a:p>
-        </p:txBody>
-      </p:sp>
-      <p:sp>
-        <p:nvSpPr>
-          <p:cNvPr id="4" name="Oval 3"/>
+              <a:t>10 classes  ·  1419 images  ·  4-step pipeline</a:t>
+            </a:r>
+          </a:p>
+        </p:txBody>
+      </p:sp>
+      <p:sp>
+        <p:nvSpPr>
+          <p:cNvPr id="4" name="TextBox 3"/>
+          <p:cNvSpPr txBox="1"/>
+          <p:nvPr/>
+        </p:nvSpPr>
+        <p:spPr>
+          <a:xfrm>
+            <a:off x="365760" y="1664208"/>
+            <a:ext cx="2743200" cy="256032"/>
+          </a:xfrm>
+          <a:prstGeom prst="rect">
+            <a:avLst/>
+          </a:prstGeom>
+          <a:noFill/>
+        </p:spPr>
+        <p:txBody>
+          <a:bodyPr wrap="square">
+            <a:spAutoFit/>
+          </a:bodyPr>
+          <a:lstStyle/>
+          <a:p>
+            <a:pPr algn="l"/>
+            <a:r>
+              <a:rPr sz="900" b="1" i="0">
+                <a:solidFill>
+                  <a:srgbClr val="86868B"/>
+                </a:solidFill>
+              </a:rPr>
+              <a:t>CLASS</a:t>
+            </a:r>
+          </a:p>
+        </p:txBody>
+      </p:sp>
+      <p:sp>
+        <p:nvSpPr>
+          <p:cNvPr id="5" name="TextBox 4"/>
+          <p:cNvSpPr txBox="1"/>
+          <p:nvPr/>
+        </p:nvSpPr>
+        <p:spPr>
+          <a:xfrm>
+            <a:off x="3200400" y="1664208"/>
+            <a:ext cx="914400" cy="256032"/>
+          </a:xfrm>
+          <a:prstGeom prst="rect">
+            <a:avLst/>
+          </a:prstGeom>
+          <a:noFill/>
+        </p:spPr>
+        <p:txBody>
+          <a:bodyPr wrap="square">
+            <a:spAutoFit/>
+          </a:bodyPr>
+          <a:lstStyle/>
+          <a:p>
+            <a:pPr algn="l"/>
+            <a:r>
+              <a:rPr sz="900" b="1" i="0">
+                <a:solidFill>
+                  <a:srgbClr val="86868B"/>
+                </a:solidFill>
+              </a:rPr>
+              <a:t>IMAGES</a:t>
+            </a:r>
+          </a:p>
+        </p:txBody>
+      </p:sp>
+      <p:sp>
+        <p:nvSpPr>
+          <p:cNvPr id="6" name="TextBox 5"/>
+          <p:cNvSpPr txBox="1"/>
+          <p:nvPr/>
+        </p:nvSpPr>
+        <p:spPr>
+          <a:xfrm>
+            <a:off x="4206240" y="1664208"/>
+            <a:ext cx="1371600" cy="256032"/>
+          </a:xfrm>
+          <a:prstGeom prst="rect">
+            <a:avLst/>
+          </a:prstGeom>
+          <a:noFill/>
+        </p:spPr>
+        <p:txBody>
+          <a:bodyPr wrap="square">
+            <a:spAutoFit/>
+          </a:bodyPr>
+          <a:lstStyle/>
+          <a:p>
+            <a:pPr algn="l"/>
+            <a:r>
+              <a:rPr sz="900" b="1" i="0">
+                <a:solidFill>
+                  <a:srgbClr val="86868B"/>
+                </a:solidFill>
+              </a:rPr>
+              <a:t>SOURCE</a:t>
+            </a:r>
+          </a:p>
+        </p:txBody>
+      </p:sp>
+      <p:sp>
+        <p:nvSpPr>
+          <p:cNvPr id="7" name="TextBox 6"/>
+          <p:cNvSpPr txBox="1"/>
+          <p:nvPr/>
+        </p:nvSpPr>
+        <p:spPr>
+          <a:xfrm>
+            <a:off x="365760" y="1938528"/>
+            <a:ext cx="2743200" cy="310896"/>
+          </a:xfrm>
+          <a:prstGeom prst="rect">
+            <a:avLst/>
+          </a:prstGeom>
+          <a:noFill/>
+        </p:spPr>
+        <p:txBody>
+          <a:bodyPr wrap="square">
+            <a:spAutoFit/>
+          </a:bodyPr>
+          <a:lstStyle/>
+          <a:p>
+            <a:pPr algn="l"/>
+            <a:r>
+              <a:rPr sz="1200" b="0" i="0">
+                <a:solidFill>
+                  <a:srgbClr val="F5F5F7"/>
+                </a:solidFill>
+              </a:rPr>
+              <a:t>book</a:t>
+            </a:r>
+          </a:p>
+        </p:txBody>
+      </p:sp>
+      <p:sp>
+        <p:nvSpPr>
+          <p:cNvPr id="8" name="TextBox 7"/>
+          <p:cNvSpPr txBox="1"/>
+          <p:nvPr/>
+        </p:nvSpPr>
+        <p:spPr>
+          <a:xfrm>
+            <a:off x="3200400" y="1938528"/>
+            <a:ext cx="914400" cy="310896"/>
+          </a:xfrm>
+          <a:prstGeom prst="rect">
+            <a:avLst/>
+          </a:prstGeom>
+          <a:noFill/>
+        </p:spPr>
+        <p:txBody>
+          <a:bodyPr wrap="square">
+            <a:spAutoFit/>
+          </a:bodyPr>
+          <a:lstStyle/>
+          <a:p>
+            <a:pPr algn="l"/>
+            <a:r>
+              <a:rPr sz="1200" b="0" i="0">
+                <a:solidFill>
+                  <a:srgbClr val="F5F5F7"/>
+                </a:solidFill>
+              </a:rPr>
+              <a:t>161</a:t>
+            </a:r>
+          </a:p>
+        </p:txBody>
+      </p:sp>
+      <p:sp>
+        <p:nvSpPr>
+          <p:cNvPr id="9" name="TextBox 8"/>
+          <p:cNvSpPr txBox="1"/>
+          <p:nvPr/>
+        </p:nvSpPr>
+        <p:spPr>
+          <a:xfrm>
+            <a:off x="4206240" y="1938528"/>
+            <a:ext cx="1371600" cy="310896"/>
+          </a:xfrm>
+          <a:prstGeom prst="rect">
+            <a:avLst/>
+          </a:prstGeom>
+          <a:noFill/>
+        </p:spPr>
+        <p:txBody>
+          <a:bodyPr wrap="square">
+            <a:spAutoFit/>
+          </a:bodyPr>
+          <a:lstStyle/>
+          <a:p>
+            <a:pPr algn="l"/>
+            <a:r>
+              <a:rPr sz="1100" b="1" i="0">
+                <a:solidFill>
+                  <a:srgbClr val="30D158"/>
+                </a:solidFill>
+              </a:rPr>
+              <a:t>Webcam</a:t>
+            </a:r>
+          </a:p>
+        </p:txBody>
+      </p:sp>
+      <p:sp>
+        <p:nvSpPr>
+          <p:cNvPr id="10" name="TextBox 9"/>
+          <p:cNvSpPr txBox="1"/>
+          <p:nvPr/>
+        </p:nvSpPr>
+        <p:spPr>
+          <a:xfrm>
+            <a:off x="365760" y="2276856"/>
+            <a:ext cx="2743200" cy="310896"/>
+          </a:xfrm>
+          <a:prstGeom prst="rect">
+            <a:avLst/>
+          </a:prstGeom>
+          <a:noFill/>
+        </p:spPr>
+        <p:txBody>
+          <a:bodyPr wrap="square">
+            <a:spAutoFit/>
+          </a:bodyPr>
+          <a:lstStyle/>
+          <a:p>
+            <a:pPr algn="l"/>
+            <a:r>
+              <a:rPr sz="1200" b="0" i="0">
+                <a:solidFill>
+                  <a:srgbClr val="F5F5F7"/>
+                </a:solidFill>
+              </a:rPr>
+              <a:t>cup</a:t>
+            </a:r>
+          </a:p>
+        </p:txBody>
+      </p:sp>
+      <p:sp>
+        <p:nvSpPr>
+          <p:cNvPr id="11" name="TextBox 10"/>
+          <p:cNvSpPr txBox="1"/>
+          <p:nvPr/>
+        </p:nvSpPr>
+        <p:spPr>
+          <a:xfrm>
+            <a:off x="3200400" y="2276856"/>
+            <a:ext cx="914400" cy="310896"/>
+          </a:xfrm>
+          <a:prstGeom prst="rect">
+            <a:avLst/>
+          </a:prstGeom>
+          <a:noFill/>
+        </p:spPr>
+        <p:txBody>
+          <a:bodyPr wrap="square">
+            <a:spAutoFit/>
+          </a:bodyPr>
+          <a:lstStyle/>
+          <a:p>
+            <a:pPr algn="l"/>
+            <a:r>
+              <a:rPr sz="1200" b="0" i="0">
+                <a:solidFill>
+                  <a:srgbClr val="F5F5F7"/>
+                </a:solidFill>
+              </a:rPr>
+              <a:t>173</a:t>
+            </a:r>
+          </a:p>
+        </p:txBody>
+      </p:sp>
+      <p:sp>
+        <p:nvSpPr>
+          <p:cNvPr id="12" name="TextBox 11"/>
+          <p:cNvSpPr txBox="1"/>
+          <p:nvPr/>
+        </p:nvSpPr>
+        <p:spPr>
+          <a:xfrm>
+            <a:off x="4206240" y="2276856"/>
+            <a:ext cx="1371600" cy="310896"/>
+          </a:xfrm>
+          <a:prstGeom prst="rect">
+            <a:avLst/>
+          </a:prstGeom>
+          <a:noFill/>
+        </p:spPr>
+        <p:txBody>
+          <a:bodyPr wrap="square">
+            <a:spAutoFit/>
+          </a:bodyPr>
+          <a:lstStyle/>
+          <a:p>
+            <a:pPr algn="l"/>
+            <a:r>
+              <a:rPr sz="1100" b="1" i="0">
+                <a:solidFill>
+                  <a:srgbClr val="30D158"/>
+                </a:solidFill>
+              </a:rPr>
+              <a:t>Webcam</a:t>
+            </a:r>
+          </a:p>
+        </p:txBody>
+      </p:sp>
+      <p:sp>
+        <p:nvSpPr>
+          <p:cNvPr id="13" name="TextBox 12"/>
+          <p:cNvSpPr txBox="1"/>
+          <p:nvPr/>
+        </p:nvSpPr>
+        <p:spPr>
+          <a:xfrm>
+            <a:off x="365760" y="2615184"/>
+            <a:ext cx="2743200" cy="310896"/>
+          </a:xfrm>
+          <a:prstGeom prst="rect">
+            <a:avLst/>
+          </a:prstGeom>
+          <a:noFill/>
+        </p:spPr>
+        <p:txBody>
+          <a:bodyPr wrap="square">
+            <a:spAutoFit/>
+          </a:bodyPr>
+          <a:lstStyle/>
+          <a:p>
+            <a:pPr algn="l"/>
+            <a:r>
+              <a:rPr sz="1200" b="0" i="0">
+                <a:solidFill>
+                  <a:srgbClr val="F5F5F7"/>
+                </a:solidFill>
+              </a:rPr>
+              <a:t>keyboard</a:t>
+            </a:r>
+          </a:p>
+        </p:txBody>
+      </p:sp>
+      <p:sp>
+        <p:nvSpPr>
+          <p:cNvPr id="14" name="TextBox 13"/>
+          <p:cNvSpPr txBox="1"/>
+          <p:nvPr/>
+        </p:nvSpPr>
+        <p:spPr>
+          <a:xfrm>
+            <a:off x="3200400" y="2615184"/>
+            <a:ext cx="914400" cy="310896"/>
+          </a:xfrm>
+          <a:prstGeom prst="rect">
+            <a:avLst/>
+          </a:prstGeom>
+          <a:noFill/>
+        </p:spPr>
+        <p:txBody>
+          <a:bodyPr wrap="square">
+            <a:spAutoFit/>
+          </a:bodyPr>
+          <a:lstStyle/>
+          <a:p>
+            <a:pPr algn="l"/>
+            <a:r>
+              <a:rPr sz="1200" b="0" i="0">
+                <a:solidFill>
+                  <a:srgbClr val="F5F5F7"/>
+                </a:solidFill>
+              </a:rPr>
+              <a:t>152</a:t>
+            </a:r>
+          </a:p>
+        </p:txBody>
+      </p:sp>
+      <p:sp>
+        <p:nvSpPr>
+          <p:cNvPr id="15" name="TextBox 14"/>
+          <p:cNvSpPr txBox="1"/>
+          <p:nvPr/>
+        </p:nvSpPr>
+        <p:spPr>
+          <a:xfrm>
+            <a:off x="4206240" y="2615184"/>
+            <a:ext cx="1371600" cy="310896"/>
+          </a:xfrm>
+          <a:prstGeom prst="rect">
+            <a:avLst/>
+          </a:prstGeom>
+          <a:noFill/>
+        </p:spPr>
+        <p:txBody>
+          <a:bodyPr wrap="square">
+            <a:spAutoFit/>
+          </a:bodyPr>
+          <a:lstStyle/>
+          <a:p>
+            <a:pPr algn="l"/>
+            <a:r>
+              <a:rPr sz="1100" b="1" i="0">
+                <a:solidFill>
+                  <a:srgbClr val="30D158"/>
+                </a:solidFill>
+              </a:rPr>
+              <a:t>Webcam</a:t>
+            </a:r>
+          </a:p>
+        </p:txBody>
+      </p:sp>
+      <p:sp>
+        <p:nvSpPr>
+          <p:cNvPr id="16" name="TextBox 15"/>
+          <p:cNvSpPr txBox="1"/>
+          <p:nvPr/>
+        </p:nvSpPr>
+        <p:spPr>
+          <a:xfrm>
+            <a:off x="365760" y="2953512"/>
+            <a:ext cx="2743200" cy="310896"/>
+          </a:xfrm>
+          <a:prstGeom prst="rect">
+            <a:avLst/>
+          </a:prstGeom>
+          <a:noFill/>
+        </p:spPr>
+        <p:txBody>
+          <a:bodyPr wrap="square">
+            <a:spAutoFit/>
+          </a:bodyPr>
+          <a:lstStyle/>
+          <a:p>
+            <a:pPr algn="l"/>
+            <a:r>
+              <a:rPr sz="1200" b="0" i="0">
+                <a:solidFill>
+                  <a:srgbClr val="F5F5F7"/>
+                </a:solidFill>
+              </a:rPr>
+              <a:t>pen</a:t>
+            </a:r>
+          </a:p>
+        </p:txBody>
+      </p:sp>
+      <p:sp>
+        <p:nvSpPr>
+          <p:cNvPr id="17" name="TextBox 16"/>
+          <p:cNvSpPr txBox="1"/>
+          <p:nvPr/>
+        </p:nvSpPr>
+        <p:spPr>
+          <a:xfrm>
+            <a:off x="3200400" y="2953512"/>
+            <a:ext cx="914400" cy="310896"/>
+          </a:xfrm>
+          <a:prstGeom prst="rect">
+            <a:avLst/>
+          </a:prstGeom>
+          <a:noFill/>
+        </p:spPr>
+        <p:txBody>
+          <a:bodyPr wrap="square">
+            <a:spAutoFit/>
+          </a:bodyPr>
+          <a:lstStyle/>
+          <a:p>
+            <a:pPr algn="l"/>
+            <a:r>
+              <a:rPr sz="1200" b="0" i="0">
+                <a:solidFill>
+                  <a:srgbClr val="F5F5F7"/>
+                </a:solidFill>
+              </a:rPr>
+              <a:t>171</a:t>
+            </a:r>
+          </a:p>
+        </p:txBody>
+      </p:sp>
+      <p:sp>
+        <p:nvSpPr>
+          <p:cNvPr id="18" name="TextBox 17"/>
+          <p:cNvSpPr txBox="1"/>
+          <p:nvPr/>
+        </p:nvSpPr>
+        <p:spPr>
+          <a:xfrm>
+            <a:off x="4206240" y="2953512"/>
+            <a:ext cx="1371600" cy="310896"/>
+          </a:xfrm>
+          <a:prstGeom prst="rect">
+            <a:avLst/>
+          </a:prstGeom>
+          <a:noFill/>
+        </p:spPr>
+        <p:txBody>
+          <a:bodyPr wrap="square">
+            <a:spAutoFit/>
+          </a:bodyPr>
+          <a:lstStyle/>
+          <a:p>
+            <a:pPr algn="l"/>
+            <a:r>
+              <a:rPr sz="1100" b="1" i="0">
+                <a:solidFill>
+                  <a:srgbClr val="30D158"/>
+                </a:solidFill>
+              </a:rPr>
+              <a:t>Webcam</a:t>
+            </a:r>
+          </a:p>
+        </p:txBody>
+      </p:sp>
+      <p:sp>
+        <p:nvSpPr>
+          <p:cNvPr id="19" name="TextBox 18"/>
+          <p:cNvSpPr txBox="1"/>
+          <p:nvPr/>
+        </p:nvSpPr>
+        <p:spPr>
+          <a:xfrm>
+            <a:off x="365760" y="3291840"/>
+            <a:ext cx="2743200" cy="310896"/>
+          </a:xfrm>
+          <a:prstGeom prst="rect">
+            <a:avLst/>
+          </a:prstGeom>
+          <a:noFill/>
+        </p:spPr>
+        <p:txBody>
+          <a:bodyPr wrap="square">
+            <a:spAutoFit/>
+          </a:bodyPr>
+          <a:lstStyle/>
+          <a:p>
+            <a:pPr algn="l"/>
+            <a:r>
+              <a:rPr sz="1200" b="0" i="0">
+                <a:solidFill>
+                  <a:srgbClr val="F5F5F7"/>
+                </a:solidFill>
+              </a:rPr>
+              <a:t>phone</a:t>
+            </a:r>
+          </a:p>
+        </p:txBody>
+      </p:sp>
+      <p:sp>
+        <p:nvSpPr>
+          <p:cNvPr id="20" name="TextBox 19"/>
+          <p:cNvSpPr txBox="1"/>
+          <p:nvPr/>
+        </p:nvSpPr>
+        <p:spPr>
+          <a:xfrm>
+            <a:off x="3200400" y="3291840"/>
+            <a:ext cx="914400" cy="310896"/>
+          </a:xfrm>
+          <a:prstGeom prst="rect">
+            <a:avLst/>
+          </a:prstGeom>
+          <a:noFill/>
+        </p:spPr>
+        <p:txBody>
+          <a:bodyPr wrap="square">
+            <a:spAutoFit/>
+          </a:bodyPr>
+          <a:lstStyle/>
+          <a:p>
+            <a:pPr algn="l"/>
+            <a:r>
+              <a:rPr sz="1200" b="0" i="0">
+                <a:solidFill>
+                  <a:srgbClr val="F5F5F7"/>
+                </a:solidFill>
+              </a:rPr>
+              <a:t>159</a:t>
+            </a:r>
+          </a:p>
+        </p:txBody>
+      </p:sp>
+      <p:sp>
+        <p:nvSpPr>
+          <p:cNvPr id="21" name="TextBox 20"/>
+          <p:cNvSpPr txBox="1"/>
+          <p:nvPr/>
+        </p:nvSpPr>
+        <p:spPr>
+          <a:xfrm>
+            <a:off x="4206240" y="3291840"/>
+            <a:ext cx="1371600" cy="310896"/>
+          </a:xfrm>
+          <a:prstGeom prst="rect">
+            <a:avLst/>
+          </a:prstGeom>
+          <a:noFill/>
+        </p:spPr>
+        <p:txBody>
+          <a:bodyPr wrap="square">
+            <a:spAutoFit/>
+          </a:bodyPr>
+          <a:lstStyle/>
+          <a:p>
+            <a:pPr algn="l"/>
+            <a:r>
+              <a:rPr sz="1100" b="1" i="0">
+                <a:solidFill>
+                  <a:srgbClr val="30D158"/>
+                </a:solidFill>
+              </a:rPr>
+              <a:t>Webcam</a:t>
+            </a:r>
+          </a:p>
+        </p:txBody>
+      </p:sp>
+      <p:sp>
+        <p:nvSpPr>
+          <p:cNvPr id="22" name="TextBox 21"/>
+          <p:cNvSpPr txBox="1"/>
+          <p:nvPr/>
+        </p:nvSpPr>
+        <p:spPr>
+          <a:xfrm>
+            <a:off x="365760" y="3630168"/>
+            <a:ext cx="2743200" cy="310896"/>
+          </a:xfrm>
+          <a:prstGeom prst="rect">
+            <a:avLst/>
+          </a:prstGeom>
+          <a:noFill/>
+        </p:spPr>
+        <p:txBody>
+          <a:bodyPr wrap="square">
+            <a:spAutoFit/>
+          </a:bodyPr>
+          <a:lstStyle/>
+          <a:p>
+            <a:pPr algn="l"/>
+            <a:r>
+              <a:rPr sz="1200" b="0" i="0">
+                <a:solidFill>
+                  <a:srgbClr val="F5F5F7"/>
+                </a:solidFill>
+              </a:rPr>
+              <a:t>glasses</a:t>
+            </a:r>
+          </a:p>
+        </p:txBody>
+      </p:sp>
+      <p:sp>
+        <p:nvSpPr>
+          <p:cNvPr id="23" name="TextBox 22"/>
+          <p:cNvSpPr txBox="1"/>
+          <p:nvPr/>
+        </p:nvSpPr>
+        <p:spPr>
+          <a:xfrm>
+            <a:off x="3200400" y="3630168"/>
+            <a:ext cx="914400" cy="310896"/>
+          </a:xfrm>
+          <a:prstGeom prst="rect">
+            <a:avLst/>
+          </a:prstGeom>
+          <a:noFill/>
+        </p:spPr>
+        <p:txBody>
+          <a:bodyPr wrap="square">
+            <a:spAutoFit/>
+          </a:bodyPr>
+          <a:lstStyle/>
+          <a:p>
+            <a:pPr algn="l"/>
+            <a:r>
+              <a:rPr sz="1200" b="0" i="0">
+                <a:solidFill>
+                  <a:srgbClr val="F5F5F7"/>
+                </a:solidFill>
+              </a:rPr>
+              <a:t>130</a:t>
+            </a:r>
+          </a:p>
+        </p:txBody>
+      </p:sp>
+      <p:sp>
+        <p:nvSpPr>
+          <p:cNvPr id="24" name="TextBox 23"/>
+          <p:cNvSpPr txBox="1"/>
+          <p:nvPr/>
+        </p:nvSpPr>
+        <p:spPr>
+          <a:xfrm>
+            <a:off x="4206240" y="3630168"/>
+            <a:ext cx="1371600" cy="310896"/>
+          </a:xfrm>
+          <a:prstGeom prst="rect">
+            <a:avLst/>
+          </a:prstGeom>
+          <a:noFill/>
+        </p:spPr>
+        <p:txBody>
+          <a:bodyPr wrap="square">
+            <a:spAutoFit/>
+          </a:bodyPr>
+          <a:lstStyle/>
+          <a:p>
+            <a:pPr algn="l"/>
+            <a:r>
+              <a:rPr sz="1100" b="1" i="0">
+                <a:solidFill>
+                  <a:srgbClr val="86868B"/>
+                </a:solidFill>
+              </a:rPr>
+              <a:t>Web</a:t>
+            </a:r>
+          </a:p>
+        </p:txBody>
+      </p:sp>
+      <p:sp>
+        <p:nvSpPr>
+          <p:cNvPr id="25" name="TextBox 24"/>
+          <p:cNvSpPr txBox="1"/>
+          <p:nvPr/>
+        </p:nvSpPr>
+        <p:spPr>
+          <a:xfrm>
+            <a:off x="365760" y="3968496"/>
+            <a:ext cx="2743200" cy="310896"/>
+          </a:xfrm>
+          <a:prstGeom prst="rect">
+            <a:avLst/>
+          </a:prstGeom>
+          <a:noFill/>
+        </p:spPr>
+        <p:txBody>
+          <a:bodyPr wrap="square">
+            <a:spAutoFit/>
+          </a:bodyPr>
+          <a:lstStyle/>
+          <a:p>
+            <a:pPr algn="l"/>
+            <a:r>
+              <a:rPr sz="1200" b="0" i="0">
+                <a:solidFill>
+                  <a:srgbClr val="F5F5F7"/>
+                </a:solidFill>
+              </a:rPr>
+              <a:t>headphones</a:t>
+            </a:r>
+          </a:p>
+        </p:txBody>
+      </p:sp>
+      <p:sp>
+        <p:nvSpPr>
+          <p:cNvPr id="26" name="TextBox 25"/>
+          <p:cNvSpPr txBox="1"/>
+          <p:nvPr/>
+        </p:nvSpPr>
+        <p:spPr>
+          <a:xfrm>
+            <a:off x="3200400" y="3968496"/>
+            <a:ext cx="914400" cy="310896"/>
+          </a:xfrm>
+          <a:prstGeom prst="rect">
+            <a:avLst/>
+          </a:prstGeom>
+          <a:noFill/>
+        </p:spPr>
+        <p:txBody>
+          <a:bodyPr wrap="square">
+            <a:spAutoFit/>
+          </a:bodyPr>
+          <a:lstStyle/>
+          <a:p>
+            <a:pPr algn="l"/>
+            <a:r>
+              <a:rPr sz="1200" b="0" i="0">
+                <a:solidFill>
+                  <a:srgbClr val="F5F5F7"/>
+                </a:solidFill>
+              </a:rPr>
+              <a:t>110</a:t>
+            </a:r>
+          </a:p>
+        </p:txBody>
+      </p:sp>
+      <p:sp>
+        <p:nvSpPr>
+          <p:cNvPr id="27" name="TextBox 26"/>
+          <p:cNvSpPr txBox="1"/>
+          <p:nvPr/>
+        </p:nvSpPr>
+        <p:spPr>
+          <a:xfrm>
+            <a:off x="4206240" y="3968496"/>
+            <a:ext cx="1371600" cy="310896"/>
+          </a:xfrm>
+          <a:prstGeom prst="rect">
+            <a:avLst/>
+          </a:prstGeom>
+          <a:noFill/>
+        </p:spPr>
+        <p:txBody>
+          <a:bodyPr wrap="square">
+            <a:spAutoFit/>
+          </a:bodyPr>
+          <a:lstStyle/>
+          <a:p>
+            <a:pPr algn="l"/>
+            <a:r>
+              <a:rPr sz="1100" b="1" i="0">
+                <a:solidFill>
+                  <a:srgbClr val="86868B"/>
+                </a:solidFill>
+              </a:rPr>
+              <a:t>Web</a:t>
+            </a:r>
+          </a:p>
+        </p:txBody>
+      </p:sp>
+      <p:sp>
+        <p:nvSpPr>
+          <p:cNvPr id="28" name="TextBox 27"/>
+          <p:cNvSpPr txBox="1"/>
+          <p:nvPr/>
+        </p:nvSpPr>
+        <p:spPr>
+          <a:xfrm>
+            <a:off x="365760" y="4306824"/>
+            <a:ext cx="2743200" cy="310896"/>
+          </a:xfrm>
+          <a:prstGeom prst="rect">
+            <a:avLst/>
+          </a:prstGeom>
+          <a:noFill/>
+        </p:spPr>
+        <p:txBody>
+          <a:bodyPr wrap="square">
+            <a:spAutoFit/>
+          </a:bodyPr>
+          <a:lstStyle/>
+          <a:p>
+            <a:pPr algn="l"/>
+            <a:r>
+              <a:rPr sz="1200" b="0" i="0">
+                <a:solidFill>
+                  <a:srgbClr val="F5F5F7"/>
+                </a:solidFill>
+              </a:rPr>
+              <a:t>laptop</a:t>
+            </a:r>
+          </a:p>
+        </p:txBody>
+      </p:sp>
+      <p:sp>
+        <p:nvSpPr>
+          <p:cNvPr id="29" name="TextBox 28"/>
+          <p:cNvSpPr txBox="1"/>
+          <p:nvPr/>
+        </p:nvSpPr>
+        <p:spPr>
+          <a:xfrm>
+            <a:off x="3200400" y="4306824"/>
+            <a:ext cx="914400" cy="310896"/>
+          </a:xfrm>
+          <a:prstGeom prst="rect">
+            <a:avLst/>
+          </a:prstGeom>
+          <a:noFill/>
+        </p:spPr>
+        <p:txBody>
+          <a:bodyPr wrap="square">
+            <a:spAutoFit/>
+          </a:bodyPr>
+          <a:lstStyle/>
+          <a:p>
+            <a:pPr algn="l"/>
+            <a:r>
+              <a:rPr sz="1200" b="0" i="0">
+                <a:solidFill>
+                  <a:srgbClr val="F5F5F7"/>
+                </a:solidFill>
+              </a:rPr>
+              <a:t>123</a:t>
+            </a:r>
+          </a:p>
+        </p:txBody>
+      </p:sp>
+      <p:sp>
+        <p:nvSpPr>
+          <p:cNvPr id="30" name="TextBox 29"/>
+          <p:cNvSpPr txBox="1"/>
+          <p:nvPr/>
+        </p:nvSpPr>
+        <p:spPr>
+          <a:xfrm>
+            <a:off x="4206240" y="4306824"/>
+            <a:ext cx="1371600" cy="310896"/>
+          </a:xfrm>
+          <a:prstGeom prst="rect">
+            <a:avLst/>
+          </a:prstGeom>
+          <a:noFill/>
+        </p:spPr>
+        <p:txBody>
+          <a:bodyPr wrap="square">
+            <a:spAutoFit/>
+          </a:bodyPr>
+          <a:lstStyle/>
+          <a:p>
+            <a:pPr algn="l"/>
+            <a:r>
+              <a:rPr sz="1100" b="1" i="0">
+                <a:solidFill>
+                  <a:srgbClr val="86868B"/>
+                </a:solidFill>
+              </a:rPr>
+              <a:t>Web</a:t>
+            </a:r>
+          </a:p>
+        </p:txBody>
+      </p:sp>
+      <p:sp>
+        <p:nvSpPr>
+          <p:cNvPr id="31" name="TextBox 30"/>
+          <p:cNvSpPr txBox="1"/>
+          <p:nvPr/>
+        </p:nvSpPr>
+        <p:spPr>
+          <a:xfrm>
+            <a:off x="365760" y="4645152"/>
+            <a:ext cx="2743200" cy="310896"/>
+          </a:xfrm>
+          <a:prstGeom prst="rect">
+            <a:avLst/>
+          </a:prstGeom>
+          <a:noFill/>
+        </p:spPr>
+        <p:txBody>
+          <a:bodyPr wrap="square">
+            <a:spAutoFit/>
+          </a:bodyPr>
+          <a:lstStyle/>
+          <a:p>
+            <a:pPr algn="l"/>
+            <a:r>
+              <a:rPr sz="1200" b="0" i="0">
+                <a:solidFill>
+                  <a:srgbClr val="F5F5F7"/>
+                </a:solidFill>
+              </a:rPr>
+              <a:t>ps5_controller</a:t>
+            </a:r>
+          </a:p>
+        </p:txBody>
+      </p:sp>
+      <p:sp>
+        <p:nvSpPr>
+          <p:cNvPr id="32" name="TextBox 31"/>
+          <p:cNvSpPr txBox="1"/>
+          <p:nvPr/>
+        </p:nvSpPr>
+        <p:spPr>
+          <a:xfrm>
+            <a:off x="3200400" y="4645152"/>
+            <a:ext cx="914400" cy="310896"/>
+          </a:xfrm>
+          <a:prstGeom prst="rect">
+            <a:avLst/>
+          </a:prstGeom>
+          <a:noFill/>
+        </p:spPr>
+        <p:txBody>
+          <a:bodyPr wrap="square">
+            <a:spAutoFit/>
+          </a:bodyPr>
+          <a:lstStyle/>
+          <a:p>
+            <a:pPr algn="l"/>
+            <a:r>
+              <a:rPr sz="1200" b="0" i="0">
+                <a:solidFill>
+                  <a:srgbClr val="F5F5F7"/>
+                </a:solidFill>
+              </a:rPr>
+              <a:t>102</a:t>
+            </a:r>
+          </a:p>
+        </p:txBody>
+      </p:sp>
+      <p:sp>
+        <p:nvSpPr>
+          <p:cNvPr id="33" name="TextBox 32"/>
+          <p:cNvSpPr txBox="1"/>
+          <p:nvPr/>
+        </p:nvSpPr>
+        <p:spPr>
+          <a:xfrm>
+            <a:off x="4206240" y="4645152"/>
+            <a:ext cx="1371600" cy="310896"/>
+          </a:xfrm>
+          <a:prstGeom prst="rect">
+            <a:avLst/>
+          </a:prstGeom>
+          <a:noFill/>
+        </p:spPr>
+        <p:txBody>
+          <a:bodyPr wrap="square">
+            <a:spAutoFit/>
+          </a:bodyPr>
+          <a:lstStyle/>
+          <a:p>
+            <a:pPr algn="l"/>
+            <a:r>
+              <a:rPr sz="1100" b="1" i="0">
+                <a:solidFill>
+                  <a:srgbClr val="86868B"/>
+                </a:solidFill>
+              </a:rPr>
+              <a:t>Web</a:t>
+            </a:r>
+          </a:p>
+        </p:txBody>
+      </p:sp>
+      <p:sp>
+        <p:nvSpPr>
+          <p:cNvPr id="34" name="TextBox 33"/>
+          <p:cNvSpPr txBox="1"/>
+          <p:nvPr/>
+        </p:nvSpPr>
+        <p:spPr>
+          <a:xfrm>
+            <a:off x="365760" y="4983480"/>
+            <a:ext cx="2743200" cy="310896"/>
+          </a:xfrm>
+          <a:prstGeom prst="rect">
+            <a:avLst/>
+          </a:prstGeom>
+          <a:noFill/>
+        </p:spPr>
+        <p:txBody>
+          <a:bodyPr wrap="square">
+            <a:spAutoFit/>
+          </a:bodyPr>
+          <a:lstStyle/>
+          <a:p>
+            <a:pPr algn="l"/>
+            <a:r>
+              <a:rPr sz="1200" b="0" i="0">
+                <a:solidFill>
+                  <a:srgbClr val="F5F5F7"/>
+                </a:solidFill>
+              </a:rPr>
+              <a:t>tablet</a:t>
+            </a:r>
+          </a:p>
+        </p:txBody>
+      </p:sp>
+      <p:sp>
+        <p:nvSpPr>
+          <p:cNvPr id="35" name="TextBox 34"/>
+          <p:cNvSpPr txBox="1"/>
+          <p:nvPr/>
+        </p:nvSpPr>
+        <p:spPr>
+          <a:xfrm>
+            <a:off x="3200400" y="4983480"/>
+            <a:ext cx="914400" cy="310896"/>
+          </a:xfrm>
+          <a:prstGeom prst="rect">
+            <a:avLst/>
+          </a:prstGeom>
+          <a:noFill/>
+        </p:spPr>
+        <p:txBody>
+          <a:bodyPr wrap="square">
+            <a:spAutoFit/>
+          </a:bodyPr>
+          <a:lstStyle/>
+          <a:p>
+            <a:pPr algn="l"/>
+            <a:r>
+              <a:rPr sz="1200" b="0" i="0">
+                <a:solidFill>
+                  <a:srgbClr val="F5F5F7"/>
+                </a:solidFill>
+              </a:rPr>
+              <a:t>138</a:t>
+            </a:r>
+          </a:p>
+        </p:txBody>
+      </p:sp>
+      <p:sp>
+        <p:nvSpPr>
+          <p:cNvPr id="36" name="TextBox 35"/>
+          <p:cNvSpPr txBox="1"/>
+          <p:nvPr/>
+        </p:nvSpPr>
+        <p:spPr>
+          <a:xfrm>
+            <a:off x="4206240" y="4983480"/>
+            <a:ext cx="1371600" cy="310896"/>
+          </a:xfrm>
+          <a:prstGeom prst="rect">
+            <a:avLst/>
+          </a:prstGeom>
+          <a:noFill/>
+        </p:spPr>
+        <p:txBody>
+          <a:bodyPr wrap="square">
+            <a:spAutoFit/>
+          </a:bodyPr>
+          <a:lstStyle/>
+          <a:p>
+            <a:pPr algn="l"/>
+            <a:r>
+              <a:rPr sz="1100" b="1" i="0">
+                <a:solidFill>
+                  <a:srgbClr val="86868B"/>
+                </a:solidFill>
+              </a:rPr>
+              <a:t>Web</a:t>
+            </a:r>
+          </a:p>
+        </p:txBody>
+      </p:sp>
+      <p:sp>
+        <p:nvSpPr>
+          <p:cNvPr id="37" name="Oval 36"/>
           <p:cNvSpPr/>
           <p:nvPr/>
         </p:nvSpPr>
         <p:spPr>
           <a:xfrm>
-            <a:off x="1828800" y="1965960"/>
+            <a:off x="6126480" y="1728216"/>
             <a:ext cx="347472" cy="347472"/>
           </a:xfrm>
           <a:prstGeom prst="ellipse">
@@ -4474,13 +5012,13 @@
       </p:sp>
       <p:sp>
         <p:nvSpPr>
-          <p:cNvPr id="5" name="TextBox 4"/>
-          <p:cNvSpPr txBox="1"/>
-          <p:nvPr/>
-        </p:nvSpPr>
-        <p:spPr>
-          <a:xfrm>
-            <a:off x="1828800" y="1938528"/>
+          <p:cNvPr id="38" name="TextBox 37"/>
+          <p:cNvSpPr txBox="1"/>
+          <p:nvPr/>
+        </p:nvSpPr>
+        <p:spPr>
+          <a:xfrm>
+            <a:off x="6126480" y="1700784"/>
             <a:ext cx="347472" cy="347472"/>
           </a:xfrm>
           <a:prstGeom prst="rect">
@@ -4508,14 +5046,14 @@
       </p:sp>
       <p:sp>
         <p:nvSpPr>
-          <p:cNvPr id="6" name="TextBox 5"/>
-          <p:cNvSpPr txBox="1"/>
-          <p:nvPr/>
-        </p:nvSpPr>
-        <p:spPr>
-          <a:xfrm>
-            <a:off x="2331720" y="1920240"/>
-            <a:ext cx="7772400" cy="320040"/>
+          <p:cNvPr id="39" name="TextBox 38"/>
+          <p:cNvSpPr txBox="1"/>
+          <p:nvPr/>
+        </p:nvSpPr>
+        <p:spPr>
+          <a:xfrm>
+            <a:off x="6601968" y="1691640"/>
+            <a:ext cx="5212080" cy="310896"/>
           </a:xfrm>
           <a:prstGeom prst="rect">
             <a:avLst/>
@@ -4530,7 +5068,7 @@
           <a:p>
             <a:pPr algn="l"/>
             <a:r>
-              <a:rPr sz="1600" b="1" i="0">
+              <a:rPr sz="1500" b="1" i="0">
                 <a:solidFill>
                   <a:srgbClr val="F5F5F7"/>
                 </a:solidFill>
@@ -4542,14 +5080,14 @@
       </p:sp>
       <p:sp>
         <p:nvSpPr>
-          <p:cNvPr id="7" name="TextBox 6"/>
-          <p:cNvSpPr txBox="1"/>
-          <p:nvPr/>
-        </p:nvSpPr>
-        <p:spPr>
-          <a:xfrm>
-            <a:off x="2331720" y="2240280"/>
-            <a:ext cx="7772400" cy="502920"/>
+          <p:cNvPr id="40" name="TextBox 39"/>
+          <p:cNvSpPr txBox="1"/>
+          <p:nvPr/>
+        </p:nvSpPr>
+        <p:spPr>
+          <a:xfrm>
+            <a:off x="6601968" y="2020824"/>
+            <a:ext cx="5212080" cy="502920"/>
           </a:xfrm>
           <a:prstGeom prst="rect">
             <a:avLst/>
@@ -4564,25 +5102,25 @@
           <a:p>
             <a:pPr algn="l"/>
             <a:r>
-              <a:rPr sz="1300" b="0" i="0">
+              <a:rPr sz="1200" b="0" i="0">
                 <a:solidFill>
                   <a:srgbClr val="86868B"/>
                 </a:solidFill>
               </a:rPr>
-              <a:t>Crop a center ROI from the webcam frame and run it through MobileNetV2 to get a class and confidence score</a:t>
-            </a:r>
-          </a:p>
-        </p:txBody>
-      </p:sp>
-      <p:sp>
-        <p:nvSpPr>
-          <p:cNvPr id="8" name="Oval 7"/>
+              <a:t>Crop center ROI, run through MobileNetV2 to get class and confidence score</a:t>
+            </a:r>
+          </a:p>
+        </p:txBody>
+      </p:sp>
+      <p:sp>
+        <p:nvSpPr>
+          <p:cNvPr id="41" name="Oval 40"/>
           <p:cNvSpPr/>
           <p:nvPr/>
         </p:nvSpPr>
         <p:spPr>
           <a:xfrm>
-            <a:off x="1828800" y="3154680"/>
+            <a:off x="6126480" y="2962656"/>
             <a:ext cx="347472" cy="347472"/>
           </a:xfrm>
           <a:prstGeom prst="ellipse">
@@ -4619,13 +5157,13 @@
       </p:sp>
       <p:sp>
         <p:nvSpPr>
-          <p:cNvPr id="9" name="TextBox 8"/>
-          <p:cNvSpPr txBox="1"/>
-          <p:nvPr/>
-        </p:nvSpPr>
-        <p:spPr>
-          <a:xfrm>
-            <a:off x="1828800" y="3127248"/>
+          <p:cNvPr id="42" name="TextBox 41"/>
+          <p:cNvSpPr txBox="1"/>
+          <p:nvPr/>
+        </p:nvSpPr>
+        <p:spPr>
+          <a:xfrm>
+            <a:off x="6126480" y="2935224"/>
             <a:ext cx="347472" cy="347472"/>
           </a:xfrm>
           <a:prstGeom prst="rect">
@@ -4653,14 +5191,14 @@
       </p:sp>
       <p:sp>
         <p:nvSpPr>
-          <p:cNvPr id="10" name="TextBox 9"/>
-          <p:cNvSpPr txBox="1"/>
-          <p:nvPr/>
-        </p:nvSpPr>
-        <p:spPr>
-          <a:xfrm>
-            <a:off x="2331720" y="3108960"/>
-            <a:ext cx="7772400" cy="320040"/>
+          <p:cNvPr id="43" name="TextBox 42"/>
+          <p:cNvSpPr txBox="1"/>
+          <p:nvPr/>
+        </p:nvSpPr>
+        <p:spPr>
+          <a:xfrm>
+            <a:off x="6601968" y="2926080"/>
+            <a:ext cx="5212080" cy="310896"/>
           </a:xfrm>
           <a:prstGeom prst="rect">
             <a:avLst/>
@@ -4675,26 +5213,26 @@
           <a:p>
             <a:pPr algn="l"/>
             <a:r>
-              <a:rPr sz="1600" b="1" i="0">
+              <a:rPr sz="1500" b="1" i="0">
                 <a:solidFill>
                   <a:srgbClr val="F5F5F7"/>
                 </a:solidFill>
               </a:rPr>
-              <a:t>Estimate pose</a:t>
-            </a:r>
-          </a:p>
-        </p:txBody>
-      </p:sp>
-      <p:sp>
-        <p:nvSpPr>
-          <p:cNvPr id="11" name="TextBox 10"/>
-          <p:cNvSpPr txBox="1"/>
-          <p:nvPr/>
-        </p:nvSpPr>
-        <p:spPr>
-          <a:xfrm>
-            <a:off x="2331720" y="3429000"/>
-            <a:ext cx="7772400" cy="502920"/>
+              <a:t>Smooth and reject</a:t>
+            </a:r>
+          </a:p>
+        </p:txBody>
+      </p:sp>
+      <p:sp>
+        <p:nvSpPr>
+          <p:cNvPr id="44" name="TextBox 43"/>
+          <p:cNvSpPr txBox="1"/>
+          <p:nvPr/>
+        </p:nvSpPr>
+        <p:spPr>
+          <a:xfrm>
+            <a:off x="6601968" y="3255264"/>
+            <a:ext cx="5212080" cy="502920"/>
           </a:xfrm>
           <a:prstGeom prst="rect">
             <a:avLst/>
@@ -4709,25 +5247,25 @@
           <a:p>
             <a:pPr algn="l"/>
             <a:r>
-              <a:rPr sz="1300" b="0" i="0">
+              <a:rPr sz="1200" b="0" i="0">
                 <a:solidFill>
                   <a:srgbClr val="86868B"/>
                 </a:solidFill>
               </a:rPr>
-              <a:t>Use a fixed-depth pinhole camera model to back-project the ROI bounding box into 3D space at 0.5 m</a:t>
-            </a:r>
-          </a:p>
-        </p:txBody>
-      </p:sp>
-      <p:sp>
-        <p:nvSpPr>
-          <p:cNvPr id="12" name="Oval 11"/>
+              <a:t>5-frame majority-vote removes flicker; entropy check labels uncertain frames as Unknown</a:t>
+            </a:r>
+          </a:p>
+        </p:txBody>
+      </p:sp>
+      <p:sp>
+        <p:nvSpPr>
+          <p:cNvPr id="45" name="Oval 44"/>
           <p:cNvSpPr/>
           <p:nvPr/>
         </p:nvSpPr>
         <p:spPr>
           <a:xfrm>
-            <a:off x="1828800" y="4343400"/>
+            <a:off x="6126480" y="4197096"/>
             <a:ext cx="347472" cy="347472"/>
           </a:xfrm>
           <a:prstGeom prst="ellipse">
@@ -4764,13 +5302,13 @@
       </p:sp>
       <p:sp>
         <p:nvSpPr>
-          <p:cNvPr id="13" name="TextBox 12"/>
-          <p:cNvSpPr txBox="1"/>
-          <p:nvPr/>
-        </p:nvSpPr>
-        <p:spPr>
-          <a:xfrm>
-            <a:off x="1828800" y="4315968"/>
+          <p:cNvPr id="46" name="TextBox 45"/>
+          <p:cNvSpPr txBox="1"/>
+          <p:nvPr/>
+        </p:nvSpPr>
+        <p:spPr>
+          <a:xfrm>
+            <a:off x="6126480" y="4169664"/>
             <a:ext cx="347472" cy="347472"/>
           </a:xfrm>
           <a:prstGeom prst="rect">
@@ -4798,14 +5336,14 @@
       </p:sp>
       <p:sp>
         <p:nvSpPr>
-          <p:cNvPr id="14" name="TextBox 13"/>
-          <p:cNvSpPr txBox="1"/>
-          <p:nvPr/>
-        </p:nvSpPr>
-        <p:spPr>
-          <a:xfrm>
-            <a:off x="2331720" y="4297680"/>
-            <a:ext cx="7772400" cy="320040"/>
+          <p:cNvPr id="47" name="TextBox 46"/>
+          <p:cNvSpPr txBox="1"/>
+          <p:nvPr/>
+        </p:nvSpPr>
+        <p:spPr>
+          <a:xfrm>
+            <a:off x="6601968" y="4160520"/>
+            <a:ext cx="5212080" cy="310896"/>
           </a:xfrm>
           <a:prstGeom prst="rect">
             <a:avLst/>
@@ -4820,11 +5358,156 @@
           <a:p>
             <a:pPr algn="l"/>
             <a:r>
-              <a:rPr sz="1600" b="1" i="0">
+              <a:rPr sz="1500" b="1" i="0">
                 <a:solidFill>
                   <a:srgbClr val="F5F5F7"/>
                 </a:solidFill>
               </a:rPr>
+              <a:t>Estimate pose</a:t>
+            </a:r>
+          </a:p>
+        </p:txBody>
+      </p:sp>
+      <p:sp>
+        <p:nvSpPr>
+          <p:cNvPr id="48" name="TextBox 47"/>
+          <p:cNvSpPr txBox="1"/>
+          <p:nvPr/>
+        </p:nvSpPr>
+        <p:spPr>
+          <a:xfrm>
+            <a:off x="6601968" y="4489704"/>
+            <a:ext cx="5212080" cy="502920"/>
+          </a:xfrm>
+          <a:prstGeom prst="rect">
+            <a:avLst/>
+          </a:prstGeom>
+          <a:noFill/>
+        </p:spPr>
+        <p:txBody>
+          <a:bodyPr wrap="square">
+            <a:spAutoFit/>
+          </a:bodyPr>
+          <a:lstStyle/>
+          <a:p>
+            <a:pPr algn="l"/>
+            <a:r>
+              <a:rPr sz="1200" b="0" i="0">
+                <a:solidFill>
+                  <a:srgbClr val="86868B"/>
+                </a:solidFill>
+              </a:rPr>
+              <a:t>Fixed-depth pinhole model back-projects the ROI into 3D at 0.5 m</a:t>
+            </a:r>
+          </a:p>
+        </p:txBody>
+      </p:sp>
+      <p:sp>
+        <p:nvSpPr>
+          <p:cNvPr id="49" name="Oval 48"/>
+          <p:cNvSpPr/>
+          <p:nvPr/>
+        </p:nvSpPr>
+        <p:spPr>
+          <a:xfrm>
+            <a:off x="6126480" y="5431536"/>
+            <a:ext cx="347472" cy="347472"/>
+          </a:xfrm>
+          <a:prstGeom prst="ellipse">
+            <a:avLst/>
+          </a:prstGeom>
+          <a:solidFill>
+            <a:srgbClr val="2997FF"/>
+          </a:solidFill>
+          <a:ln>
+            <a:noFill/>
+          </a:ln>
+        </p:spPr>
+        <p:style>
+          <a:lnRef idx="1">
+            <a:schemeClr val="accent1"/>
+          </a:lnRef>
+          <a:fillRef idx="3">
+            <a:schemeClr val="accent1"/>
+          </a:fillRef>
+          <a:effectRef idx="2">
+            <a:schemeClr val="accent1"/>
+          </a:effectRef>
+          <a:fontRef idx="minor">
+            <a:schemeClr val="lt1"/>
+          </a:fontRef>
+        </p:style>
+        <p:txBody>
+          <a:bodyPr rtlCol="0" anchor="ctr"/>
+          <a:lstStyle/>
+          <a:p>
+            <a:pPr algn="ctr"/>
+          </a:p>
+        </p:txBody>
+      </p:sp>
+      <p:sp>
+        <p:nvSpPr>
+          <p:cNvPr id="50" name="TextBox 49"/>
+          <p:cNvSpPr txBox="1"/>
+          <p:nvPr/>
+        </p:nvSpPr>
+        <p:spPr>
+          <a:xfrm>
+            <a:off x="6126480" y="5404104"/>
+            <a:ext cx="347472" cy="347472"/>
+          </a:xfrm>
+          <a:prstGeom prst="rect">
+            <a:avLst/>
+          </a:prstGeom>
+          <a:noFill/>
+        </p:spPr>
+        <p:txBody>
+          <a:bodyPr wrap="square">
+            <a:spAutoFit/>
+          </a:bodyPr>
+          <a:lstStyle/>
+          <a:p>
+            <a:pPr algn="ctr"/>
+            <a:r>
+              <a:rPr sz="1300" b="1" i="0">
+                <a:solidFill>
+                  <a:srgbClr val="0A0A0A"/>
+                </a:solidFill>
+              </a:rPr>
+              <a:t>4</a:t>
+            </a:r>
+          </a:p>
+        </p:txBody>
+      </p:sp>
+      <p:sp>
+        <p:nvSpPr>
+          <p:cNvPr id="51" name="TextBox 50"/>
+          <p:cNvSpPr txBox="1"/>
+          <p:nvPr/>
+        </p:nvSpPr>
+        <p:spPr>
+          <a:xfrm>
+            <a:off x="6601968" y="5394960"/>
+            <a:ext cx="5212080" cy="310896"/>
+          </a:xfrm>
+          <a:prstGeom prst="rect">
+            <a:avLst/>
+          </a:prstGeom>
+          <a:noFill/>
+        </p:spPr>
+        <p:txBody>
+          <a:bodyPr wrap="square">
+            <a:spAutoFit/>
+          </a:bodyPr>
+          <a:lstStyle/>
+          <a:p>
+            <a:pPr algn="l"/>
+            <a:r>
+              <a:rPr sz="1500" b="1" i="0">
+                <a:solidFill>
+                  <a:srgbClr val="F5F5F7"/>
+                </a:solidFill>
+              </a:rPr>
               <a:t>Render</a:t>
             </a:r>
           </a:p>
@@ -4832,14 +5515,14 @@
       </p:sp>
       <p:sp>
         <p:nvSpPr>
-          <p:cNvPr id="15" name="TextBox 14"/>
-          <p:cNvSpPr txBox="1"/>
-          <p:nvPr/>
-        </p:nvSpPr>
-        <p:spPr>
-          <a:xfrm>
-            <a:off x="2331720" y="4617720"/>
-            <a:ext cx="7772400" cy="502920"/>
+          <p:cNvPr id="52" name="TextBox 51"/>
+          <p:cNvSpPr txBox="1"/>
+          <p:nvPr/>
+        </p:nvSpPr>
+        <p:spPr>
+          <a:xfrm>
+            <a:off x="6601968" y="5724144"/>
+            <a:ext cx="5212080" cy="502920"/>
           </a:xfrm>
           <a:prstGeom prst="rect">
             <a:avLst/>
@@ -4854,12 +5537,12 @@
           <a:p>
             <a:pPr algn="l"/>
             <a:r>
-              <a:rPr sz="1300" b="0" i="0">
+              <a:rPr sz="1200" b="0" i="0">
                 <a:solidFill>
                   <a:srgbClr val="86868B"/>
                 </a:solidFill>
               </a:rPr>
-              <a:t>Project 8 box corners back to pixels with cv2.projectPoints and draw a 3D wireframe box with a floating label tag</a:t>
+              <a:t>Project 8 box corners with cv2.projectPoints, draw wireframe box and floating label</a:t>
             </a:r>
           </a:p>
         </p:txBody>
@@ -4898,8 +5581,8 @@
         </p:nvSpPr>
         <p:spPr>
           <a:xfrm>
-            <a:off x="0" y="411480"/>
-            <a:ext cx="12188952" cy="365760"/>
+            <a:off x="0" y="365760"/>
+            <a:ext cx="12188952" cy="320040"/>
           </a:xfrm>
           <a:prstGeom prst="rect">
             <a:avLst/>
@@ -4919,7 +5602,7 @@
                   <a:srgbClr val="2997FF"/>
                 </a:solidFill>
               </a:rPr>
-              <a:t>DATASET</a:t>
+              <a:t>ARCHITECTURES AND RESULTS</a:t>
             </a:r>
           </a:p>
         </p:txBody>
@@ -4932,7 +5615,7 @@
         </p:nvSpPr>
         <p:spPr>
           <a:xfrm>
-            <a:off x="457200" y="777240"/>
+            <a:off x="457200" y="749808"/>
             <a:ext cx="11274552" cy="914400"/>
           </a:xfrm>
           <a:prstGeom prst="rect">
@@ -4948,1148 +5631,26 @@
           <a:p>
             <a:pPr algn="ctr"/>
             <a:r>
-              <a:rPr sz="3600" b="1" i="0">
+              <a:rPr sz="3200" b="1" i="0">
                 <a:solidFill>
                   <a:srgbClr val="F5F5F7"/>
                 </a:solidFill>
               </a:rPr>
-              <a:t>10 classes  ·  1419 images</a:t>
-            </a:r>
-          </a:p>
-        </p:txBody>
-      </p:sp>
-      <p:sp>
-        <p:nvSpPr>
-          <p:cNvPr id="4" name="TextBox 3"/>
-          <p:cNvSpPr txBox="1"/>
-          <p:nvPr/>
-        </p:nvSpPr>
-        <p:spPr>
-          <a:xfrm>
-            <a:off x="457200" y="1783080"/>
-            <a:ext cx="2743200" cy="274320"/>
-          </a:xfrm>
-          <a:prstGeom prst="rect">
-            <a:avLst/>
-          </a:prstGeom>
-          <a:noFill/>
-        </p:spPr>
-        <p:txBody>
-          <a:bodyPr wrap="square">
-            <a:spAutoFit/>
-          </a:bodyPr>
-          <a:lstStyle/>
-          <a:p>
-            <a:pPr algn="l"/>
-            <a:r>
-              <a:rPr sz="900" b="1" i="0">
-                <a:solidFill>
-                  <a:srgbClr val="86868B"/>
-                </a:solidFill>
-              </a:rPr>
-              <a:t>CLASS</a:t>
-            </a:r>
-          </a:p>
-        </p:txBody>
-      </p:sp>
-      <p:sp>
-        <p:nvSpPr>
-          <p:cNvPr id="5" name="TextBox 4"/>
-          <p:cNvSpPr txBox="1"/>
-          <p:nvPr/>
-        </p:nvSpPr>
-        <p:spPr>
-          <a:xfrm>
-            <a:off x="3657600" y="1783080"/>
-            <a:ext cx="914400" cy="274320"/>
-          </a:xfrm>
-          <a:prstGeom prst="rect">
-            <a:avLst/>
-          </a:prstGeom>
-          <a:noFill/>
-        </p:spPr>
-        <p:txBody>
-          <a:bodyPr wrap="square">
-            <a:spAutoFit/>
-          </a:bodyPr>
-          <a:lstStyle/>
-          <a:p>
-            <a:pPr algn="l"/>
-            <a:r>
-              <a:rPr sz="900" b="1" i="0">
-                <a:solidFill>
-                  <a:srgbClr val="86868B"/>
-                </a:solidFill>
-              </a:rPr>
-              <a:t>IMAGES</a:t>
-            </a:r>
-          </a:p>
-        </p:txBody>
-      </p:sp>
-      <p:sp>
-        <p:nvSpPr>
-          <p:cNvPr id="6" name="TextBox 5"/>
-          <p:cNvSpPr txBox="1"/>
-          <p:nvPr/>
-        </p:nvSpPr>
-        <p:spPr>
-          <a:xfrm>
-            <a:off x="4846320" y="1783080"/>
-            <a:ext cx="1371600" cy="274320"/>
-          </a:xfrm>
-          <a:prstGeom prst="rect">
-            <a:avLst/>
-          </a:prstGeom>
-          <a:noFill/>
-        </p:spPr>
-        <p:txBody>
-          <a:bodyPr wrap="square">
-            <a:spAutoFit/>
-          </a:bodyPr>
-          <a:lstStyle/>
-          <a:p>
-            <a:pPr algn="l"/>
-            <a:r>
-              <a:rPr sz="900" b="1" i="0">
-                <a:solidFill>
-                  <a:srgbClr val="86868B"/>
-                </a:solidFill>
-              </a:rPr>
-              <a:t>SOURCE</a:t>
-            </a:r>
-          </a:p>
-        </p:txBody>
-      </p:sp>
-      <p:sp>
-        <p:nvSpPr>
-          <p:cNvPr id="7" name="TextBox 6"/>
-          <p:cNvSpPr txBox="1"/>
-          <p:nvPr/>
-        </p:nvSpPr>
-        <p:spPr>
-          <a:xfrm>
-            <a:off x="457200" y="2103120"/>
-            <a:ext cx="2743200" cy="347472"/>
-          </a:xfrm>
-          <a:prstGeom prst="rect">
-            <a:avLst/>
-          </a:prstGeom>
-          <a:noFill/>
-        </p:spPr>
-        <p:txBody>
-          <a:bodyPr wrap="square">
-            <a:spAutoFit/>
-          </a:bodyPr>
-          <a:lstStyle/>
-          <a:p>
-            <a:pPr algn="l"/>
-            <a:r>
-              <a:rPr sz="1300" b="0" i="0">
-                <a:solidFill>
-                  <a:srgbClr val="F5F5F7"/>
-                </a:solidFill>
-              </a:rPr>
-              <a:t>book</a:t>
-            </a:r>
-          </a:p>
-        </p:txBody>
-      </p:sp>
-      <p:sp>
-        <p:nvSpPr>
-          <p:cNvPr id="8" name="TextBox 7"/>
-          <p:cNvSpPr txBox="1"/>
-          <p:nvPr/>
-        </p:nvSpPr>
-        <p:spPr>
-          <a:xfrm>
-            <a:off x="3657600" y="2103120"/>
-            <a:ext cx="914400" cy="347472"/>
-          </a:xfrm>
-          <a:prstGeom prst="rect">
-            <a:avLst/>
-          </a:prstGeom>
-          <a:noFill/>
-        </p:spPr>
-        <p:txBody>
-          <a:bodyPr wrap="square">
-            <a:spAutoFit/>
-          </a:bodyPr>
-          <a:lstStyle/>
-          <a:p>
-            <a:pPr algn="l"/>
-            <a:r>
-              <a:rPr sz="1300" b="0" i="0">
-                <a:solidFill>
-                  <a:srgbClr val="F5F5F7"/>
-                </a:solidFill>
-              </a:rPr>
-              <a:t>161</a:t>
-            </a:r>
-          </a:p>
-        </p:txBody>
-      </p:sp>
-      <p:sp>
-        <p:nvSpPr>
-          <p:cNvPr id="9" name="TextBox 8"/>
-          <p:cNvSpPr txBox="1"/>
-          <p:nvPr/>
-        </p:nvSpPr>
-        <p:spPr>
-          <a:xfrm>
-            <a:off x="4846320" y="2103120"/>
-            <a:ext cx="1371600" cy="347472"/>
-          </a:xfrm>
-          <a:prstGeom prst="rect">
-            <a:avLst/>
-          </a:prstGeom>
-          <a:noFill/>
-        </p:spPr>
-        <p:txBody>
-          <a:bodyPr wrap="square">
-            <a:spAutoFit/>
-          </a:bodyPr>
-          <a:lstStyle/>
-          <a:p>
-            <a:pPr algn="l"/>
-            <a:r>
-              <a:rPr sz="1200" b="1" i="0">
-                <a:solidFill>
-                  <a:srgbClr val="30D158"/>
-                </a:solidFill>
-              </a:rPr>
-              <a:t>Webcam</a:t>
-            </a:r>
-          </a:p>
-        </p:txBody>
-      </p:sp>
-      <p:sp>
-        <p:nvSpPr>
-          <p:cNvPr id="10" name="TextBox 9"/>
-          <p:cNvSpPr txBox="1"/>
-          <p:nvPr/>
-        </p:nvSpPr>
-        <p:spPr>
-          <a:xfrm>
-            <a:off x="457200" y="2487168"/>
-            <a:ext cx="2743200" cy="347472"/>
-          </a:xfrm>
-          <a:prstGeom prst="rect">
-            <a:avLst/>
-          </a:prstGeom>
-          <a:noFill/>
-        </p:spPr>
-        <p:txBody>
-          <a:bodyPr wrap="square">
-            <a:spAutoFit/>
-          </a:bodyPr>
-          <a:lstStyle/>
-          <a:p>
-            <a:pPr algn="l"/>
-            <a:r>
-              <a:rPr sz="1300" b="0" i="0">
-                <a:solidFill>
-                  <a:srgbClr val="F5F5F7"/>
-                </a:solidFill>
-              </a:rPr>
-              <a:t>cup</a:t>
-            </a:r>
-          </a:p>
-        </p:txBody>
-      </p:sp>
-      <p:sp>
-        <p:nvSpPr>
-          <p:cNvPr id="11" name="TextBox 10"/>
-          <p:cNvSpPr txBox="1"/>
-          <p:nvPr/>
-        </p:nvSpPr>
-        <p:spPr>
-          <a:xfrm>
-            <a:off x="3657600" y="2487168"/>
-            <a:ext cx="914400" cy="347472"/>
-          </a:xfrm>
-          <a:prstGeom prst="rect">
-            <a:avLst/>
-          </a:prstGeom>
-          <a:noFill/>
-        </p:spPr>
-        <p:txBody>
-          <a:bodyPr wrap="square">
-            <a:spAutoFit/>
-          </a:bodyPr>
-          <a:lstStyle/>
-          <a:p>
-            <a:pPr algn="l"/>
-            <a:r>
-              <a:rPr sz="1300" b="0" i="0">
-                <a:solidFill>
-                  <a:srgbClr val="F5F5F7"/>
-                </a:solidFill>
-              </a:rPr>
-              <a:t>173</a:t>
-            </a:r>
-          </a:p>
-        </p:txBody>
-      </p:sp>
-      <p:sp>
-        <p:nvSpPr>
-          <p:cNvPr id="12" name="TextBox 11"/>
-          <p:cNvSpPr txBox="1"/>
-          <p:nvPr/>
-        </p:nvSpPr>
-        <p:spPr>
-          <a:xfrm>
-            <a:off x="4846320" y="2487168"/>
-            <a:ext cx="1371600" cy="347472"/>
-          </a:xfrm>
-          <a:prstGeom prst="rect">
-            <a:avLst/>
-          </a:prstGeom>
-          <a:noFill/>
-        </p:spPr>
-        <p:txBody>
-          <a:bodyPr wrap="square">
-            <a:spAutoFit/>
-          </a:bodyPr>
-          <a:lstStyle/>
-          <a:p>
-            <a:pPr algn="l"/>
-            <a:r>
-              <a:rPr sz="1200" b="1" i="0">
-                <a:solidFill>
-                  <a:srgbClr val="30D158"/>
-                </a:solidFill>
-              </a:rPr>
-              <a:t>Webcam</a:t>
-            </a:r>
-          </a:p>
-        </p:txBody>
-      </p:sp>
-      <p:sp>
-        <p:nvSpPr>
-          <p:cNvPr id="13" name="TextBox 12"/>
-          <p:cNvSpPr txBox="1"/>
-          <p:nvPr/>
-        </p:nvSpPr>
-        <p:spPr>
-          <a:xfrm>
-            <a:off x="457200" y="2871215"/>
-            <a:ext cx="2743200" cy="347472"/>
-          </a:xfrm>
-          <a:prstGeom prst="rect">
-            <a:avLst/>
-          </a:prstGeom>
-          <a:noFill/>
-        </p:spPr>
-        <p:txBody>
-          <a:bodyPr wrap="square">
-            <a:spAutoFit/>
-          </a:bodyPr>
-          <a:lstStyle/>
-          <a:p>
-            <a:pPr algn="l"/>
-            <a:r>
-              <a:rPr sz="1300" b="0" i="0">
-                <a:solidFill>
-                  <a:srgbClr val="F5F5F7"/>
-                </a:solidFill>
-              </a:rPr>
-              <a:t>keyboard</a:t>
-            </a:r>
-          </a:p>
-        </p:txBody>
-      </p:sp>
-      <p:sp>
-        <p:nvSpPr>
-          <p:cNvPr id="14" name="TextBox 13"/>
-          <p:cNvSpPr txBox="1"/>
-          <p:nvPr/>
-        </p:nvSpPr>
-        <p:spPr>
-          <a:xfrm>
-            <a:off x="3657600" y="2871215"/>
-            <a:ext cx="914400" cy="347472"/>
-          </a:xfrm>
-          <a:prstGeom prst="rect">
-            <a:avLst/>
-          </a:prstGeom>
-          <a:noFill/>
-        </p:spPr>
-        <p:txBody>
-          <a:bodyPr wrap="square">
-            <a:spAutoFit/>
-          </a:bodyPr>
-          <a:lstStyle/>
-          <a:p>
-            <a:pPr algn="l"/>
-            <a:r>
-              <a:rPr sz="1300" b="0" i="0">
-                <a:solidFill>
-                  <a:srgbClr val="F5F5F7"/>
-                </a:solidFill>
-              </a:rPr>
-              <a:t>152</a:t>
-            </a:r>
-          </a:p>
-        </p:txBody>
-      </p:sp>
-      <p:sp>
-        <p:nvSpPr>
-          <p:cNvPr id="15" name="TextBox 14"/>
-          <p:cNvSpPr txBox="1"/>
-          <p:nvPr/>
-        </p:nvSpPr>
-        <p:spPr>
-          <a:xfrm>
-            <a:off x="4846320" y="2871215"/>
-            <a:ext cx="1371600" cy="347472"/>
-          </a:xfrm>
-          <a:prstGeom prst="rect">
-            <a:avLst/>
-          </a:prstGeom>
-          <a:noFill/>
-        </p:spPr>
-        <p:txBody>
-          <a:bodyPr wrap="square">
-            <a:spAutoFit/>
-          </a:bodyPr>
-          <a:lstStyle/>
-          <a:p>
-            <a:pPr algn="l"/>
-            <a:r>
-              <a:rPr sz="1200" b="1" i="0">
-                <a:solidFill>
-                  <a:srgbClr val="30D158"/>
-                </a:solidFill>
-              </a:rPr>
-              <a:t>Webcam</a:t>
-            </a:r>
-          </a:p>
-        </p:txBody>
-      </p:sp>
-      <p:sp>
-        <p:nvSpPr>
-          <p:cNvPr id="16" name="TextBox 15"/>
-          <p:cNvSpPr txBox="1"/>
-          <p:nvPr/>
-        </p:nvSpPr>
-        <p:spPr>
-          <a:xfrm>
-            <a:off x="457200" y="3255263"/>
-            <a:ext cx="2743200" cy="347472"/>
-          </a:xfrm>
-          <a:prstGeom prst="rect">
-            <a:avLst/>
-          </a:prstGeom>
-          <a:noFill/>
-        </p:spPr>
-        <p:txBody>
-          <a:bodyPr wrap="square">
-            <a:spAutoFit/>
-          </a:bodyPr>
-          <a:lstStyle/>
-          <a:p>
-            <a:pPr algn="l"/>
-            <a:r>
-              <a:rPr sz="1300" b="0" i="0">
-                <a:solidFill>
-                  <a:srgbClr val="F5F5F7"/>
-                </a:solidFill>
-              </a:rPr>
-              <a:t>pen</a:t>
-            </a:r>
-          </a:p>
-        </p:txBody>
-      </p:sp>
-      <p:sp>
-        <p:nvSpPr>
-          <p:cNvPr id="17" name="TextBox 16"/>
-          <p:cNvSpPr txBox="1"/>
-          <p:nvPr/>
-        </p:nvSpPr>
-        <p:spPr>
-          <a:xfrm>
-            <a:off x="3657600" y="3255263"/>
-            <a:ext cx="914400" cy="347472"/>
-          </a:xfrm>
-          <a:prstGeom prst="rect">
-            <a:avLst/>
-          </a:prstGeom>
-          <a:noFill/>
-        </p:spPr>
-        <p:txBody>
-          <a:bodyPr wrap="square">
-            <a:spAutoFit/>
-          </a:bodyPr>
-          <a:lstStyle/>
-          <a:p>
-            <a:pPr algn="l"/>
-            <a:r>
-              <a:rPr sz="1300" b="0" i="0">
-                <a:solidFill>
-                  <a:srgbClr val="F5F5F7"/>
-                </a:solidFill>
-              </a:rPr>
-              <a:t>171</a:t>
-            </a:r>
-          </a:p>
-        </p:txBody>
-      </p:sp>
-      <p:sp>
-        <p:nvSpPr>
-          <p:cNvPr id="18" name="TextBox 17"/>
-          <p:cNvSpPr txBox="1"/>
-          <p:nvPr/>
-        </p:nvSpPr>
-        <p:spPr>
-          <a:xfrm>
-            <a:off x="4846320" y="3255263"/>
-            <a:ext cx="1371600" cy="347472"/>
-          </a:xfrm>
-          <a:prstGeom prst="rect">
-            <a:avLst/>
-          </a:prstGeom>
-          <a:noFill/>
-        </p:spPr>
-        <p:txBody>
-          <a:bodyPr wrap="square">
-            <a:spAutoFit/>
-          </a:bodyPr>
-          <a:lstStyle/>
-          <a:p>
-            <a:pPr algn="l"/>
-            <a:r>
-              <a:rPr sz="1200" b="1" i="0">
-                <a:solidFill>
-                  <a:srgbClr val="30D158"/>
-                </a:solidFill>
-              </a:rPr>
-              <a:t>Webcam</a:t>
-            </a:r>
-          </a:p>
-        </p:txBody>
-      </p:sp>
-      <p:sp>
-        <p:nvSpPr>
-          <p:cNvPr id="19" name="TextBox 18"/>
-          <p:cNvSpPr txBox="1"/>
-          <p:nvPr/>
-        </p:nvSpPr>
-        <p:spPr>
-          <a:xfrm>
-            <a:off x="457200" y="3639311"/>
-            <a:ext cx="2743200" cy="347472"/>
-          </a:xfrm>
-          <a:prstGeom prst="rect">
-            <a:avLst/>
-          </a:prstGeom>
-          <a:noFill/>
-        </p:spPr>
-        <p:txBody>
-          <a:bodyPr wrap="square">
-            <a:spAutoFit/>
-          </a:bodyPr>
-          <a:lstStyle/>
-          <a:p>
-            <a:pPr algn="l"/>
-            <a:r>
-              <a:rPr sz="1300" b="0" i="0">
-                <a:solidFill>
-                  <a:srgbClr val="F5F5F7"/>
-                </a:solidFill>
-              </a:rPr>
-              <a:t>phone</a:t>
-            </a:r>
-          </a:p>
-        </p:txBody>
-      </p:sp>
-      <p:sp>
-        <p:nvSpPr>
-          <p:cNvPr id="20" name="TextBox 19"/>
-          <p:cNvSpPr txBox="1"/>
-          <p:nvPr/>
-        </p:nvSpPr>
-        <p:spPr>
-          <a:xfrm>
-            <a:off x="3657600" y="3639311"/>
-            <a:ext cx="914400" cy="347472"/>
-          </a:xfrm>
-          <a:prstGeom prst="rect">
-            <a:avLst/>
-          </a:prstGeom>
-          <a:noFill/>
-        </p:spPr>
-        <p:txBody>
-          <a:bodyPr wrap="square">
-            <a:spAutoFit/>
-          </a:bodyPr>
-          <a:lstStyle/>
-          <a:p>
-            <a:pPr algn="l"/>
-            <a:r>
-              <a:rPr sz="1300" b="0" i="0">
-                <a:solidFill>
-                  <a:srgbClr val="F5F5F7"/>
-                </a:solidFill>
-              </a:rPr>
-              <a:t>159</a:t>
-            </a:r>
-          </a:p>
-        </p:txBody>
-      </p:sp>
-      <p:sp>
-        <p:nvSpPr>
-          <p:cNvPr id="21" name="TextBox 20"/>
-          <p:cNvSpPr txBox="1"/>
-          <p:nvPr/>
-        </p:nvSpPr>
-        <p:spPr>
-          <a:xfrm>
-            <a:off x="4846320" y="3639311"/>
-            <a:ext cx="1371600" cy="347472"/>
-          </a:xfrm>
-          <a:prstGeom prst="rect">
-            <a:avLst/>
-          </a:prstGeom>
-          <a:noFill/>
-        </p:spPr>
-        <p:txBody>
-          <a:bodyPr wrap="square">
-            <a:spAutoFit/>
-          </a:bodyPr>
-          <a:lstStyle/>
-          <a:p>
-            <a:pPr algn="l"/>
-            <a:r>
-              <a:rPr sz="1200" b="1" i="0">
-                <a:solidFill>
-                  <a:srgbClr val="30D158"/>
-                </a:solidFill>
-              </a:rPr>
-              <a:t>Webcam</a:t>
-            </a:r>
-          </a:p>
-        </p:txBody>
-      </p:sp>
-      <p:sp>
-        <p:nvSpPr>
-          <p:cNvPr id="22" name="TextBox 21"/>
-          <p:cNvSpPr txBox="1"/>
-          <p:nvPr/>
-        </p:nvSpPr>
-        <p:spPr>
-          <a:xfrm>
-            <a:off x="457200" y="4023360"/>
-            <a:ext cx="2743200" cy="347472"/>
-          </a:xfrm>
-          <a:prstGeom prst="rect">
-            <a:avLst/>
-          </a:prstGeom>
-          <a:noFill/>
-        </p:spPr>
-        <p:txBody>
-          <a:bodyPr wrap="square">
-            <a:spAutoFit/>
-          </a:bodyPr>
-          <a:lstStyle/>
-          <a:p>
-            <a:pPr algn="l"/>
-            <a:r>
-              <a:rPr sz="1300" b="0" i="0">
-                <a:solidFill>
-                  <a:srgbClr val="F5F5F7"/>
-                </a:solidFill>
-              </a:rPr>
-              <a:t>glasses</a:t>
-            </a:r>
-          </a:p>
-        </p:txBody>
-      </p:sp>
-      <p:sp>
-        <p:nvSpPr>
-          <p:cNvPr id="23" name="TextBox 22"/>
-          <p:cNvSpPr txBox="1"/>
-          <p:nvPr/>
-        </p:nvSpPr>
-        <p:spPr>
-          <a:xfrm>
-            <a:off x="3657600" y="4023360"/>
-            <a:ext cx="914400" cy="347472"/>
-          </a:xfrm>
-          <a:prstGeom prst="rect">
-            <a:avLst/>
-          </a:prstGeom>
-          <a:noFill/>
-        </p:spPr>
-        <p:txBody>
-          <a:bodyPr wrap="square">
-            <a:spAutoFit/>
-          </a:bodyPr>
-          <a:lstStyle/>
-          <a:p>
-            <a:pPr algn="l"/>
-            <a:r>
-              <a:rPr sz="1300" b="0" i="0">
-                <a:solidFill>
-                  <a:srgbClr val="F5F5F7"/>
-                </a:solidFill>
-              </a:rPr>
-              <a:t>130</a:t>
-            </a:r>
-          </a:p>
-        </p:txBody>
-      </p:sp>
-      <p:sp>
-        <p:nvSpPr>
-          <p:cNvPr id="24" name="TextBox 23"/>
-          <p:cNvSpPr txBox="1"/>
-          <p:nvPr/>
-        </p:nvSpPr>
-        <p:spPr>
-          <a:xfrm>
-            <a:off x="4846320" y="4023360"/>
-            <a:ext cx="1371600" cy="347472"/>
-          </a:xfrm>
-          <a:prstGeom prst="rect">
-            <a:avLst/>
-          </a:prstGeom>
-          <a:noFill/>
-        </p:spPr>
-        <p:txBody>
-          <a:bodyPr wrap="square">
-            <a:spAutoFit/>
-          </a:bodyPr>
-          <a:lstStyle/>
-          <a:p>
-            <a:pPr algn="l"/>
-            <a:r>
-              <a:rPr sz="1200" b="1" i="0">
-                <a:solidFill>
-                  <a:srgbClr val="86868B"/>
-                </a:solidFill>
-              </a:rPr>
-              <a:t>Web</a:t>
-            </a:r>
-          </a:p>
-        </p:txBody>
-      </p:sp>
-      <p:sp>
-        <p:nvSpPr>
-          <p:cNvPr id="25" name="TextBox 24"/>
-          <p:cNvSpPr txBox="1"/>
-          <p:nvPr/>
-        </p:nvSpPr>
-        <p:spPr>
-          <a:xfrm>
-            <a:off x="457200" y="4407408"/>
-            <a:ext cx="2743200" cy="347472"/>
-          </a:xfrm>
-          <a:prstGeom prst="rect">
-            <a:avLst/>
-          </a:prstGeom>
-          <a:noFill/>
-        </p:spPr>
-        <p:txBody>
-          <a:bodyPr wrap="square">
-            <a:spAutoFit/>
-          </a:bodyPr>
-          <a:lstStyle/>
-          <a:p>
-            <a:pPr algn="l"/>
-            <a:r>
-              <a:rPr sz="1300" b="0" i="0">
-                <a:solidFill>
-                  <a:srgbClr val="F5F5F7"/>
-                </a:solidFill>
-              </a:rPr>
-              <a:t>headphones</a:t>
-            </a:r>
-          </a:p>
-        </p:txBody>
-      </p:sp>
-      <p:sp>
-        <p:nvSpPr>
-          <p:cNvPr id="26" name="TextBox 25"/>
-          <p:cNvSpPr txBox="1"/>
-          <p:nvPr/>
-        </p:nvSpPr>
-        <p:spPr>
-          <a:xfrm>
-            <a:off x="3657600" y="4407408"/>
-            <a:ext cx="914400" cy="347472"/>
-          </a:xfrm>
-          <a:prstGeom prst="rect">
-            <a:avLst/>
-          </a:prstGeom>
-          <a:noFill/>
-        </p:spPr>
-        <p:txBody>
-          <a:bodyPr wrap="square">
-            <a:spAutoFit/>
-          </a:bodyPr>
-          <a:lstStyle/>
-          <a:p>
-            <a:pPr algn="l"/>
-            <a:r>
-              <a:rPr sz="1300" b="0" i="0">
-                <a:solidFill>
-                  <a:srgbClr val="F5F5F7"/>
-                </a:solidFill>
-              </a:rPr>
-              <a:t>110</a:t>
-            </a:r>
-          </a:p>
-        </p:txBody>
-      </p:sp>
-      <p:sp>
-        <p:nvSpPr>
-          <p:cNvPr id="27" name="TextBox 26"/>
-          <p:cNvSpPr txBox="1"/>
-          <p:nvPr/>
-        </p:nvSpPr>
-        <p:spPr>
-          <a:xfrm>
-            <a:off x="4846320" y="4407408"/>
-            <a:ext cx="1371600" cy="347472"/>
-          </a:xfrm>
-          <a:prstGeom prst="rect">
-            <a:avLst/>
-          </a:prstGeom>
-          <a:noFill/>
-        </p:spPr>
-        <p:txBody>
-          <a:bodyPr wrap="square">
-            <a:spAutoFit/>
-          </a:bodyPr>
-          <a:lstStyle/>
-          <a:p>
-            <a:pPr algn="l"/>
-            <a:r>
-              <a:rPr sz="1200" b="1" i="0">
-                <a:solidFill>
-                  <a:srgbClr val="86868B"/>
-                </a:solidFill>
-              </a:rPr>
-              <a:t>Web</a:t>
-            </a:r>
-          </a:p>
-        </p:txBody>
-      </p:sp>
-      <p:sp>
-        <p:nvSpPr>
-          <p:cNvPr id="28" name="TextBox 27"/>
-          <p:cNvSpPr txBox="1"/>
-          <p:nvPr/>
-        </p:nvSpPr>
-        <p:spPr>
-          <a:xfrm>
-            <a:off x="457200" y="4791456"/>
-            <a:ext cx="2743200" cy="347472"/>
-          </a:xfrm>
-          <a:prstGeom prst="rect">
-            <a:avLst/>
-          </a:prstGeom>
-          <a:noFill/>
-        </p:spPr>
-        <p:txBody>
-          <a:bodyPr wrap="square">
-            <a:spAutoFit/>
-          </a:bodyPr>
-          <a:lstStyle/>
-          <a:p>
-            <a:pPr algn="l"/>
-            <a:r>
-              <a:rPr sz="1300" b="0" i="0">
-                <a:solidFill>
-                  <a:srgbClr val="F5F5F7"/>
-                </a:solidFill>
-              </a:rPr>
-              <a:t>laptop</a:t>
-            </a:r>
-          </a:p>
-        </p:txBody>
-      </p:sp>
-      <p:sp>
-        <p:nvSpPr>
-          <p:cNvPr id="29" name="TextBox 28"/>
-          <p:cNvSpPr txBox="1"/>
-          <p:nvPr/>
-        </p:nvSpPr>
-        <p:spPr>
-          <a:xfrm>
-            <a:off x="3657600" y="4791456"/>
-            <a:ext cx="914400" cy="347472"/>
-          </a:xfrm>
-          <a:prstGeom prst="rect">
-            <a:avLst/>
-          </a:prstGeom>
-          <a:noFill/>
-        </p:spPr>
-        <p:txBody>
-          <a:bodyPr wrap="square">
-            <a:spAutoFit/>
-          </a:bodyPr>
-          <a:lstStyle/>
-          <a:p>
-            <a:pPr algn="l"/>
-            <a:r>
-              <a:rPr sz="1300" b="0" i="0">
-                <a:solidFill>
-                  <a:srgbClr val="F5F5F7"/>
-                </a:solidFill>
-              </a:rPr>
-              <a:t>123</a:t>
-            </a:r>
-          </a:p>
-        </p:txBody>
-      </p:sp>
-      <p:sp>
-        <p:nvSpPr>
-          <p:cNvPr id="30" name="TextBox 29"/>
-          <p:cNvSpPr txBox="1"/>
-          <p:nvPr/>
-        </p:nvSpPr>
-        <p:spPr>
-          <a:xfrm>
-            <a:off x="4846320" y="4791456"/>
-            <a:ext cx="1371600" cy="347472"/>
-          </a:xfrm>
-          <a:prstGeom prst="rect">
-            <a:avLst/>
-          </a:prstGeom>
-          <a:noFill/>
-        </p:spPr>
-        <p:txBody>
-          <a:bodyPr wrap="square">
-            <a:spAutoFit/>
-          </a:bodyPr>
-          <a:lstStyle/>
-          <a:p>
-            <a:pPr algn="l"/>
-            <a:r>
-              <a:rPr sz="1200" b="1" i="0">
-                <a:solidFill>
-                  <a:srgbClr val="86868B"/>
-                </a:solidFill>
-              </a:rPr>
-              <a:t>Web</a:t>
-            </a:r>
-          </a:p>
-        </p:txBody>
-      </p:sp>
-      <p:sp>
-        <p:nvSpPr>
-          <p:cNvPr id="31" name="TextBox 30"/>
-          <p:cNvSpPr txBox="1"/>
-          <p:nvPr/>
-        </p:nvSpPr>
-        <p:spPr>
-          <a:xfrm>
-            <a:off x="457200" y="5175504"/>
-            <a:ext cx="2743200" cy="347472"/>
-          </a:xfrm>
-          <a:prstGeom prst="rect">
-            <a:avLst/>
-          </a:prstGeom>
-          <a:noFill/>
-        </p:spPr>
-        <p:txBody>
-          <a:bodyPr wrap="square">
-            <a:spAutoFit/>
-          </a:bodyPr>
-          <a:lstStyle/>
-          <a:p>
-            <a:pPr algn="l"/>
-            <a:r>
-              <a:rPr sz="1300" b="0" i="0">
-                <a:solidFill>
-                  <a:srgbClr val="F5F5F7"/>
-                </a:solidFill>
-              </a:rPr>
-              <a:t>ps5_controller</a:t>
-            </a:r>
-          </a:p>
-        </p:txBody>
-      </p:sp>
-      <p:sp>
-        <p:nvSpPr>
-          <p:cNvPr id="32" name="TextBox 31"/>
-          <p:cNvSpPr txBox="1"/>
-          <p:nvPr/>
-        </p:nvSpPr>
-        <p:spPr>
-          <a:xfrm>
-            <a:off x="3657600" y="5175504"/>
-            <a:ext cx="914400" cy="347472"/>
-          </a:xfrm>
-          <a:prstGeom prst="rect">
-            <a:avLst/>
-          </a:prstGeom>
-          <a:noFill/>
-        </p:spPr>
-        <p:txBody>
-          <a:bodyPr wrap="square">
-            <a:spAutoFit/>
-          </a:bodyPr>
-          <a:lstStyle/>
-          <a:p>
-            <a:pPr algn="l"/>
-            <a:r>
-              <a:rPr sz="1300" b="0" i="0">
-                <a:solidFill>
-                  <a:srgbClr val="F5F5F7"/>
-                </a:solidFill>
-              </a:rPr>
-              <a:t>102</a:t>
-            </a:r>
-          </a:p>
-        </p:txBody>
-      </p:sp>
-      <p:sp>
-        <p:nvSpPr>
-          <p:cNvPr id="33" name="TextBox 32"/>
-          <p:cNvSpPr txBox="1"/>
-          <p:nvPr/>
-        </p:nvSpPr>
-        <p:spPr>
-          <a:xfrm>
-            <a:off x="4846320" y="5175504"/>
-            <a:ext cx="1371600" cy="347472"/>
-          </a:xfrm>
-          <a:prstGeom prst="rect">
-            <a:avLst/>
-          </a:prstGeom>
-          <a:noFill/>
-        </p:spPr>
-        <p:txBody>
-          <a:bodyPr wrap="square">
-            <a:spAutoFit/>
-          </a:bodyPr>
-          <a:lstStyle/>
-          <a:p>
-            <a:pPr algn="l"/>
-            <a:r>
-              <a:rPr sz="1200" b="1" i="0">
-                <a:solidFill>
-                  <a:srgbClr val="86868B"/>
-                </a:solidFill>
-              </a:rPr>
-              <a:t>Web</a:t>
-            </a:r>
-          </a:p>
-        </p:txBody>
-      </p:sp>
-      <p:sp>
-        <p:nvSpPr>
-          <p:cNvPr id="34" name="TextBox 33"/>
-          <p:cNvSpPr txBox="1"/>
-          <p:nvPr/>
-        </p:nvSpPr>
-        <p:spPr>
-          <a:xfrm>
-            <a:off x="457200" y="5559552"/>
-            <a:ext cx="2743200" cy="347472"/>
-          </a:xfrm>
-          <a:prstGeom prst="rect">
-            <a:avLst/>
-          </a:prstGeom>
-          <a:noFill/>
-        </p:spPr>
-        <p:txBody>
-          <a:bodyPr wrap="square">
-            <a:spAutoFit/>
-          </a:bodyPr>
-          <a:lstStyle/>
-          <a:p>
-            <a:pPr algn="l"/>
-            <a:r>
-              <a:rPr sz="1300" b="0" i="0">
-                <a:solidFill>
-                  <a:srgbClr val="F5F5F7"/>
-                </a:solidFill>
-              </a:rPr>
-              <a:t>tablet</a:t>
-            </a:r>
-          </a:p>
-        </p:txBody>
-      </p:sp>
-      <p:sp>
-        <p:nvSpPr>
-          <p:cNvPr id="35" name="TextBox 34"/>
-          <p:cNvSpPr txBox="1"/>
-          <p:nvPr/>
-        </p:nvSpPr>
-        <p:spPr>
-          <a:xfrm>
-            <a:off x="3657600" y="5559552"/>
-            <a:ext cx="914400" cy="347472"/>
-          </a:xfrm>
-          <a:prstGeom prst="rect">
-            <a:avLst/>
-          </a:prstGeom>
-          <a:noFill/>
-        </p:spPr>
-        <p:txBody>
-          <a:bodyPr wrap="square">
-            <a:spAutoFit/>
-          </a:bodyPr>
-          <a:lstStyle/>
-          <a:p>
-            <a:pPr algn="l"/>
-            <a:r>
-              <a:rPr sz="1300" b="0" i="0">
-                <a:solidFill>
-                  <a:srgbClr val="F5F5F7"/>
-                </a:solidFill>
-              </a:rPr>
-              <a:t>138</a:t>
-            </a:r>
-          </a:p>
-        </p:txBody>
-      </p:sp>
-      <p:sp>
-        <p:nvSpPr>
-          <p:cNvPr id="36" name="TextBox 35"/>
-          <p:cNvSpPr txBox="1"/>
-          <p:nvPr/>
-        </p:nvSpPr>
-        <p:spPr>
-          <a:xfrm>
-            <a:off x="4846320" y="5559552"/>
-            <a:ext cx="1371600" cy="347472"/>
-          </a:xfrm>
-          <a:prstGeom prst="rect">
-            <a:avLst/>
-          </a:prstGeom>
-          <a:noFill/>
-        </p:spPr>
-        <p:txBody>
-          <a:bodyPr wrap="square">
-            <a:spAutoFit/>
-          </a:bodyPr>
-          <a:lstStyle/>
-          <a:p>
-            <a:pPr algn="l"/>
-            <a:r>
-              <a:rPr sz="1200" b="1" i="0">
-                <a:solidFill>
-                  <a:srgbClr val="86868B"/>
-                </a:solidFill>
-              </a:rPr>
-              <a:t>Web</a:t>
-            </a:r>
-          </a:p>
-        </p:txBody>
-      </p:sp>
-      <p:sp>
-        <p:nvSpPr>
-          <p:cNvPr id="37" name="Rectangle 36"/>
+              <a:t>Three approaches, one winner</a:t>
+            </a:r>
+          </a:p>
+        </p:txBody>
+      </p:sp>
+      <p:sp>
+        <p:nvSpPr>
+          <p:cNvPr id="4" name="Rectangle 3"/>
           <p:cNvSpPr/>
           <p:nvPr/>
         </p:nvSpPr>
         <p:spPr>
           <a:xfrm>
-            <a:off x="6583680" y="1828800"/>
-            <a:ext cx="5029200" cy="1188720"/>
+            <a:off x="320040" y="1783080"/>
+            <a:ext cx="3657600" cy="4434840"/>
           </a:xfrm>
           <a:prstGeom prst="rect">
             <a:avLst/>
@@ -6127,14 +5688,14 @@
       </p:sp>
       <p:sp>
         <p:nvSpPr>
-          <p:cNvPr id="38" name="TextBox 37"/>
-          <p:cNvSpPr txBox="1"/>
-          <p:nvPr/>
-        </p:nvSpPr>
-        <p:spPr>
-          <a:xfrm>
-            <a:off x="6720840" y="1965960"/>
-            <a:ext cx="4754880" cy="228600"/>
+          <p:cNvPr id="5" name="TextBox 4"/>
+          <p:cNvSpPr txBox="1"/>
+          <p:nvPr/>
+        </p:nvSpPr>
+        <p:spPr>
+          <a:xfrm>
+            <a:off x="457200" y="1901952"/>
+            <a:ext cx="3383280" cy="256032"/>
           </a:xfrm>
           <a:prstGeom prst="rect">
             <a:avLst/>
@@ -6154,21 +5715,21 @@
                   <a:srgbClr val="86868B"/>
                 </a:solidFill>
               </a:rPr>
-              <a:t>TRAIN / VAL / TEST SPLIT</a:t>
-            </a:r>
-          </a:p>
-        </p:txBody>
-      </p:sp>
-      <p:sp>
-        <p:nvSpPr>
-          <p:cNvPr id="39" name="TextBox 38"/>
-          <p:cNvSpPr txBox="1"/>
-          <p:nvPr/>
-        </p:nvSpPr>
-        <p:spPr>
-          <a:xfrm>
-            <a:off x="6720840" y="2194560"/>
-            <a:ext cx="4754880" cy="640080"/>
+              <a:t>CUSTOM CNN</a:t>
+            </a:r>
+          </a:p>
+        </p:txBody>
+      </p:sp>
+      <p:sp>
+        <p:nvSpPr>
+          <p:cNvPr id="6" name="TextBox 5"/>
+          <p:cNvSpPr txBox="1"/>
+          <p:nvPr/>
+        </p:nvSpPr>
+        <p:spPr>
+          <a:xfrm>
+            <a:off x="457200" y="2176272"/>
+            <a:ext cx="3383280" cy="457200"/>
           </a:xfrm>
           <a:prstGeom prst="rect">
             <a:avLst/>
@@ -6183,26 +5744,26 @@
           <a:p>
             <a:pPr algn="l"/>
             <a:r>
-              <a:rPr sz="1800" b="1" i="0">
+              <a:rPr sz="2200" b="1" i="0">
                 <a:solidFill>
                   <a:srgbClr val="F5F5F7"/>
                 </a:solidFill>
               </a:rPr>
-              <a:t>70%  /  15%  /  15%</a:t>
-            </a:r>
-          </a:p>
-        </p:txBody>
-      </p:sp>
-      <p:sp>
-        <p:nvSpPr>
-          <p:cNvPr id="40" name="TextBox 39"/>
-          <p:cNvSpPr txBox="1"/>
-          <p:nvPr/>
-        </p:nvSpPr>
-        <p:spPr>
-          <a:xfrm>
-            <a:off x="6720840" y="2788920"/>
-            <a:ext cx="4754880" cy="457200"/>
+              <a:t>ObjectCNN</a:t>
+            </a:r>
+          </a:p>
+        </p:txBody>
+      </p:sp>
+      <p:sp>
+        <p:nvSpPr>
+          <p:cNvPr id="7" name="TextBox 6"/>
+          <p:cNvSpPr txBox="1"/>
+          <p:nvPr/>
+        </p:nvSpPr>
+        <p:spPr>
+          <a:xfrm>
+            <a:off x="576072" y="2724912"/>
+            <a:ext cx="3200400" cy="347472"/>
           </a:xfrm>
           <a:prstGeom prst="rect">
             <a:avLst/>
@@ -6222,31 +5783,167 @@
                   <a:srgbClr val="86868B"/>
                 </a:solidFill>
               </a:rPr>
-              <a:t>Fixed seed 42 — fully reproducible</a:t>
-            </a:r>
-          </a:p>
-        </p:txBody>
-      </p:sp>
-      <p:sp>
-        <p:nvSpPr>
-          <p:cNvPr id="41" name="Rectangle 40"/>
+              <a:t>•  3-layer conv network</a:t>
+            </a:r>
+          </a:p>
+        </p:txBody>
+      </p:sp>
+      <p:sp>
+        <p:nvSpPr>
+          <p:cNvPr id="8" name="TextBox 7"/>
+          <p:cNvSpPr txBox="1"/>
+          <p:nvPr/>
+        </p:nvSpPr>
+        <p:spPr>
+          <a:xfrm>
+            <a:off x="576072" y="3108960"/>
+            <a:ext cx="3200400" cy="347472"/>
+          </a:xfrm>
+          <a:prstGeom prst="rect">
+            <a:avLst/>
+          </a:prstGeom>
+          <a:noFill/>
+        </p:spPr>
+        <p:txBody>
+          <a:bodyPr wrap="square">
+            <a:spAutoFit/>
+          </a:bodyPr>
+          <a:lstStyle/>
+          <a:p>
+            <a:pPr algn="l"/>
+            <a:r>
+              <a:rPr sz="1200" b="0" i="0">
+                <a:solidFill>
+                  <a:srgbClr val="86868B"/>
+                </a:solidFill>
+              </a:rPr>
+              <a:t>•  64x64 RGB input</a:t>
+            </a:r>
+          </a:p>
+        </p:txBody>
+      </p:sp>
+      <p:sp>
+        <p:nvSpPr>
+          <p:cNvPr id="9" name="TextBox 8"/>
+          <p:cNvSpPr txBox="1"/>
+          <p:nvPr/>
+        </p:nvSpPr>
+        <p:spPr>
+          <a:xfrm>
+            <a:off x="576072" y="3493008"/>
+            <a:ext cx="3200400" cy="347472"/>
+          </a:xfrm>
+          <a:prstGeom prst="rect">
+            <a:avLst/>
+          </a:prstGeom>
+          <a:noFill/>
+        </p:spPr>
+        <p:txBody>
+          <a:bodyPr wrap="square">
+            <a:spAutoFit/>
+          </a:bodyPr>
+          <a:lstStyle/>
+          <a:p>
+            <a:pPr algn="l"/>
+            <a:r>
+              <a:rPr sz="1200" b="0" i="0">
+                <a:solidFill>
+                  <a:srgbClr val="86868B"/>
+                </a:solidFill>
+              </a:rPr>
+              <a:t>•  BatchNorm + Dropout 0.4</a:t>
+            </a:r>
+          </a:p>
+        </p:txBody>
+      </p:sp>
+      <p:sp>
+        <p:nvSpPr>
+          <p:cNvPr id="10" name="TextBox 9"/>
+          <p:cNvSpPr txBox="1"/>
+          <p:nvPr/>
+        </p:nvSpPr>
+        <p:spPr>
+          <a:xfrm>
+            <a:off x="576072" y="3877056"/>
+            <a:ext cx="3200400" cy="347472"/>
+          </a:xfrm>
+          <a:prstGeom prst="rect">
+            <a:avLst/>
+          </a:prstGeom>
+          <a:noFill/>
+        </p:spPr>
+        <p:txBody>
+          <a:bodyPr wrap="square">
+            <a:spAutoFit/>
+          </a:bodyPr>
+          <a:lstStyle/>
+          <a:p>
+            <a:pPr algn="l"/>
+            <a:r>
+              <a:rPr sz="1200" b="0" i="0">
+                <a:solidFill>
+                  <a:srgbClr val="86868B"/>
+                </a:solidFill>
+              </a:rPr>
+              <a:t>•  Trained from scratch</a:t>
+            </a:r>
+          </a:p>
+        </p:txBody>
+      </p:sp>
+      <p:sp>
+        <p:nvSpPr>
+          <p:cNvPr id="11" name="TextBox 10"/>
+          <p:cNvSpPr txBox="1"/>
+          <p:nvPr/>
+        </p:nvSpPr>
+        <p:spPr>
+          <a:xfrm>
+            <a:off x="576072" y="4261104"/>
+            <a:ext cx="3200400" cy="347472"/>
+          </a:xfrm>
+          <a:prstGeom prst="rect">
+            <a:avLst/>
+          </a:prstGeom>
+          <a:noFill/>
+        </p:spPr>
+        <p:txBody>
+          <a:bodyPr wrap="square">
+            <a:spAutoFit/>
+          </a:bodyPr>
+          <a:lstStyle/>
+          <a:p>
+            <a:pPr algn="l"/>
+            <a:r>
+              <a:rPr sz="1200" b="0" i="0">
+                <a:solidFill>
+                  <a:srgbClr val="86868B"/>
+                </a:solidFill>
+              </a:rPr>
+              <a:t>•  2.19M parameters</a:t>
+            </a:r>
+          </a:p>
+        </p:txBody>
+      </p:sp>
+      <p:sp>
+        <p:nvSpPr>
+          <p:cNvPr id="12" name="Rectangle 11"/>
           <p:cNvSpPr/>
           <p:nvPr/>
         </p:nvSpPr>
         <p:spPr>
           <a:xfrm>
-            <a:off x="6583680" y="3154680"/>
-            <a:ext cx="5029200" cy="1005840"/>
+            <a:off x="457200" y="5596128"/>
+            <a:ext cx="3383280" cy="384048"/>
           </a:xfrm>
           <a:prstGeom prst="rect">
             <a:avLst/>
           </a:prstGeom>
           <a:solidFill>
-            <a:srgbClr val="161617"/>
+            <a:srgbClr val="1A1A1C"/>
           </a:solidFill>
           <a:ln w="12700">
             <a:solidFill>
-              <a:srgbClr val="2D2D2F"/>
+              <a:srgbClr val="1A1A1C"/>
             </a:solidFill>
           </a:ln>
         </p:spPr>
@@ -6274,92 +5971,58 @@
       </p:sp>
       <p:sp>
         <p:nvSpPr>
-          <p:cNvPr id="42" name="TextBox 41"/>
-          <p:cNvSpPr txBox="1"/>
-          <p:nvPr/>
-        </p:nvSpPr>
-        <p:spPr>
-          <a:xfrm>
-            <a:off x="6720840" y="3291840"/>
-            <a:ext cx="4754880" cy="228600"/>
-          </a:xfrm>
-          <a:prstGeom prst="rect">
-            <a:avLst/>
-          </a:prstGeom>
-          <a:noFill/>
-        </p:spPr>
-        <p:txBody>
-          <a:bodyPr wrap="square">
-            <a:spAutoFit/>
-          </a:bodyPr>
-          <a:lstStyle/>
-          <a:p>
-            <a:pPr algn="l"/>
-            <a:r>
-              <a:rPr sz="900" b="1" i="0">
+          <p:cNvPr id="13" name="TextBox 12"/>
+          <p:cNvSpPr txBox="1"/>
+          <p:nvPr/>
+        </p:nvSpPr>
+        <p:spPr>
+          <a:xfrm>
+            <a:off x="457200" y="5596128"/>
+            <a:ext cx="3383280" cy="384048"/>
+          </a:xfrm>
+          <a:prstGeom prst="rect">
+            <a:avLst/>
+          </a:prstGeom>
+          <a:noFill/>
+        </p:spPr>
+        <p:txBody>
+          <a:bodyPr wrap="square">
+            <a:spAutoFit/>
+          </a:bodyPr>
+          <a:lstStyle/>
+          <a:p>
+            <a:pPr algn="ctr"/>
+            <a:r>
+              <a:rPr sz="1300" b="1" i="0">
                 <a:solidFill>
                   <a:srgbClr val="86868B"/>
                 </a:solidFill>
               </a:rPr>
-              <a:t>AUGMENTATION (TRAIN ONLY)</a:t>
-            </a:r>
-          </a:p>
-        </p:txBody>
-      </p:sp>
-      <p:sp>
-        <p:nvSpPr>
-          <p:cNvPr id="43" name="TextBox 42"/>
-          <p:cNvSpPr txBox="1"/>
-          <p:nvPr/>
-        </p:nvSpPr>
-        <p:spPr>
-          <a:xfrm>
-            <a:off x="6720840" y="3520440"/>
-            <a:ext cx="4754880" cy="640080"/>
-          </a:xfrm>
-          <a:prstGeom prst="rect">
-            <a:avLst/>
-          </a:prstGeom>
-          <a:noFill/>
-        </p:spPr>
-        <p:txBody>
-          <a:bodyPr wrap="square">
-            <a:spAutoFit/>
-          </a:bodyPr>
-          <a:lstStyle/>
-          <a:p>
-            <a:pPr algn="l"/>
-            <a:r>
-              <a:rPr sz="1400" b="1" i="0">
-                <a:solidFill>
-                  <a:srgbClr val="F5F5F7"/>
-                </a:solidFill>
-              </a:rPr>
-              <a:t>Flip · Jitter · ±15° rotation</a:t>
-            </a:r>
-          </a:p>
-        </p:txBody>
-      </p:sp>
-      <p:sp>
-        <p:nvSpPr>
-          <p:cNvPr id="44" name="Rectangle 43"/>
+              <a:t>79.7% on 5 classes</a:t>
+            </a:r>
+          </a:p>
+        </p:txBody>
+      </p:sp>
+      <p:sp>
+        <p:nvSpPr>
+          <p:cNvPr id="14" name="Rectangle 13"/>
           <p:cNvSpPr/>
           <p:nvPr/>
         </p:nvSpPr>
         <p:spPr>
           <a:xfrm>
-            <a:off x="6583680" y="4297680"/>
-            <a:ext cx="5029200" cy="1051560"/>
+            <a:off x="4251959" y="1783080"/>
+            <a:ext cx="3657600" cy="4434840"/>
           </a:xfrm>
           <a:prstGeom prst="rect">
             <a:avLst/>
           </a:prstGeom>
           <a:solidFill>
-            <a:srgbClr val="0A1929"/>
+            <a:srgbClr val="161617"/>
           </a:solidFill>
           <a:ln w="12700">
             <a:solidFill>
-              <a:srgbClr val="1A6FC4"/>
+              <a:srgbClr val="2D2D2F"/>
             </a:solidFill>
           </a:ln>
         </p:spPr>
@@ -6387,14 +6050,14 @@
       </p:sp>
       <p:sp>
         <p:nvSpPr>
-          <p:cNvPr id="45" name="TextBox 44"/>
-          <p:cNvSpPr txBox="1"/>
-          <p:nvPr/>
-        </p:nvSpPr>
-        <p:spPr>
-          <a:xfrm>
-            <a:off x="6720840" y="4434840"/>
-            <a:ext cx="4754880" cy="228600"/>
+          <p:cNvPr id="15" name="TextBox 14"/>
+          <p:cNvSpPr txBox="1"/>
+          <p:nvPr/>
+        </p:nvSpPr>
+        <p:spPr>
+          <a:xfrm>
+            <a:off x="4389120" y="1901952"/>
+            <a:ext cx="3383280" cy="256032"/>
           </a:xfrm>
           <a:prstGeom prst="rect">
             <a:avLst/>
@@ -6414,21 +6077,21 @@
                   <a:srgbClr val="86868B"/>
                 </a:solidFill>
               </a:rPr>
-              <a:t>KEY OBSERVATION</a:t>
-            </a:r>
-          </a:p>
-        </p:txBody>
-      </p:sp>
-      <p:sp>
-        <p:nvSpPr>
-          <p:cNvPr id="46" name="TextBox 45"/>
-          <p:cNvSpPr txBox="1"/>
-          <p:nvPr/>
-        </p:nvSpPr>
-        <p:spPr>
-          <a:xfrm>
-            <a:off x="6720840" y="5257800"/>
-            <a:ext cx="4754880" cy="457200"/>
+              <a:t>VISION TRANSFORMER</a:t>
+            </a:r>
+          </a:p>
+        </p:txBody>
+      </p:sp>
+      <p:sp>
+        <p:nvSpPr>
+          <p:cNvPr id="16" name="TextBox 15"/>
+          <p:cNvSpPr txBox="1"/>
+          <p:nvPr/>
+        </p:nvSpPr>
+        <p:spPr>
+          <a:xfrm>
+            <a:off x="4389120" y="2176272"/>
+            <a:ext cx="3383280" cy="457200"/>
           </a:xfrm>
           <a:prstGeom prst="rect">
             <a:avLst/>
@@ -6443,12 +6106,623 @@
           <a:p>
             <a:pPr algn="l"/>
             <a:r>
-              <a:rPr sz="1300" b="0" i="0">
+              <a:rPr sz="2200" b="1" i="0">
+                <a:solidFill>
+                  <a:srgbClr val="F5F5F7"/>
+                </a:solidFill>
+              </a:rPr>
+              <a:t>ObjectViT</a:t>
+            </a:r>
+          </a:p>
+        </p:txBody>
+      </p:sp>
+      <p:sp>
+        <p:nvSpPr>
+          <p:cNvPr id="17" name="TextBox 16"/>
+          <p:cNvSpPr txBox="1"/>
+          <p:nvPr/>
+        </p:nvSpPr>
+        <p:spPr>
+          <a:xfrm>
+            <a:off x="4507992" y="2724912"/>
+            <a:ext cx="3200400" cy="347472"/>
+          </a:xfrm>
+          <a:prstGeom prst="rect">
+            <a:avLst/>
+          </a:prstGeom>
+          <a:noFill/>
+        </p:spPr>
+        <p:txBody>
+          <a:bodyPr wrap="square">
+            <a:spAutoFit/>
+          </a:bodyPr>
+          <a:lstStyle/>
+          <a:p>
+            <a:pPr algn="l"/>
+            <a:r>
+              <a:rPr sz="1200" b="0" i="0">
                 <a:solidFill>
                   <a:srgbClr val="86868B"/>
                 </a:solidFill>
               </a:rPr>
-              <a:t>Webcam classes outperform web-only classes — data quality matters more than quantity</a:t>
+              <a:t>•  8x8 patch embedding</a:t>
+            </a:r>
+          </a:p>
+        </p:txBody>
+      </p:sp>
+      <p:sp>
+        <p:nvSpPr>
+          <p:cNvPr id="18" name="TextBox 17"/>
+          <p:cNvSpPr txBox="1"/>
+          <p:nvPr/>
+        </p:nvSpPr>
+        <p:spPr>
+          <a:xfrm>
+            <a:off x="4507992" y="3108960"/>
+            <a:ext cx="3200400" cy="347472"/>
+          </a:xfrm>
+          <a:prstGeom prst="rect">
+            <a:avLst/>
+          </a:prstGeom>
+          <a:noFill/>
+        </p:spPr>
+        <p:txBody>
+          <a:bodyPr wrap="square">
+            <a:spAutoFit/>
+          </a:bodyPr>
+          <a:lstStyle/>
+          <a:p>
+            <a:pPr algn="l"/>
+            <a:r>
+              <a:rPr sz="1200" b="0" i="0">
+                <a:solidFill>
+                  <a:srgbClr val="86868B"/>
+                </a:solidFill>
+              </a:rPr>
+              <a:t>•  64 patches per image</a:t>
+            </a:r>
+          </a:p>
+        </p:txBody>
+      </p:sp>
+      <p:sp>
+        <p:nvSpPr>
+          <p:cNvPr id="19" name="TextBox 18"/>
+          <p:cNvSpPr txBox="1"/>
+          <p:nvPr/>
+        </p:nvSpPr>
+        <p:spPr>
+          <a:xfrm>
+            <a:off x="4507992" y="3493008"/>
+            <a:ext cx="3200400" cy="347472"/>
+          </a:xfrm>
+          <a:prstGeom prst="rect">
+            <a:avLst/>
+          </a:prstGeom>
+          <a:noFill/>
+        </p:spPr>
+        <p:txBody>
+          <a:bodyPr wrap="square">
+            <a:spAutoFit/>
+          </a:bodyPr>
+          <a:lstStyle/>
+          <a:p>
+            <a:pPr algn="l"/>
+            <a:r>
+              <a:rPr sz="1200" b="0" i="0">
+                <a:solidFill>
+                  <a:srgbClr val="86868B"/>
+                </a:solidFill>
+              </a:rPr>
+              <a:t>•  4 transformer layers</a:t>
+            </a:r>
+          </a:p>
+        </p:txBody>
+      </p:sp>
+      <p:sp>
+        <p:nvSpPr>
+          <p:cNvPr id="20" name="TextBox 19"/>
+          <p:cNvSpPr txBox="1"/>
+          <p:nvPr/>
+        </p:nvSpPr>
+        <p:spPr>
+          <a:xfrm>
+            <a:off x="4507992" y="3877056"/>
+            <a:ext cx="3200400" cy="347472"/>
+          </a:xfrm>
+          <a:prstGeom prst="rect">
+            <a:avLst/>
+          </a:prstGeom>
+          <a:noFill/>
+        </p:spPr>
+        <p:txBody>
+          <a:bodyPr wrap="square">
+            <a:spAutoFit/>
+          </a:bodyPr>
+          <a:lstStyle/>
+          <a:p>
+            <a:pPr algn="l"/>
+            <a:r>
+              <a:rPr sz="1200" b="0" i="0">
+                <a:solidFill>
+                  <a:srgbClr val="86868B"/>
+                </a:solidFill>
+              </a:rPr>
+              <a:t>•  Trained from scratch</a:t>
+            </a:r>
+          </a:p>
+        </p:txBody>
+      </p:sp>
+      <p:sp>
+        <p:nvSpPr>
+          <p:cNvPr id="21" name="TextBox 20"/>
+          <p:cNvSpPr txBox="1"/>
+          <p:nvPr/>
+        </p:nvSpPr>
+        <p:spPr>
+          <a:xfrm>
+            <a:off x="4507992" y="4261104"/>
+            <a:ext cx="3200400" cy="347472"/>
+          </a:xfrm>
+          <a:prstGeom prst="rect">
+            <a:avLst/>
+          </a:prstGeom>
+          <a:noFill/>
+        </p:spPr>
+        <p:txBody>
+          <a:bodyPr wrap="square">
+            <a:spAutoFit/>
+          </a:bodyPr>
+          <a:lstStyle/>
+          <a:p>
+            <a:pPr algn="l"/>
+            <a:r>
+              <a:rPr sz="1200" b="0" i="0">
+                <a:solidFill>
+                  <a:srgbClr val="86868B"/>
+                </a:solidFill>
+              </a:rPr>
+              <a:t>•  0.83M parameters</a:t>
+            </a:r>
+          </a:p>
+        </p:txBody>
+      </p:sp>
+      <p:sp>
+        <p:nvSpPr>
+          <p:cNvPr id="22" name="Rectangle 21"/>
+          <p:cNvSpPr/>
+          <p:nvPr/>
+        </p:nvSpPr>
+        <p:spPr>
+          <a:xfrm>
+            <a:off x="4389120" y="5596128"/>
+            <a:ext cx="3383280" cy="384048"/>
+          </a:xfrm>
+          <a:prstGeom prst="rect">
+            <a:avLst/>
+          </a:prstGeom>
+          <a:solidFill>
+            <a:srgbClr val="1A1A1C"/>
+          </a:solidFill>
+          <a:ln w="12700">
+            <a:solidFill>
+              <a:srgbClr val="1A1A1C"/>
+            </a:solidFill>
+          </a:ln>
+        </p:spPr>
+        <p:style>
+          <a:lnRef idx="1">
+            <a:schemeClr val="accent1"/>
+          </a:lnRef>
+          <a:fillRef idx="3">
+            <a:schemeClr val="accent1"/>
+          </a:fillRef>
+          <a:effectRef idx="2">
+            <a:schemeClr val="accent1"/>
+          </a:effectRef>
+          <a:fontRef idx="minor">
+            <a:schemeClr val="lt1"/>
+          </a:fontRef>
+        </p:style>
+        <p:txBody>
+          <a:bodyPr rtlCol="0" anchor="ctr"/>
+          <a:lstStyle/>
+          <a:p>
+            <a:pPr algn="ctr"/>
+          </a:p>
+        </p:txBody>
+      </p:sp>
+      <p:sp>
+        <p:nvSpPr>
+          <p:cNvPr id="23" name="TextBox 22"/>
+          <p:cNvSpPr txBox="1"/>
+          <p:nvPr/>
+        </p:nvSpPr>
+        <p:spPr>
+          <a:xfrm>
+            <a:off x="4389120" y="5596128"/>
+            <a:ext cx="3383280" cy="384048"/>
+          </a:xfrm>
+          <a:prstGeom prst="rect">
+            <a:avLst/>
+          </a:prstGeom>
+          <a:noFill/>
+        </p:spPr>
+        <p:txBody>
+          <a:bodyPr wrap="square">
+            <a:spAutoFit/>
+          </a:bodyPr>
+          <a:lstStyle/>
+          <a:p>
+            <a:pPr algn="ctr"/>
+            <a:r>
+              <a:rPr sz="1300" b="1" i="0">
+                <a:solidFill>
+                  <a:srgbClr val="86868B"/>
+                </a:solidFill>
+              </a:rPr>
+              <a:t>43.2% on 10 classes</a:t>
+            </a:r>
+          </a:p>
+        </p:txBody>
+      </p:sp>
+      <p:sp>
+        <p:nvSpPr>
+          <p:cNvPr id="24" name="Rectangle 23"/>
+          <p:cNvSpPr/>
+          <p:nvPr/>
+        </p:nvSpPr>
+        <p:spPr>
+          <a:xfrm>
+            <a:off x="8183879" y="1783080"/>
+            <a:ext cx="3657600" cy="4434840"/>
+          </a:xfrm>
+          <a:prstGeom prst="rect">
+            <a:avLst/>
+          </a:prstGeom>
+          <a:solidFill>
+            <a:srgbClr val="0A1929"/>
+          </a:solidFill>
+          <a:ln w="25400">
+            <a:solidFill>
+              <a:srgbClr val="2997FF"/>
+            </a:solidFill>
+          </a:ln>
+        </p:spPr>
+        <p:style>
+          <a:lnRef idx="1">
+            <a:schemeClr val="accent1"/>
+          </a:lnRef>
+          <a:fillRef idx="3">
+            <a:schemeClr val="accent1"/>
+          </a:fillRef>
+          <a:effectRef idx="2">
+            <a:schemeClr val="accent1"/>
+          </a:effectRef>
+          <a:fontRef idx="minor">
+            <a:schemeClr val="lt1"/>
+          </a:fontRef>
+        </p:style>
+        <p:txBody>
+          <a:bodyPr rtlCol="0" anchor="ctr"/>
+          <a:lstStyle/>
+          <a:p>
+            <a:pPr algn="ctr"/>
+          </a:p>
+        </p:txBody>
+      </p:sp>
+      <p:sp>
+        <p:nvSpPr>
+          <p:cNvPr id="25" name="TextBox 24"/>
+          <p:cNvSpPr txBox="1"/>
+          <p:nvPr/>
+        </p:nvSpPr>
+        <p:spPr>
+          <a:xfrm>
+            <a:off x="8321040" y="1901952"/>
+            <a:ext cx="3383280" cy="256032"/>
+          </a:xfrm>
+          <a:prstGeom prst="rect">
+            <a:avLst/>
+          </a:prstGeom>
+          <a:noFill/>
+        </p:spPr>
+        <p:txBody>
+          <a:bodyPr wrap="square">
+            <a:spAutoFit/>
+          </a:bodyPr>
+          <a:lstStyle/>
+          <a:p>
+            <a:pPr algn="l"/>
+            <a:r>
+              <a:rPr sz="900" b="1" i="0">
+                <a:solidFill>
+                  <a:srgbClr val="2997FF"/>
+                </a:solidFill>
+              </a:rPr>
+              <a:t>TRANSFER LEARNING  ❖  DEPLOYED</a:t>
+            </a:r>
+          </a:p>
+        </p:txBody>
+      </p:sp>
+      <p:sp>
+        <p:nvSpPr>
+          <p:cNvPr id="26" name="TextBox 25"/>
+          <p:cNvSpPr txBox="1"/>
+          <p:nvPr/>
+        </p:nvSpPr>
+        <p:spPr>
+          <a:xfrm>
+            <a:off x="8321040" y="2176272"/>
+            <a:ext cx="3383280" cy="457200"/>
+          </a:xfrm>
+          <a:prstGeom prst="rect">
+            <a:avLst/>
+          </a:prstGeom>
+          <a:noFill/>
+        </p:spPr>
+        <p:txBody>
+          <a:bodyPr wrap="square">
+            <a:spAutoFit/>
+          </a:bodyPr>
+          <a:lstStyle/>
+          <a:p>
+            <a:pPr algn="l"/>
+            <a:r>
+              <a:rPr sz="2200" b="1" i="0">
+                <a:solidFill>
+                  <a:srgbClr val="F5F5F7"/>
+                </a:solidFill>
+              </a:rPr>
+              <a:t>MobileNetV2</a:t>
+            </a:r>
+          </a:p>
+        </p:txBody>
+      </p:sp>
+      <p:sp>
+        <p:nvSpPr>
+          <p:cNvPr id="27" name="TextBox 26"/>
+          <p:cNvSpPr txBox="1"/>
+          <p:nvPr/>
+        </p:nvSpPr>
+        <p:spPr>
+          <a:xfrm>
+            <a:off x="8439911" y="2724912"/>
+            <a:ext cx="3200400" cy="347472"/>
+          </a:xfrm>
+          <a:prstGeom prst="rect">
+            <a:avLst/>
+          </a:prstGeom>
+          <a:noFill/>
+        </p:spPr>
+        <p:txBody>
+          <a:bodyPr wrap="square">
+            <a:spAutoFit/>
+          </a:bodyPr>
+          <a:lstStyle/>
+          <a:p>
+            <a:pPr algn="l"/>
+            <a:r>
+              <a:rPr sz="1200" b="0" i="0">
+                <a:solidFill>
+                  <a:srgbClr val="86868B"/>
+                </a:solidFill>
+              </a:rPr>
+              <a:t>•  ImageNet pretrained</a:t>
+            </a:r>
+          </a:p>
+        </p:txBody>
+      </p:sp>
+      <p:sp>
+        <p:nvSpPr>
+          <p:cNvPr id="28" name="TextBox 27"/>
+          <p:cNvSpPr txBox="1"/>
+          <p:nvPr/>
+        </p:nvSpPr>
+        <p:spPr>
+          <a:xfrm>
+            <a:off x="8439911" y="3108960"/>
+            <a:ext cx="3200400" cy="347472"/>
+          </a:xfrm>
+          <a:prstGeom prst="rect">
+            <a:avLst/>
+          </a:prstGeom>
+          <a:noFill/>
+        </p:spPr>
+        <p:txBody>
+          <a:bodyPr wrap="square">
+            <a:spAutoFit/>
+          </a:bodyPr>
+          <a:lstStyle/>
+          <a:p>
+            <a:pPr algn="l"/>
+            <a:r>
+              <a:rPr sz="1200" b="0" i="0">
+                <a:solidFill>
+                  <a:srgbClr val="86868B"/>
+                </a:solidFill>
+              </a:rPr>
+              <a:t>•  224x224 RGB input</a:t>
+            </a:r>
+          </a:p>
+        </p:txBody>
+      </p:sp>
+      <p:sp>
+        <p:nvSpPr>
+          <p:cNvPr id="29" name="TextBox 28"/>
+          <p:cNvSpPr txBox="1"/>
+          <p:nvPr/>
+        </p:nvSpPr>
+        <p:spPr>
+          <a:xfrm>
+            <a:off x="8439911" y="3493008"/>
+            <a:ext cx="3200400" cy="347472"/>
+          </a:xfrm>
+          <a:prstGeom prst="rect">
+            <a:avLst/>
+          </a:prstGeom>
+          <a:noFill/>
+        </p:spPr>
+        <p:txBody>
+          <a:bodyPr wrap="square">
+            <a:spAutoFit/>
+          </a:bodyPr>
+          <a:lstStyle/>
+          <a:p>
+            <a:pPr algn="l"/>
+            <a:r>
+              <a:rPr sz="1200" b="0" i="0">
+                <a:solidFill>
+                  <a:srgbClr val="86868B"/>
+                </a:solidFill>
+              </a:rPr>
+              <a:t>•  Fine-tuned classifier head</a:t>
+            </a:r>
+          </a:p>
+        </p:txBody>
+      </p:sp>
+      <p:sp>
+        <p:nvSpPr>
+          <p:cNvPr id="30" name="TextBox 29"/>
+          <p:cNvSpPr txBox="1"/>
+          <p:nvPr/>
+        </p:nvSpPr>
+        <p:spPr>
+          <a:xfrm>
+            <a:off x="8439911" y="3877056"/>
+            <a:ext cx="3200400" cy="347472"/>
+          </a:xfrm>
+          <a:prstGeom prst="rect">
+            <a:avLst/>
+          </a:prstGeom>
+          <a:noFill/>
+        </p:spPr>
+        <p:txBody>
+          <a:bodyPr wrap="square">
+            <a:spAutoFit/>
+          </a:bodyPr>
+          <a:lstStyle/>
+          <a:p>
+            <a:pPr algn="l"/>
+            <a:r>
+              <a:rPr sz="1200" b="0" i="0">
+                <a:solidFill>
+                  <a:srgbClr val="86868B"/>
+                </a:solidFill>
+              </a:rPr>
+              <a:t>•  Dropout 0.3</a:t>
+            </a:r>
+          </a:p>
+        </p:txBody>
+      </p:sp>
+      <p:sp>
+        <p:nvSpPr>
+          <p:cNvPr id="31" name="TextBox 30"/>
+          <p:cNvSpPr txBox="1"/>
+          <p:nvPr/>
+        </p:nvSpPr>
+        <p:spPr>
+          <a:xfrm>
+            <a:off x="8439911" y="4261104"/>
+            <a:ext cx="3200400" cy="347472"/>
+          </a:xfrm>
+          <a:prstGeom prst="rect">
+            <a:avLst/>
+          </a:prstGeom>
+          <a:noFill/>
+        </p:spPr>
+        <p:txBody>
+          <a:bodyPr wrap="square">
+            <a:spAutoFit/>
+          </a:bodyPr>
+          <a:lstStyle/>
+          <a:p>
+            <a:pPr algn="l"/>
+            <a:r>
+              <a:rPr sz="1200" b="0" i="0">
+                <a:solidFill>
+                  <a:srgbClr val="86868B"/>
+                </a:solidFill>
+              </a:rPr>
+              <a:t>•  2.24M parameters</a:t>
+            </a:r>
+          </a:p>
+        </p:txBody>
+      </p:sp>
+      <p:sp>
+        <p:nvSpPr>
+          <p:cNvPr id="32" name="Rectangle 31"/>
+          <p:cNvSpPr/>
+          <p:nvPr/>
+        </p:nvSpPr>
+        <p:spPr>
+          <a:xfrm>
+            <a:off x="8321040" y="5596128"/>
+            <a:ext cx="3383280" cy="384048"/>
+          </a:xfrm>
+          <a:prstGeom prst="rect">
+            <a:avLst/>
+          </a:prstGeom>
+          <a:solidFill>
+            <a:srgbClr val="0D2A45"/>
+          </a:solidFill>
+          <a:ln w="12700">
+            <a:solidFill>
+              <a:srgbClr val="0D2A45"/>
+            </a:solidFill>
+          </a:ln>
+        </p:spPr>
+        <p:style>
+          <a:lnRef idx="1">
+            <a:schemeClr val="accent1"/>
+          </a:lnRef>
+          <a:fillRef idx="3">
+            <a:schemeClr val="accent1"/>
+          </a:fillRef>
+          <a:effectRef idx="2">
+            <a:schemeClr val="accent1"/>
+          </a:effectRef>
+          <a:fontRef idx="minor">
+            <a:schemeClr val="lt1"/>
+          </a:fontRef>
+        </p:style>
+        <p:txBody>
+          <a:bodyPr rtlCol="0" anchor="ctr"/>
+          <a:lstStyle/>
+          <a:p>
+            <a:pPr algn="ctr"/>
+          </a:p>
+        </p:txBody>
+      </p:sp>
+      <p:sp>
+        <p:nvSpPr>
+          <p:cNvPr id="33" name="TextBox 32"/>
+          <p:cNvSpPr txBox="1"/>
+          <p:nvPr/>
+        </p:nvSpPr>
+        <p:spPr>
+          <a:xfrm>
+            <a:off x="8321040" y="5596128"/>
+            <a:ext cx="3383280" cy="384048"/>
+          </a:xfrm>
+          <a:prstGeom prst="rect">
+            <a:avLst/>
+          </a:prstGeom>
+          <a:noFill/>
+        </p:spPr>
+        <p:txBody>
+          <a:bodyPr wrap="square">
+            <a:spAutoFit/>
+          </a:bodyPr>
+          <a:lstStyle/>
+          <a:p>
+            <a:pPr algn="ctr"/>
+            <a:r>
+              <a:rPr sz="1300" b="1" i="0">
+                <a:solidFill>
+                  <a:srgbClr val="2997FF"/>
+                </a:solidFill>
+              </a:rPr>
+              <a:t>88.8% on 10 classes</a:t>
             </a:r>
           </a:p>
         </p:txBody>
@@ -6487,8 +6761,8 @@
         </p:nvSpPr>
         <p:spPr>
           <a:xfrm>
-            <a:off x="0" y="411480"/>
-            <a:ext cx="12188952" cy="365760"/>
+            <a:off x="0" y="365760"/>
+            <a:ext cx="12188952" cy="320040"/>
           </a:xfrm>
           <a:prstGeom prst="rect">
             <a:avLst/>
@@ -6508,7 +6782,7 @@
                   <a:srgbClr val="2997FF"/>
                 </a:solidFill>
               </a:rPr>
-              <a:t>MODEL ARCHITECTURES</a:t>
+              <a:t>WHERE IT STRUGGLES</a:t>
             </a:r>
           </a:p>
         </p:txBody>
@@ -6521,7 +6795,7 @@
         </p:nvSpPr>
         <p:spPr>
           <a:xfrm>
-            <a:off x="457200" y="777240"/>
+            <a:off x="457200" y="749808"/>
             <a:ext cx="11274552" cy="914400"/>
           </a:xfrm>
           <a:prstGeom prst="rect">
@@ -6537,26 +6811,50 @@
           <a:p>
             <a:pPr algn="ctr"/>
             <a:r>
-              <a:rPr sz="3600" b="1" i="0">
+              <a:rPr sz="3200" b="1" i="0">
                 <a:solidFill>
                   <a:srgbClr val="F5F5F7"/>
                 </a:solidFill>
               </a:rPr>
-              <a:t>Three approaches, one winner</a:t>
-            </a:r>
-          </a:p>
-        </p:txBody>
-      </p:sp>
-      <p:sp>
-        <p:nvSpPr>
-          <p:cNvPr id="4" name="Rectangle 3"/>
+              <a:t>Confusion tells the story</a:t>
+            </a:r>
+          </a:p>
+        </p:txBody>
+      </p:sp>
+      <p:pic>
+        <p:nvPicPr>
+          <p:cNvPr id="4" name="Picture 3" descr="MOBILENET_ConfusionMatrix.png"/>
+          <p:cNvPicPr>
+            <a:picLocks noChangeAspect="1"/>
+          </p:cNvPicPr>
+          <p:nvPr/>
+        </p:nvPicPr>
+        <p:blipFill>
+          <a:blip r:embed="rId2"/>
+          <a:stretch>
+            <a:fillRect/>
+          </a:stretch>
+        </p:blipFill>
+        <p:spPr>
+          <a:xfrm>
+            <a:off x="365760" y="1691640"/>
+            <a:ext cx="5577840" cy="5020056"/>
+          </a:xfrm>
+          <a:prstGeom prst="rect">
+            <a:avLst/>
+          </a:prstGeom>
+        </p:spPr>
+      </p:pic>
+      <p:sp>
+        <p:nvSpPr>
+          <p:cNvPr id="5" name="Rectangle 4"/>
           <p:cNvSpPr/>
           <p:nvPr/>
         </p:nvSpPr>
         <p:spPr>
           <a:xfrm>
-            <a:off x="365760" y="1828800"/>
-            <a:ext cx="3657600" cy="4389120"/>
+            <a:off x="6263640" y="1691640"/>
+            <a:ext cx="5486400" cy="1371600"/>
           </a:xfrm>
           <a:prstGeom prst="rect">
             <a:avLst/>
@@ -6594,14 +6892,14 @@
       </p:sp>
       <p:sp>
         <p:nvSpPr>
-          <p:cNvPr id="5" name="TextBox 4"/>
-          <p:cNvSpPr txBox="1"/>
-          <p:nvPr/>
-        </p:nvSpPr>
-        <p:spPr>
-          <a:xfrm>
-            <a:off x="502920" y="1920240"/>
-            <a:ext cx="3383280" cy="274320"/>
+          <p:cNvPr id="6" name="TextBox 5"/>
+          <p:cNvSpPr txBox="1"/>
+          <p:nvPr/>
+        </p:nvSpPr>
+        <p:spPr>
+          <a:xfrm>
+            <a:off x="6391655" y="1801368"/>
+            <a:ext cx="5230368" cy="237744"/>
           </a:xfrm>
           <a:prstGeom prst="rect">
             <a:avLst/>
@@ -6618,237 +6916,69 @@
             <a:r>
               <a:rPr sz="900" b="1" i="0">
                 <a:solidFill>
+                  <a:srgbClr val="FF453A"/>
+                </a:solidFill>
+              </a:rPr>
+              <a:t>TABLET — WEAKEST CLASS</a:t>
+            </a:r>
+          </a:p>
+        </p:txBody>
+      </p:sp>
+      <p:sp>
+        <p:nvSpPr>
+          <p:cNvPr id="7" name="TextBox 6"/>
+          <p:cNvSpPr txBox="1"/>
+          <p:nvPr/>
+        </p:nvSpPr>
+        <p:spPr>
+          <a:xfrm>
+            <a:off x="6391655" y="2057400"/>
+            <a:ext cx="5230368" cy="914400"/>
+          </a:xfrm>
+          <a:prstGeom prst="rect">
+            <a:avLst/>
+          </a:prstGeom>
+          <a:noFill/>
+        </p:spPr>
+        <p:txBody>
+          <a:bodyPr wrap="square">
+            <a:spAutoFit/>
+          </a:bodyPr>
+          <a:lstStyle/>
+          <a:p>
+            <a:pPr algn="l"/>
+            <a:r>
+              <a:rPr sz="1300" b="0" i="0">
+                <a:solidFill>
                   <a:srgbClr val="86868B"/>
                 </a:solidFill>
               </a:rPr>
-              <a:t>CUSTOM CNN</a:t>
-            </a:r>
-          </a:p>
-        </p:txBody>
-      </p:sp>
-      <p:sp>
-        <p:nvSpPr>
-          <p:cNvPr id="6" name="TextBox 5"/>
-          <p:cNvSpPr txBox="1"/>
-          <p:nvPr/>
-        </p:nvSpPr>
-        <p:spPr>
-          <a:xfrm>
-            <a:off x="502920" y="2194560"/>
-            <a:ext cx="3383280" cy="411480"/>
-          </a:xfrm>
-          <a:prstGeom prst="rect">
-            <a:avLst/>
-          </a:prstGeom>
-          <a:noFill/>
-        </p:spPr>
-        <p:txBody>
-          <a:bodyPr wrap="square">
-            <a:spAutoFit/>
-          </a:bodyPr>
-          <a:lstStyle/>
-          <a:p>
-            <a:pPr algn="l"/>
-            <a:r>
-              <a:rPr sz="2200" b="1" i="0">
-                <a:solidFill>
-                  <a:srgbClr val="F5F5F7"/>
-                </a:solidFill>
-              </a:rPr>
-              <a:t>ObjectCNN</a:t>
-            </a:r>
-          </a:p>
-        </p:txBody>
-      </p:sp>
-      <p:sp>
-        <p:nvSpPr>
-          <p:cNvPr id="7" name="TextBox 6"/>
-          <p:cNvSpPr txBox="1"/>
-          <p:nvPr/>
-        </p:nvSpPr>
-        <p:spPr>
-          <a:xfrm>
-            <a:off x="640080" y="2697480"/>
-            <a:ext cx="3200400" cy="320040"/>
-          </a:xfrm>
-          <a:prstGeom prst="rect">
-            <a:avLst/>
-          </a:prstGeom>
-          <a:noFill/>
-        </p:spPr>
-        <p:txBody>
-          <a:bodyPr wrap="square">
-            <a:spAutoFit/>
-          </a:bodyPr>
-          <a:lstStyle/>
-          <a:p>
-            <a:pPr algn="l"/>
-            <a:r>
-              <a:rPr sz="1200" b="0" i="0">
-                <a:solidFill>
-                  <a:srgbClr val="86868B"/>
-                </a:solidFill>
-              </a:rPr>
-              <a:t>• 3-layer conv network</a:t>
-            </a:r>
-          </a:p>
-        </p:txBody>
-      </p:sp>
-      <p:sp>
-        <p:nvSpPr>
-          <p:cNvPr id="8" name="TextBox 7"/>
-          <p:cNvSpPr txBox="1"/>
-          <p:nvPr/>
-        </p:nvSpPr>
-        <p:spPr>
-          <a:xfrm>
-            <a:off x="640080" y="3063240"/>
-            <a:ext cx="3200400" cy="320040"/>
-          </a:xfrm>
-          <a:prstGeom prst="rect">
-            <a:avLst/>
-          </a:prstGeom>
-          <a:noFill/>
-        </p:spPr>
-        <p:txBody>
-          <a:bodyPr wrap="square">
-            <a:spAutoFit/>
-          </a:bodyPr>
-          <a:lstStyle/>
-          <a:p>
-            <a:pPr algn="l"/>
-            <a:r>
-              <a:rPr sz="1200" b="0" i="0">
-                <a:solidFill>
-                  <a:srgbClr val="86868B"/>
-                </a:solidFill>
-              </a:rPr>
-              <a:t>• 64×64 RGB input</a:t>
-            </a:r>
-          </a:p>
-        </p:txBody>
-      </p:sp>
-      <p:sp>
-        <p:nvSpPr>
-          <p:cNvPr id="9" name="TextBox 8"/>
-          <p:cNvSpPr txBox="1"/>
-          <p:nvPr/>
-        </p:nvSpPr>
-        <p:spPr>
-          <a:xfrm>
-            <a:off x="640080" y="3429000"/>
-            <a:ext cx="3200400" cy="320040"/>
-          </a:xfrm>
-          <a:prstGeom prst="rect">
-            <a:avLst/>
-          </a:prstGeom>
-          <a:noFill/>
-        </p:spPr>
-        <p:txBody>
-          <a:bodyPr wrap="square">
-            <a:spAutoFit/>
-          </a:bodyPr>
-          <a:lstStyle/>
-          <a:p>
-            <a:pPr algn="l"/>
-            <a:r>
-              <a:rPr sz="1200" b="0" i="0">
-                <a:solidFill>
-                  <a:srgbClr val="86868B"/>
-                </a:solidFill>
-              </a:rPr>
-              <a:t>• BatchNorm + Dropout 0.4</a:t>
-            </a:r>
-          </a:p>
-        </p:txBody>
-      </p:sp>
-      <p:sp>
-        <p:nvSpPr>
-          <p:cNvPr id="10" name="TextBox 9"/>
-          <p:cNvSpPr txBox="1"/>
-          <p:nvPr/>
-        </p:nvSpPr>
-        <p:spPr>
-          <a:xfrm>
-            <a:off x="640080" y="3794760"/>
-            <a:ext cx="3200400" cy="320040"/>
-          </a:xfrm>
-          <a:prstGeom prst="rect">
-            <a:avLst/>
-          </a:prstGeom>
-          <a:noFill/>
-        </p:spPr>
-        <p:txBody>
-          <a:bodyPr wrap="square">
-            <a:spAutoFit/>
-          </a:bodyPr>
-          <a:lstStyle/>
-          <a:p>
-            <a:pPr algn="l"/>
-            <a:r>
-              <a:rPr sz="1200" b="0" i="0">
-                <a:solidFill>
-                  <a:srgbClr val="86868B"/>
-                </a:solidFill>
-              </a:rPr>
-              <a:t>• Trained from scratch</a:t>
-            </a:r>
-          </a:p>
-        </p:txBody>
-      </p:sp>
-      <p:sp>
-        <p:nvSpPr>
-          <p:cNvPr id="11" name="TextBox 10"/>
-          <p:cNvSpPr txBox="1"/>
-          <p:nvPr/>
-        </p:nvSpPr>
-        <p:spPr>
-          <a:xfrm>
-            <a:off x="640080" y="4160520"/>
-            <a:ext cx="3200400" cy="320040"/>
-          </a:xfrm>
-          <a:prstGeom prst="rect">
-            <a:avLst/>
-          </a:prstGeom>
-          <a:noFill/>
-        </p:spPr>
-        <p:txBody>
-          <a:bodyPr wrap="square">
-            <a:spAutoFit/>
-          </a:bodyPr>
-          <a:lstStyle/>
-          <a:p>
-            <a:pPr algn="l"/>
-            <a:r>
-              <a:rPr sz="1200" b="0" i="0">
-                <a:solidFill>
-                  <a:srgbClr val="86868B"/>
-                </a:solidFill>
-              </a:rPr>
-              <a:t>• ~1.2M parameters</a:t>
-            </a:r>
-          </a:p>
-        </p:txBody>
-      </p:sp>
-      <p:sp>
-        <p:nvSpPr>
-          <p:cNvPr id="12" name="Rectangle 11"/>
+              <a:t>Flat rectangular devices look nearly identical to phones and laptops at certain angles. Tablet finished at 70% precision, the lowest of all 10 classes.</a:t>
+            </a:r>
+          </a:p>
+        </p:txBody>
+      </p:sp>
+      <p:sp>
+        <p:nvSpPr>
+          <p:cNvPr id="8" name="Rectangle 7"/>
           <p:cNvSpPr/>
           <p:nvPr/>
         </p:nvSpPr>
         <p:spPr>
           <a:xfrm>
-            <a:off x="502920" y="5577840"/>
-            <a:ext cx="3383280" cy="411480"/>
+            <a:off x="6263640" y="3200400"/>
+            <a:ext cx="5486400" cy="1371600"/>
           </a:xfrm>
           <a:prstGeom prst="rect">
             <a:avLst/>
           </a:prstGeom>
           <a:solidFill>
-            <a:srgbClr val="1A1A1C"/>
+            <a:srgbClr val="161617"/>
           </a:solidFill>
-          <a:ln>
-            <a:noFill/>
+          <a:ln w="12700">
+            <a:solidFill>
+              <a:srgbClr val="2D2D2F"/>
+            </a:solidFill>
           </a:ln>
         </p:spPr>
         <p:style>
@@ -6875,58 +7005,92 @@
       </p:sp>
       <p:sp>
         <p:nvSpPr>
-          <p:cNvPr id="13" name="TextBox 12"/>
-          <p:cNvSpPr txBox="1"/>
-          <p:nvPr/>
-        </p:nvSpPr>
-        <p:spPr>
-          <a:xfrm>
-            <a:off x="502920" y="5577840"/>
-            <a:ext cx="3383280" cy="411480"/>
-          </a:xfrm>
-          <a:prstGeom prst="rect">
-            <a:avLst/>
-          </a:prstGeom>
-          <a:noFill/>
-        </p:spPr>
-        <p:txBody>
-          <a:bodyPr wrap="square">
-            <a:spAutoFit/>
-          </a:bodyPr>
-          <a:lstStyle/>
-          <a:p>
-            <a:pPr algn="ctr"/>
-            <a:r>
-              <a:rPr sz="1300" b="1" i="0">
+          <p:cNvPr id="9" name="TextBox 8"/>
+          <p:cNvSpPr txBox="1"/>
+          <p:nvPr/>
+        </p:nvSpPr>
+        <p:spPr>
+          <a:xfrm>
+            <a:off x="6391655" y="3310128"/>
+            <a:ext cx="5230368" cy="237744"/>
+          </a:xfrm>
+          <a:prstGeom prst="rect">
+            <a:avLst/>
+          </a:prstGeom>
+          <a:noFill/>
+        </p:spPr>
+        <p:txBody>
+          <a:bodyPr wrap="square">
+            <a:spAutoFit/>
+          </a:bodyPr>
+          <a:lstStyle/>
+          <a:p>
+            <a:pPr algn="l"/>
+            <a:r>
+              <a:rPr sz="900" b="1" i="0">
+                <a:solidFill>
+                  <a:srgbClr val="FFD60A"/>
+                </a:solidFill>
+              </a:rPr>
+              <a:t>HEADPHONES — CAUTIOUS MODEL</a:t>
+            </a:r>
+          </a:p>
+        </p:txBody>
+      </p:sp>
+      <p:sp>
+        <p:nvSpPr>
+          <p:cNvPr id="10" name="TextBox 9"/>
+          <p:cNvSpPr txBox="1"/>
+          <p:nvPr/>
+        </p:nvSpPr>
+        <p:spPr>
+          <a:xfrm>
+            <a:off x="6391655" y="3566160"/>
+            <a:ext cx="5230368" cy="914399"/>
+          </a:xfrm>
+          <a:prstGeom prst="rect">
+            <a:avLst/>
+          </a:prstGeom>
+          <a:noFill/>
+        </p:spPr>
+        <p:txBody>
+          <a:bodyPr wrap="square">
+            <a:spAutoFit/>
+          </a:bodyPr>
+          <a:lstStyle/>
+          <a:p>
+            <a:pPr algn="l"/>
+            <a:r>
+              <a:rPr sz="1300" b="0" i="0">
                 <a:solidFill>
                   <a:srgbClr val="86868B"/>
                 </a:solidFill>
               </a:rPr>
-              <a:t>~100% on 5 classes</a:t>
-            </a:r>
-          </a:p>
-        </p:txBody>
-      </p:sp>
-      <p:sp>
-        <p:nvSpPr>
-          <p:cNvPr id="14" name="Rectangle 13"/>
+              <a:t>100% precision but only 63.6% recall. The model almost never guesses headphones incorrectly, but it often misses them entirely.</a:t>
+            </a:r>
+          </a:p>
+        </p:txBody>
+      </p:sp>
+      <p:sp>
+        <p:nvSpPr>
+          <p:cNvPr id="11" name="Rectangle 10"/>
           <p:cNvSpPr/>
           <p:nvPr/>
         </p:nvSpPr>
         <p:spPr>
           <a:xfrm>
-            <a:off x="4297680" y="1828800"/>
-            <a:ext cx="3657600" cy="4389120"/>
+            <a:off x="6263640" y="4709160"/>
+            <a:ext cx="5486400" cy="1417320"/>
           </a:xfrm>
           <a:prstGeom prst="rect">
             <a:avLst/>
           </a:prstGeom>
           <a:solidFill>
-            <a:srgbClr val="161617"/>
+            <a:srgbClr val="0A1929"/>
           </a:solidFill>
           <a:ln w="12700">
             <a:solidFill>
-              <a:srgbClr val="2D2D2F"/>
+              <a:srgbClr val="1A6FC4"/>
             </a:solidFill>
           </a:ln>
         </p:spPr>
@@ -6954,14 +7118,14 @@
       </p:sp>
       <p:sp>
         <p:nvSpPr>
-          <p:cNvPr id="15" name="TextBox 14"/>
-          <p:cNvSpPr txBox="1"/>
-          <p:nvPr/>
-        </p:nvSpPr>
-        <p:spPr>
-          <a:xfrm>
-            <a:off x="4434840" y="1920240"/>
-            <a:ext cx="3383280" cy="274320"/>
+          <p:cNvPr id="12" name="TextBox 11"/>
+          <p:cNvSpPr txBox="1"/>
+          <p:nvPr/>
+        </p:nvSpPr>
+        <p:spPr>
+          <a:xfrm>
+            <a:off x="6391655" y="4818888"/>
+            <a:ext cx="5230368" cy="237744"/>
           </a:xfrm>
           <a:prstGeom prst="rect">
             <a:avLst/>
@@ -6981,21 +7145,21 @@
                   <a:srgbClr val="86868B"/>
                 </a:solidFill>
               </a:rPr>
-              <a:t>VISION TRANSFORMER</a:t>
-            </a:r>
-          </a:p>
-        </p:txBody>
-      </p:sp>
-      <p:sp>
-        <p:nvSpPr>
-          <p:cNvPr id="16" name="TextBox 15"/>
-          <p:cNvSpPr txBox="1"/>
-          <p:nvPr/>
-        </p:nvSpPr>
-        <p:spPr>
-          <a:xfrm>
-            <a:off x="4434840" y="2194560"/>
-            <a:ext cx="3383280" cy="411480"/>
+              <a:t>ROOT CAUSE</a:t>
+            </a:r>
+          </a:p>
+        </p:txBody>
+      </p:sp>
+      <p:sp>
+        <p:nvSpPr>
+          <p:cNvPr id="13" name="TextBox 12"/>
+          <p:cNvSpPr txBox="1"/>
+          <p:nvPr/>
+        </p:nvSpPr>
+        <p:spPr>
+          <a:xfrm>
+            <a:off x="6391655" y="5074920"/>
+            <a:ext cx="5230368" cy="960119"/>
           </a:xfrm>
           <a:prstGeom prst="rect">
             <a:avLst/>
@@ -7010,619 +7174,12 @@
           <a:p>
             <a:pPr algn="l"/>
             <a:r>
-              <a:rPr sz="2200" b="1" i="0">
-                <a:solidFill>
-                  <a:srgbClr val="F5F5F7"/>
-                </a:solidFill>
-              </a:rPr>
-              <a:t>ObjectViT</a:t>
-            </a:r>
-          </a:p>
-        </p:txBody>
-      </p:sp>
-      <p:sp>
-        <p:nvSpPr>
-          <p:cNvPr id="17" name="TextBox 16"/>
-          <p:cNvSpPr txBox="1"/>
-          <p:nvPr/>
-        </p:nvSpPr>
-        <p:spPr>
-          <a:xfrm>
-            <a:off x="4572000" y="2697480"/>
-            <a:ext cx="3200400" cy="320040"/>
-          </a:xfrm>
-          <a:prstGeom prst="rect">
-            <a:avLst/>
-          </a:prstGeom>
-          <a:noFill/>
-        </p:spPr>
-        <p:txBody>
-          <a:bodyPr wrap="square">
-            <a:spAutoFit/>
-          </a:bodyPr>
-          <a:lstStyle/>
-          <a:p>
-            <a:pPr algn="l"/>
-            <a:r>
               <a:rPr sz="1200" b="0" i="0">
                 <a:solidFill>
                   <a:srgbClr val="86868B"/>
                 </a:solidFill>
               </a:rPr>
-              <a:t>• 8×8 patch embedding</a:t>
-            </a:r>
-          </a:p>
-        </p:txBody>
-      </p:sp>
-      <p:sp>
-        <p:nvSpPr>
-          <p:cNvPr id="18" name="TextBox 17"/>
-          <p:cNvSpPr txBox="1"/>
-          <p:nvPr/>
-        </p:nvSpPr>
-        <p:spPr>
-          <a:xfrm>
-            <a:off x="4572000" y="3063240"/>
-            <a:ext cx="3200400" cy="320040"/>
-          </a:xfrm>
-          <a:prstGeom prst="rect">
-            <a:avLst/>
-          </a:prstGeom>
-          <a:noFill/>
-        </p:spPr>
-        <p:txBody>
-          <a:bodyPr wrap="square">
-            <a:spAutoFit/>
-          </a:bodyPr>
-          <a:lstStyle/>
-          <a:p>
-            <a:pPr algn="l"/>
-            <a:r>
-              <a:rPr sz="1200" b="0" i="0">
-                <a:solidFill>
-                  <a:srgbClr val="86868B"/>
-                </a:solidFill>
-              </a:rPr>
-              <a:t>• 64 patches per image</a:t>
-            </a:r>
-          </a:p>
-        </p:txBody>
-      </p:sp>
-      <p:sp>
-        <p:nvSpPr>
-          <p:cNvPr id="19" name="TextBox 18"/>
-          <p:cNvSpPr txBox="1"/>
-          <p:nvPr/>
-        </p:nvSpPr>
-        <p:spPr>
-          <a:xfrm>
-            <a:off x="4572000" y="3429000"/>
-            <a:ext cx="3200400" cy="320040"/>
-          </a:xfrm>
-          <a:prstGeom prst="rect">
-            <a:avLst/>
-          </a:prstGeom>
-          <a:noFill/>
-        </p:spPr>
-        <p:txBody>
-          <a:bodyPr wrap="square">
-            <a:spAutoFit/>
-          </a:bodyPr>
-          <a:lstStyle/>
-          <a:p>
-            <a:pPr algn="l"/>
-            <a:r>
-              <a:rPr sz="1200" b="0" i="0">
-                <a:solidFill>
-                  <a:srgbClr val="86868B"/>
-                </a:solidFill>
-              </a:rPr>
-              <a:t>• 4 transformer layers</a:t>
-            </a:r>
-          </a:p>
-        </p:txBody>
-      </p:sp>
-      <p:sp>
-        <p:nvSpPr>
-          <p:cNvPr id="20" name="TextBox 19"/>
-          <p:cNvSpPr txBox="1"/>
-          <p:nvPr/>
-        </p:nvSpPr>
-        <p:spPr>
-          <a:xfrm>
-            <a:off x="4572000" y="3794760"/>
-            <a:ext cx="3200400" cy="320040"/>
-          </a:xfrm>
-          <a:prstGeom prst="rect">
-            <a:avLst/>
-          </a:prstGeom>
-          <a:noFill/>
-        </p:spPr>
-        <p:txBody>
-          <a:bodyPr wrap="square">
-            <a:spAutoFit/>
-          </a:bodyPr>
-          <a:lstStyle/>
-          <a:p>
-            <a:pPr algn="l"/>
-            <a:r>
-              <a:rPr sz="1200" b="0" i="0">
-                <a:solidFill>
-                  <a:srgbClr val="86868B"/>
-                </a:solidFill>
-              </a:rPr>
-              <a:t>• Trained from scratch</a:t>
-            </a:r>
-          </a:p>
-        </p:txBody>
-      </p:sp>
-      <p:sp>
-        <p:nvSpPr>
-          <p:cNvPr id="21" name="TextBox 20"/>
-          <p:cNvSpPr txBox="1"/>
-          <p:nvPr/>
-        </p:nvSpPr>
-        <p:spPr>
-          <a:xfrm>
-            <a:off x="4572000" y="4160520"/>
-            <a:ext cx="3200400" cy="320040"/>
-          </a:xfrm>
-          <a:prstGeom prst="rect">
-            <a:avLst/>
-          </a:prstGeom>
-          <a:noFill/>
-        </p:spPr>
-        <p:txBody>
-          <a:bodyPr wrap="square">
-            <a:spAutoFit/>
-          </a:bodyPr>
-          <a:lstStyle/>
-          <a:p>
-            <a:pPr algn="l"/>
-            <a:r>
-              <a:rPr sz="1200" b="0" i="0">
-                <a:solidFill>
-                  <a:srgbClr val="86868B"/>
-                </a:solidFill>
-              </a:rPr>
-              <a:t>• 128-dim embeddings</a:t>
-            </a:r>
-          </a:p>
-        </p:txBody>
-      </p:sp>
-      <p:sp>
-        <p:nvSpPr>
-          <p:cNvPr id="22" name="Rectangle 21"/>
-          <p:cNvSpPr/>
-          <p:nvPr/>
-        </p:nvSpPr>
-        <p:spPr>
-          <a:xfrm>
-            <a:off x="4434840" y="5577840"/>
-            <a:ext cx="3383280" cy="411480"/>
-          </a:xfrm>
-          <a:prstGeom prst="rect">
-            <a:avLst/>
-          </a:prstGeom>
-          <a:solidFill>
-            <a:srgbClr val="1A1A1C"/>
-          </a:solidFill>
-          <a:ln>
-            <a:noFill/>
-          </a:ln>
-        </p:spPr>
-        <p:style>
-          <a:lnRef idx="1">
-            <a:schemeClr val="accent1"/>
-          </a:lnRef>
-          <a:fillRef idx="3">
-            <a:schemeClr val="accent1"/>
-          </a:fillRef>
-          <a:effectRef idx="2">
-            <a:schemeClr val="accent1"/>
-          </a:effectRef>
-          <a:fontRef idx="minor">
-            <a:schemeClr val="lt1"/>
-          </a:fontRef>
-        </p:style>
-        <p:txBody>
-          <a:bodyPr rtlCol="0" anchor="ctr"/>
-          <a:lstStyle/>
-          <a:p>
-            <a:pPr algn="ctr"/>
-          </a:p>
-        </p:txBody>
-      </p:sp>
-      <p:sp>
-        <p:nvSpPr>
-          <p:cNvPr id="23" name="TextBox 22"/>
-          <p:cNvSpPr txBox="1"/>
-          <p:nvPr/>
-        </p:nvSpPr>
-        <p:spPr>
-          <a:xfrm>
-            <a:off x="4434840" y="5577840"/>
-            <a:ext cx="3383280" cy="411480"/>
-          </a:xfrm>
-          <a:prstGeom prst="rect">
-            <a:avLst/>
-          </a:prstGeom>
-          <a:noFill/>
-        </p:spPr>
-        <p:txBody>
-          <a:bodyPr wrap="square">
-            <a:spAutoFit/>
-          </a:bodyPr>
-          <a:lstStyle/>
-          <a:p>
-            <a:pPr algn="ctr"/>
-            <a:r>
-              <a:rPr sz="1300" b="1" i="0">
-                <a:solidFill>
-                  <a:srgbClr val="86868B"/>
-                </a:solidFill>
-              </a:rPr>
-              <a:t>Slower to converge</a:t>
-            </a:r>
-          </a:p>
-        </p:txBody>
-      </p:sp>
-      <p:sp>
-        <p:nvSpPr>
-          <p:cNvPr id="24" name="Rectangle 23"/>
-          <p:cNvSpPr/>
-          <p:nvPr/>
-        </p:nvSpPr>
-        <p:spPr>
-          <a:xfrm>
-            <a:off x="8229600" y="1828800"/>
-            <a:ext cx="3657600" cy="4389120"/>
-          </a:xfrm>
-          <a:prstGeom prst="rect">
-            <a:avLst/>
-          </a:prstGeom>
-          <a:solidFill>
-            <a:srgbClr val="0A1929"/>
-          </a:solidFill>
-          <a:ln w="19050">
-            <a:solidFill>
-              <a:srgbClr val="2997FF"/>
-            </a:solidFill>
-          </a:ln>
-        </p:spPr>
-        <p:style>
-          <a:lnRef idx="1">
-            <a:schemeClr val="accent1"/>
-          </a:lnRef>
-          <a:fillRef idx="3">
-            <a:schemeClr val="accent1"/>
-          </a:fillRef>
-          <a:effectRef idx="2">
-            <a:schemeClr val="accent1"/>
-          </a:effectRef>
-          <a:fontRef idx="minor">
-            <a:schemeClr val="lt1"/>
-          </a:fontRef>
-        </p:style>
-        <p:txBody>
-          <a:bodyPr rtlCol="0" anchor="ctr"/>
-          <a:lstStyle/>
-          <a:p>
-            <a:pPr algn="ctr"/>
-          </a:p>
-        </p:txBody>
-      </p:sp>
-      <p:sp>
-        <p:nvSpPr>
-          <p:cNvPr id="25" name="TextBox 24"/>
-          <p:cNvSpPr txBox="1"/>
-          <p:nvPr/>
-        </p:nvSpPr>
-        <p:spPr>
-          <a:xfrm>
-            <a:off x="8366760" y="1920240"/>
-            <a:ext cx="3383280" cy="274320"/>
-          </a:xfrm>
-          <a:prstGeom prst="rect">
-            <a:avLst/>
-          </a:prstGeom>
-          <a:noFill/>
-        </p:spPr>
-        <p:txBody>
-          <a:bodyPr wrap="square">
-            <a:spAutoFit/>
-          </a:bodyPr>
-          <a:lstStyle/>
-          <a:p>
-            <a:pPr algn="l"/>
-            <a:r>
-              <a:rPr sz="900" b="1" i="0">
-                <a:solidFill>
-                  <a:srgbClr val="2997FF"/>
-                </a:solidFill>
-              </a:rPr>
-              <a:t>TRANSFER LEARNING  ✦  DEPLOYED</a:t>
-            </a:r>
-          </a:p>
-        </p:txBody>
-      </p:sp>
-      <p:sp>
-        <p:nvSpPr>
-          <p:cNvPr id="26" name="TextBox 25"/>
-          <p:cNvSpPr txBox="1"/>
-          <p:nvPr/>
-        </p:nvSpPr>
-        <p:spPr>
-          <a:xfrm>
-            <a:off x="8366760" y="2194560"/>
-            <a:ext cx="3383280" cy="411480"/>
-          </a:xfrm>
-          <a:prstGeom prst="rect">
-            <a:avLst/>
-          </a:prstGeom>
-          <a:noFill/>
-        </p:spPr>
-        <p:txBody>
-          <a:bodyPr wrap="square">
-            <a:spAutoFit/>
-          </a:bodyPr>
-          <a:lstStyle/>
-          <a:p>
-            <a:pPr algn="l"/>
-            <a:r>
-              <a:rPr sz="2200" b="1" i="0">
-                <a:solidFill>
-                  <a:srgbClr val="F5F5F7"/>
-                </a:solidFill>
-              </a:rPr>
-              <a:t>MobileNetV2</a:t>
-            </a:r>
-          </a:p>
-        </p:txBody>
-      </p:sp>
-      <p:sp>
-        <p:nvSpPr>
-          <p:cNvPr id="27" name="TextBox 26"/>
-          <p:cNvSpPr txBox="1"/>
-          <p:nvPr/>
-        </p:nvSpPr>
-        <p:spPr>
-          <a:xfrm>
-            <a:off x="8503920" y="2697480"/>
-            <a:ext cx="3200400" cy="320040"/>
-          </a:xfrm>
-          <a:prstGeom prst="rect">
-            <a:avLst/>
-          </a:prstGeom>
-          <a:noFill/>
-        </p:spPr>
-        <p:txBody>
-          <a:bodyPr wrap="square">
-            <a:spAutoFit/>
-          </a:bodyPr>
-          <a:lstStyle/>
-          <a:p>
-            <a:pPr algn="l"/>
-            <a:r>
-              <a:rPr sz="1200" b="0" i="0">
-                <a:solidFill>
-                  <a:srgbClr val="86868B"/>
-                </a:solidFill>
-              </a:rPr>
-              <a:t>• ImageNet pretrained</a:t>
-            </a:r>
-          </a:p>
-        </p:txBody>
-      </p:sp>
-      <p:sp>
-        <p:nvSpPr>
-          <p:cNvPr id="28" name="TextBox 27"/>
-          <p:cNvSpPr txBox="1"/>
-          <p:nvPr/>
-        </p:nvSpPr>
-        <p:spPr>
-          <a:xfrm>
-            <a:off x="8503920" y="3063240"/>
-            <a:ext cx="3200400" cy="320040"/>
-          </a:xfrm>
-          <a:prstGeom prst="rect">
-            <a:avLst/>
-          </a:prstGeom>
-          <a:noFill/>
-        </p:spPr>
-        <p:txBody>
-          <a:bodyPr wrap="square">
-            <a:spAutoFit/>
-          </a:bodyPr>
-          <a:lstStyle/>
-          <a:p>
-            <a:pPr algn="l"/>
-            <a:r>
-              <a:rPr sz="1200" b="0" i="0">
-                <a:solidFill>
-                  <a:srgbClr val="86868B"/>
-                </a:solidFill>
-              </a:rPr>
-              <a:t>• 224×224 RGB input</a:t>
-            </a:r>
-          </a:p>
-        </p:txBody>
-      </p:sp>
-      <p:sp>
-        <p:nvSpPr>
-          <p:cNvPr id="29" name="TextBox 28"/>
-          <p:cNvSpPr txBox="1"/>
-          <p:nvPr/>
-        </p:nvSpPr>
-        <p:spPr>
-          <a:xfrm>
-            <a:off x="8503920" y="3429000"/>
-            <a:ext cx="3200400" cy="320040"/>
-          </a:xfrm>
-          <a:prstGeom prst="rect">
-            <a:avLst/>
-          </a:prstGeom>
-          <a:noFill/>
-        </p:spPr>
-        <p:txBody>
-          <a:bodyPr wrap="square">
-            <a:spAutoFit/>
-          </a:bodyPr>
-          <a:lstStyle/>
-          <a:p>
-            <a:pPr algn="l"/>
-            <a:r>
-              <a:rPr sz="1200" b="0" i="0">
-                <a:solidFill>
-                  <a:srgbClr val="86868B"/>
-                </a:solidFill>
-              </a:rPr>
-              <a:t>• Fine-tuned classifier head</a:t>
-            </a:r>
-          </a:p>
-        </p:txBody>
-      </p:sp>
-      <p:sp>
-        <p:nvSpPr>
-          <p:cNvPr id="30" name="TextBox 29"/>
-          <p:cNvSpPr txBox="1"/>
-          <p:nvPr/>
-        </p:nvSpPr>
-        <p:spPr>
-          <a:xfrm>
-            <a:off x="8503920" y="3794760"/>
-            <a:ext cx="3200400" cy="320040"/>
-          </a:xfrm>
-          <a:prstGeom prst="rect">
-            <a:avLst/>
-          </a:prstGeom>
-          <a:noFill/>
-        </p:spPr>
-        <p:txBody>
-          <a:bodyPr wrap="square">
-            <a:spAutoFit/>
-          </a:bodyPr>
-          <a:lstStyle/>
-          <a:p>
-            <a:pPr algn="l"/>
-            <a:r>
-              <a:rPr sz="1200" b="0" i="0">
-                <a:solidFill>
-                  <a:srgbClr val="86868B"/>
-                </a:solidFill>
-              </a:rPr>
-              <a:t>• Dropout 0.3</a:t>
-            </a:r>
-          </a:p>
-        </p:txBody>
-      </p:sp>
-      <p:sp>
-        <p:nvSpPr>
-          <p:cNvPr id="31" name="TextBox 30"/>
-          <p:cNvSpPr txBox="1"/>
-          <p:nvPr/>
-        </p:nvSpPr>
-        <p:spPr>
-          <a:xfrm>
-            <a:off x="8503920" y="4160520"/>
-            <a:ext cx="3200400" cy="320040"/>
-          </a:xfrm>
-          <a:prstGeom prst="rect">
-            <a:avLst/>
-          </a:prstGeom>
-          <a:noFill/>
-        </p:spPr>
-        <p:txBody>
-          <a:bodyPr wrap="square">
-            <a:spAutoFit/>
-          </a:bodyPr>
-          <a:lstStyle/>
-          <a:p>
-            <a:pPr algn="l"/>
-            <a:r>
-              <a:rPr sz="1200" b="0" i="0">
-                <a:solidFill>
-                  <a:srgbClr val="86868B"/>
-                </a:solidFill>
-              </a:rPr>
-              <a:t>• Best on noisy web data</a:t>
-            </a:r>
-          </a:p>
-        </p:txBody>
-      </p:sp>
-      <p:sp>
-        <p:nvSpPr>
-          <p:cNvPr id="32" name="Rectangle 31"/>
-          <p:cNvSpPr/>
-          <p:nvPr/>
-        </p:nvSpPr>
-        <p:spPr>
-          <a:xfrm>
-            <a:off x="8366760" y="5577840"/>
-            <a:ext cx="3383280" cy="411480"/>
-          </a:xfrm>
-          <a:prstGeom prst="rect">
-            <a:avLst/>
-          </a:prstGeom>
-          <a:solidFill>
-            <a:srgbClr val="0D2A45"/>
-          </a:solidFill>
-          <a:ln>
-            <a:noFill/>
-          </a:ln>
-        </p:spPr>
-        <p:style>
-          <a:lnRef idx="1">
-            <a:schemeClr val="accent1"/>
-          </a:lnRef>
-          <a:fillRef idx="3">
-            <a:schemeClr val="accent1"/>
-          </a:fillRef>
-          <a:effectRef idx="2">
-            <a:schemeClr val="accent1"/>
-          </a:effectRef>
-          <a:fontRef idx="minor">
-            <a:schemeClr val="lt1"/>
-          </a:fontRef>
-        </p:style>
-        <p:txBody>
-          <a:bodyPr rtlCol="0" anchor="ctr"/>
-          <a:lstStyle/>
-          <a:p>
-            <a:pPr algn="ctr"/>
-          </a:p>
-        </p:txBody>
-      </p:sp>
-      <p:sp>
-        <p:nvSpPr>
-          <p:cNvPr id="33" name="TextBox 32"/>
-          <p:cNvSpPr txBox="1"/>
-          <p:nvPr/>
-        </p:nvSpPr>
-        <p:spPr>
-          <a:xfrm>
-            <a:off x="8366760" y="5577840"/>
-            <a:ext cx="3383280" cy="411480"/>
-          </a:xfrm>
-          <a:prstGeom prst="rect">
-            <a:avLst/>
-          </a:prstGeom>
-          <a:noFill/>
-        </p:spPr>
-        <p:txBody>
-          <a:bodyPr wrap="square">
-            <a:spAutoFit/>
-          </a:bodyPr>
-          <a:lstStyle/>
-          <a:p>
-            <a:pPr algn="ctr"/>
-            <a:r>
-              <a:rPr sz="1300" b="1" i="0">
-                <a:solidFill>
-                  <a:srgbClr val="2997FF"/>
-                </a:solidFill>
-              </a:rPr>
-              <a:t>84.1% on 10 classes</a:t>
+              <a:t>Errors are driven by visual ambiguity at class boundaries. PS5 controller (web-only) scored 95% on both metrics and glasses recovered to 87.5%, so data source alone does not predict failure.</a:t>
             </a:r>
           </a:p>
         </p:txBody>
@@ -7661,8 +7218,8 @@
         </p:nvSpPr>
         <p:spPr>
           <a:xfrm>
-            <a:off x="0" y="411480"/>
-            <a:ext cx="12188952" cy="365760"/>
+            <a:off x="0" y="365760"/>
+            <a:ext cx="12188952" cy="320040"/>
           </a:xfrm>
           <a:prstGeom prst="rect">
             <a:avLst/>
@@ -7682,7 +7239,7 @@
                   <a:srgbClr val="2997FF"/>
                 </a:solidFill>
               </a:rPr>
-              <a:t>RESULTS</a:t>
+              <a:t>LIVE DEMO</a:t>
             </a:r>
           </a:p>
         </p:txBody>
@@ -7695,7 +7252,7 @@
         </p:nvSpPr>
         <p:spPr>
           <a:xfrm>
-            <a:off x="457200" y="777240"/>
+            <a:off x="457200" y="749808"/>
             <a:ext cx="11274552" cy="914400"/>
           </a:xfrm>
           <a:prstGeom prst="rect">
@@ -7711,36 +7268,128 @@
           <a:p>
             <a:pPr algn="ctr"/>
             <a:r>
-              <a:rPr sz="3600" b="1" i="0">
+              <a:rPr sz="3200" b="1" i="0">
                 <a:solidFill>
                   <a:srgbClr val="F5F5F7"/>
                 </a:solidFill>
               </a:rPr>
-              <a:t>Numbers that matter</a:t>
-            </a:r>
-          </a:p>
-        </p:txBody>
-      </p:sp>
-      <p:sp>
-        <p:nvSpPr>
-          <p:cNvPr id="4" name="Rectangle 3"/>
+              <a:t>AR overlay in action</a:t>
+            </a:r>
+          </a:p>
+        </p:txBody>
+      </p:sp>
+      <p:pic>
+        <p:nvPicPr>
+          <p:cNvPr id="4" name="Picture 3" descr="ar_screenshot.png"/>
+          <p:cNvPicPr>
+            <a:picLocks noChangeAspect="1"/>
+          </p:cNvPicPr>
+          <p:nvPr/>
+        </p:nvPicPr>
+        <p:blipFill>
+          <a:blip r:embed="rId2"/>
+          <a:stretch>
+            <a:fillRect/>
+          </a:stretch>
+        </p:blipFill>
+        <p:spPr>
+          <a:xfrm>
+            <a:off x="365760" y="1691640"/>
+            <a:ext cx="5577840" cy="3137535"/>
+          </a:xfrm>
+          <a:prstGeom prst="rect">
+            <a:avLst/>
+          </a:prstGeom>
+        </p:spPr>
+      </p:pic>
+      <p:sp>
+        <p:nvSpPr>
+          <p:cNvPr id="5" name="TextBox 4"/>
+          <p:cNvSpPr txBox="1"/>
+          <p:nvPr/>
+        </p:nvSpPr>
+        <p:spPr>
+          <a:xfrm>
+            <a:off x="6263640" y="1691640"/>
+            <a:ext cx="5486400" cy="731520"/>
+          </a:xfrm>
+          <a:prstGeom prst="rect">
+            <a:avLst/>
+          </a:prstGeom>
+          <a:noFill/>
+        </p:spPr>
+        <p:txBody>
+          <a:bodyPr wrap="square">
+            <a:spAutoFit/>
+          </a:bodyPr>
+          <a:lstStyle/>
+          <a:p>
+            <a:pPr algn="l"/>
+            <a:r>
+              <a:rPr sz="1500" b="0" i="0">
+                <a:solidFill>
+                  <a:srgbClr val="F5F5F7"/>
+                </a:solidFill>
+              </a:rPr>
+              <a:t>A PS5 DualSense controller is in the center ROI. The model predicts ps5_controller at 85% confidence.</a:t>
+            </a:r>
+          </a:p>
+        </p:txBody>
+      </p:sp>
+      <p:sp>
+        <p:nvSpPr>
+          <p:cNvPr id="6" name="TextBox 5"/>
+          <p:cNvSpPr txBox="1"/>
+          <p:nvPr/>
+        </p:nvSpPr>
+        <p:spPr>
+          <a:xfrm>
+            <a:off x="6263640" y="2514600"/>
+            <a:ext cx="5486400" cy="822960"/>
+          </a:xfrm>
+          <a:prstGeom prst="rect">
+            <a:avLst/>
+          </a:prstGeom>
+          <a:noFill/>
+        </p:spPr>
+        <p:txBody>
+          <a:bodyPr wrap="square">
+            <a:spAutoFit/>
+          </a:bodyPr>
+          <a:lstStyle/>
+          <a:p>
+            <a:pPr algn="l"/>
+            <a:r>
+              <a:rPr sz="1300" b="0" i="0">
+                <a:solidFill>
+                  <a:srgbClr val="86868B"/>
+                </a:solidFill>
+              </a:rPr>
+              <a:t>The green 3D wireframe box is cleanly anchored with visible front and back faces. The label tag appears above the front face.</a:t>
+            </a:r>
+          </a:p>
+        </p:txBody>
+      </p:sp>
+      <p:sp>
+        <p:nvSpPr>
+          <p:cNvPr id="7" name="Rectangle 6"/>
           <p:cNvSpPr/>
           <p:nvPr/>
         </p:nvSpPr>
         <p:spPr>
           <a:xfrm>
-            <a:off x="365760" y="1737360"/>
-            <a:ext cx="3474720" cy="1463040"/>
+            <a:off x="6263640" y="3474720"/>
+            <a:ext cx="5486400" cy="1463040"/>
           </a:xfrm>
           <a:prstGeom prst="rect">
             <a:avLst/>
           </a:prstGeom>
           <a:solidFill>
-            <a:srgbClr val="0A1A10"/>
+            <a:srgbClr val="161617"/>
           </a:solidFill>
           <a:ln w="12700">
             <a:solidFill>
-              <a:srgbClr val="1A4A2A"/>
+              <a:srgbClr val="2D2D2F"/>
             </a:solidFill>
           </a:ln>
         </p:spPr>
@@ -7768,14 +7417,14 @@
       </p:sp>
       <p:sp>
         <p:nvSpPr>
-          <p:cNvPr id="5" name="TextBox 4"/>
-          <p:cNvSpPr txBox="1"/>
-          <p:nvPr/>
-        </p:nvSpPr>
-        <p:spPr>
-          <a:xfrm>
-            <a:off x="502920" y="1874519"/>
-            <a:ext cx="3200400" cy="228600"/>
+          <p:cNvPr id="8" name="TextBox 7"/>
+          <p:cNvSpPr txBox="1"/>
+          <p:nvPr/>
+        </p:nvSpPr>
+        <p:spPr>
+          <a:xfrm>
+            <a:off x="6400800" y="3584448"/>
+            <a:ext cx="3657600" cy="256032"/>
           </a:xfrm>
           <a:prstGeom prst="rect">
             <a:avLst/>
@@ -7795,21 +7444,21 @@
                   <a:srgbClr val="86868B"/>
                 </a:solidFill>
               </a:rPr>
-              <a:t>TEST ACCURACY</a:t>
-            </a:r>
-          </a:p>
-        </p:txBody>
-      </p:sp>
-      <p:sp>
-        <p:nvSpPr>
-          <p:cNvPr id="6" name="TextBox 5"/>
-          <p:cNvSpPr txBox="1"/>
-          <p:nvPr/>
-        </p:nvSpPr>
-        <p:spPr>
-          <a:xfrm>
-            <a:off x="502920" y="2103120"/>
-            <a:ext cx="3200400" cy="640080"/>
+              <a:t>LIVE SESSION STATS</a:t>
+            </a:r>
+          </a:p>
+        </p:txBody>
+      </p:sp>
+      <p:sp>
+        <p:nvSpPr>
+          <p:cNvPr id="9" name="TextBox 8"/>
+          <p:cNvSpPr txBox="1"/>
+          <p:nvPr/>
+        </p:nvSpPr>
+        <p:spPr>
+          <a:xfrm>
+            <a:off x="6400800" y="3913632"/>
+            <a:ext cx="1828800" cy="548640"/>
           </a:xfrm>
           <a:prstGeom prst="rect">
             <a:avLst/>
@@ -7824,26 +7473,26 @@
           <a:p>
             <a:pPr algn="l"/>
             <a:r>
-              <a:rPr sz="3600" b="1" i="0">
+              <a:rPr sz="3200" b="1" i="0">
                 <a:solidFill>
                   <a:srgbClr val="30D158"/>
                 </a:solidFill>
               </a:rPr>
-              <a:t>84.1%</a:t>
-            </a:r>
-          </a:p>
-        </p:txBody>
-      </p:sp>
-      <p:sp>
-        <p:nvSpPr>
-          <p:cNvPr id="7" name="TextBox 6"/>
-          <p:cNvSpPr txBox="1"/>
-          <p:nvPr/>
-        </p:nvSpPr>
-        <p:spPr>
-          <a:xfrm>
-            <a:off x="502920" y="2697480"/>
-            <a:ext cx="3200400" cy="457200"/>
+              <a:t>22-30</a:t>
+            </a:r>
+          </a:p>
+        </p:txBody>
+      </p:sp>
+      <p:sp>
+        <p:nvSpPr>
+          <p:cNvPr id="10" name="TextBox 9"/>
+          <p:cNvSpPr txBox="1"/>
+          <p:nvPr/>
+        </p:nvSpPr>
+        <p:spPr>
+          <a:xfrm>
+            <a:off x="6400800" y="4498848"/>
+            <a:ext cx="1828800" cy="274320"/>
           </a:xfrm>
           <a:prstGeom prst="rect">
             <a:avLst/>
@@ -7858,71 +7507,26 @@
           <a:p>
             <a:pPr algn="l"/>
             <a:r>
-              <a:rPr sz="1200" b="0" i="0">
+              <a:rPr sz="1100" b="0" i="0">
                 <a:solidFill>
                   <a:srgbClr val="86868B"/>
                 </a:solidFill>
               </a:rPr>
-              <a:t>MobileNetV2 on 10-class held-out test set</a:t>
-            </a:r>
-          </a:p>
-        </p:txBody>
-      </p:sp>
-      <p:sp>
-        <p:nvSpPr>
-          <p:cNvPr id="8" name="Rectangle 7"/>
-          <p:cNvSpPr/>
-          <p:nvPr/>
-        </p:nvSpPr>
-        <p:spPr>
-          <a:xfrm>
-            <a:off x="4178808" y="1737360"/>
-            <a:ext cx="3474720" cy="1463040"/>
-          </a:xfrm>
-          <a:prstGeom prst="rect">
-            <a:avLst/>
-          </a:prstGeom>
-          <a:solidFill>
-            <a:srgbClr val="0A1929"/>
-          </a:solidFill>
-          <a:ln w="12700">
-            <a:solidFill>
-              <a:srgbClr val="1A6FC4"/>
-            </a:solidFill>
-          </a:ln>
-        </p:spPr>
-        <p:style>
-          <a:lnRef idx="1">
-            <a:schemeClr val="accent1"/>
-          </a:lnRef>
-          <a:fillRef idx="3">
-            <a:schemeClr val="accent1"/>
-          </a:fillRef>
-          <a:effectRef idx="2">
-            <a:schemeClr val="accent1"/>
-          </a:effectRef>
-          <a:fontRef idx="minor">
-            <a:schemeClr val="lt1"/>
-          </a:fontRef>
-        </p:style>
-        <p:txBody>
-          <a:bodyPr rtlCol="0" anchor="ctr"/>
-          <a:lstStyle/>
-          <a:p>
-            <a:pPr algn="ctr"/>
-          </a:p>
-        </p:txBody>
-      </p:sp>
-      <p:sp>
-        <p:nvSpPr>
-          <p:cNvPr id="9" name="TextBox 8"/>
-          <p:cNvSpPr txBox="1"/>
-          <p:nvPr/>
-        </p:nvSpPr>
-        <p:spPr>
-          <a:xfrm>
-            <a:off x="4315968" y="1874519"/>
-            <a:ext cx="3200400" cy="228600"/>
+              <a:t>FPS live</a:t>
+            </a:r>
+          </a:p>
+        </p:txBody>
+      </p:sp>
+      <p:sp>
+        <p:nvSpPr>
+          <p:cNvPr id="11" name="TextBox 10"/>
+          <p:cNvSpPr txBox="1"/>
+          <p:nvPr/>
+        </p:nvSpPr>
+        <p:spPr>
+          <a:xfrm>
+            <a:off x="8595360" y="3913632"/>
+            <a:ext cx="1828800" cy="548640"/>
           </a:xfrm>
           <a:prstGeom prst="rect">
             <a:avLst/>
@@ -7937,255 +7541,50 @@
           <a:p>
             <a:pPr algn="l"/>
             <a:r>
-              <a:rPr sz="900" b="1" i="0">
+              <a:rPr sz="3200" b="1" i="0">
+                <a:solidFill>
+                  <a:srgbClr val="2997FF"/>
+                </a:solidFill>
+              </a:rPr>
+              <a:t>0.50</a:t>
+            </a:r>
+          </a:p>
+        </p:txBody>
+      </p:sp>
+      <p:sp>
+        <p:nvSpPr>
+          <p:cNvPr id="12" name="TextBox 11"/>
+          <p:cNvSpPr txBox="1"/>
+          <p:nvPr/>
+        </p:nvSpPr>
+        <p:spPr>
+          <a:xfrm>
+            <a:off x="8595360" y="4498848"/>
+            <a:ext cx="2743200" cy="274320"/>
+          </a:xfrm>
+          <a:prstGeom prst="rect">
+            <a:avLst/>
+          </a:prstGeom>
+          <a:noFill/>
+        </p:spPr>
+        <p:txBody>
+          <a:bodyPr wrap="square">
+            <a:spAutoFit/>
+          </a:bodyPr>
+          <a:lstStyle/>
+          <a:p>
+            <a:pPr algn="l"/>
+            <a:r>
+              <a:rPr sz="1100" b="0" i="0">
                 <a:solidFill>
                   <a:srgbClr val="86868B"/>
                 </a:solidFill>
               </a:rPr>
-              <a:t>LIVE FRAME RATE</a:t>
-            </a:r>
-          </a:p>
-        </p:txBody>
-      </p:sp>
-      <p:sp>
-        <p:nvSpPr>
-          <p:cNvPr id="10" name="TextBox 9"/>
-          <p:cNvSpPr txBox="1"/>
-          <p:nvPr/>
-        </p:nvSpPr>
-        <p:spPr>
-          <a:xfrm>
-            <a:off x="4315968" y="2103120"/>
-            <a:ext cx="3200400" cy="640080"/>
-          </a:xfrm>
-          <a:prstGeom prst="rect">
-            <a:avLst/>
-          </a:prstGeom>
-          <a:noFill/>
-        </p:spPr>
-        <p:txBody>
-          <a:bodyPr wrap="square">
-            <a:spAutoFit/>
-          </a:bodyPr>
-          <a:lstStyle/>
-          <a:p>
-            <a:pPr algn="l"/>
-            <a:r>
-              <a:rPr sz="3600" b="1" i="0">
-                <a:solidFill>
-                  <a:srgbClr val="2997FF"/>
-                </a:solidFill>
-              </a:rPr>
-              <a:t>30 fps</a:t>
-            </a:r>
-          </a:p>
-        </p:txBody>
-      </p:sp>
-      <p:sp>
-        <p:nvSpPr>
-          <p:cNvPr id="11" name="TextBox 10"/>
-          <p:cNvSpPr txBox="1"/>
-          <p:nvPr/>
-        </p:nvSpPr>
-        <p:spPr>
-          <a:xfrm>
-            <a:off x="4315968" y="2697480"/>
-            <a:ext cx="3200400" cy="457200"/>
-          </a:xfrm>
-          <a:prstGeom prst="rect">
-            <a:avLst/>
-          </a:prstGeom>
-          <a:noFill/>
-        </p:spPr>
-        <p:txBody>
-          <a:bodyPr wrap="square">
-            <a:spAutoFit/>
-          </a:bodyPr>
-          <a:lstStyle/>
-          <a:p>
-            <a:pPr algn="l"/>
-            <a:r>
-              <a:rPr sz="1200" b="0" i="0">
-                <a:solidFill>
-                  <a:srgbClr val="86868B"/>
-                </a:solidFill>
-              </a:rPr>
-              <a:t>Apple M-series with MPS acceleration</a:t>
-            </a:r>
-          </a:p>
-        </p:txBody>
-      </p:sp>
-      <p:sp>
-        <p:nvSpPr>
-          <p:cNvPr id="12" name="Rectangle 11"/>
-          <p:cNvSpPr/>
-          <p:nvPr/>
-        </p:nvSpPr>
-        <p:spPr>
-          <a:xfrm>
-            <a:off x="7982712" y="1737360"/>
-            <a:ext cx="3474720" cy="1463040"/>
-          </a:xfrm>
-          <a:prstGeom prst="rect">
-            <a:avLst/>
-          </a:prstGeom>
-          <a:solidFill>
-            <a:srgbClr val="161617"/>
-          </a:solidFill>
-          <a:ln w="12700">
-            <a:solidFill>
-              <a:srgbClr val="2D2D2F"/>
-            </a:solidFill>
-          </a:ln>
-        </p:spPr>
-        <p:style>
-          <a:lnRef idx="1">
-            <a:schemeClr val="accent1"/>
-          </a:lnRef>
-          <a:fillRef idx="3">
-            <a:schemeClr val="accent1"/>
-          </a:fillRef>
-          <a:effectRef idx="2">
-            <a:schemeClr val="accent1"/>
-          </a:effectRef>
-          <a:fontRef idx="minor">
-            <a:schemeClr val="lt1"/>
-          </a:fontRef>
-        </p:style>
-        <p:txBody>
-          <a:bodyPr rtlCol="0" anchor="ctr"/>
-          <a:lstStyle/>
-          <a:p>
-            <a:pPr algn="ctr"/>
-          </a:p>
-        </p:txBody>
-      </p:sp>
-      <p:sp>
-        <p:nvSpPr>
-          <p:cNvPr id="13" name="TextBox 12"/>
-          <p:cNvSpPr txBox="1"/>
-          <p:nvPr/>
-        </p:nvSpPr>
-        <p:spPr>
-          <a:xfrm>
-            <a:off x="8119872" y="1874519"/>
-            <a:ext cx="3200400" cy="228600"/>
-          </a:xfrm>
-          <a:prstGeom prst="rect">
-            <a:avLst/>
-          </a:prstGeom>
-          <a:noFill/>
-        </p:spPr>
-        <p:txBody>
-          <a:bodyPr wrap="square">
-            <a:spAutoFit/>
-          </a:bodyPr>
-          <a:lstStyle/>
-          <a:p>
-            <a:pPr algn="l"/>
-            <a:r>
-              <a:rPr sz="900" b="1" i="0">
-                <a:solidFill>
-                  <a:srgbClr val="86868B"/>
-                </a:solidFill>
-              </a:rPr>
-              <a:t>STRONGEST CLASS</a:t>
-            </a:r>
-          </a:p>
-        </p:txBody>
-      </p:sp>
-      <p:sp>
-        <p:nvSpPr>
-          <p:cNvPr id="14" name="TextBox 13"/>
-          <p:cNvSpPr txBox="1"/>
-          <p:nvPr/>
-        </p:nvSpPr>
-        <p:spPr>
-          <a:xfrm>
-            <a:off x="8119872" y="2103120"/>
-            <a:ext cx="3200400" cy="640080"/>
-          </a:xfrm>
-          <a:prstGeom prst="rect">
-            <a:avLst/>
-          </a:prstGeom>
-          <a:noFill/>
-        </p:spPr>
-        <p:txBody>
-          <a:bodyPr wrap="square">
-            <a:spAutoFit/>
-          </a:bodyPr>
-          <a:lstStyle/>
-          <a:p>
-            <a:pPr algn="l"/>
-            <a:r>
-              <a:rPr sz="3600" b="1" i="0">
-                <a:solidFill>
-                  <a:srgbClr val="F5F5F7"/>
-                </a:solidFill>
-              </a:rPr>
-              <a:t>Phone</a:t>
-            </a:r>
-          </a:p>
-        </p:txBody>
-      </p:sp>
-      <p:sp>
-        <p:nvSpPr>
-          <p:cNvPr id="15" name="TextBox 14"/>
-          <p:cNvSpPr txBox="1"/>
-          <p:nvPr/>
-        </p:nvSpPr>
-        <p:spPr>
-          <a:xfrm>
-            <a:off x="8119872" y="2697480"/>
-            <a:ext cx="3200400" cy="457200"/>
-          </a:xfrm>
-          <a:prstGeom prst="rect">
-            <a:avLst/>
-          </a:prstGeom>
-          <a:noFill/>
-        </p:spPr>
-        <p:txBody>
-          <a:bodyPr wrap="square">
-            <a:spAutoFit/>
-          </a:bodyPr>
-          <a:lstStyle/>
-          <a:p>
-            <a:pPr algn="l"/>
-            <a:r>
-              <a:rPr sz="1200" b="0" i="0">
-                <a:solidFill>
-                  <a:srgbClr val="86868B"/>
-                </a:solidFill>
-              </a:rPr>
-              <a:t>29 of 30 test images correct</a:t>
-            </a:r>
-          </a:p>
-        </p:txBody>
-      </p:sp>
-      <p:pic>
-        <p:nvPicPr>
-          <p:cNvPr id="16" name="Picture 15" descr="MOBILENET_Loss&amp;Accuracy.png"/>
-          <p:cNvPicPr>
-            <a:picLocks noChangeAspect="1"/>
-          </p:cNvPicPr>
-          <p:nvPr/>
-        </p:nvPicPr>
-        <p:blipFill>
-          <a:blip r:embed="rId2"/>
-          <a:stretch>
-            <a:fillRect/>
-          </a:stretch>
-        </p:blipFill>
-        <p:spPr>
-          <a:xfrm>
-            <a:off x="365760" y="3383280"/>
-            <a:ext cx="11430000" cy="3516923"/>
-          </a:xfrm>
-          <a:prstGeom prst="rect">
-            <a:avLst/>
-          </a:prstGeom>
-        </p:spPr>
-      </p:pic>
+              <a:t>Confidence threshold</a:t>
+            </a:r>
+          </a:p>
+        </p:txBody>
+      </p:sp>
     </p:spTree>
   </p:cSld>
   <p:clrMapOvr>
@@ -8220,8 +7619,8 @@
         </p:nvSpPr>
         <p:spPr>
           <a:xfrm>
-            <a:off x="0" y="411480"/>
-            <a:ext cx="12188952" cy="365760"/>
+            <a:off x="0" y="365760"/>
+            <a:ext cx="12188952" cy="320040"/>
           </a:xfrm>
           <a:prstGeom prst="rect">
             <a:avLst/>
@@ -8241,79 +7640,21 @@
                   <a:srgbClr val="2997FF"/>
                 </a:solidFill>
               </a:rPr>
-              <a:t>WHERE IT STRUGGLES</a:t>
-            </a:r>
-          </a:p>
-        </p:txBody>
-      </p:sp>
-      <p:sp>
-        <p:nvSpPr>
-          <p:cNvPr id="3" name="TextBox 2"/>
-          <p:cNvSpPr txBox="1"/>
-          <p:nvPr/>
-        </p:nvSpPr>
-        <p:spPr>
-          <a:xfrm>
-            <a:off x="457200" y="777240"/>
-            <a:ext cx="11274552" cy="914400"/>
-          </a:xfrm>
-          <a:prstGeom prst="rect">
-            <a:avLst/>
-          </a:prstGeom>
-          <a:noFill/>
-        </p:spPr>
-        <p:txBody>
-          <a:bodyPr wrap="square">
-            <a:spAutoFit/>
-          </a:bodyPr>
-          <a:lstStyle/>
-          <a:p>
-            <a:pPr algn="ctr"/>
-            <a:r>
-              <a:rPr sz="3600" b="1" i="0">
-                <a:solidFill>
-                  <a:srgbClr val="F5F5F7"/>
-                </a:solidFill>
-              </a:rPr>
-              <a:t>Confusion tells the story</a:t>
-            </a:r>
-          </a:p>
-        </p:txBody>
-      </p:sp>
-      <p:pic>
-        <p:nvPicPr>
-          <p:cNvPr id="4" name="Picture 3" descr="MOBILENET_ConfusionMatrix.png"/>
-          <p:cNvPicPr>
-            <a:picLocks noChangeAspect="1"/>
-          </p:cNvPicPr>
-          <p:nvPr/>
-        </p:nvPicPr>
-        <p:blipFill>
-          <a:blip r:embed="rId2"/>
-          <a:stretch>
-            <a:fillRect/>
-          </a:stretch>
-        </p:blipFill>
-        <p:spPr>
-          <a:xfrm>
-            <a:off x="365760" y="1691640"/>
-            <a:ext cx="5486400" cy="4937760"/>
-          </a:xfrm>
-          <a:prstGeom prst="rect">
-            <a:avLst/>
-          </a:prstGeom>
-        </p:spPr>
-      </p:pic>
-      <p:sp>
-        <p:nvSpPr>
-          <p:cNvPr id="5" name="Rectangle 4"/>
+              <a:t>SUMMARY</a:t>
+            </a:r>
+          </a:p>
+        </p:txBody>
+      </p:sp>
+      <p:sp>
+        <p:nvSpPr>
+          <p:cNvPr id="3" name="Rectangle 2"/>
           <p:cNvSpPr/>
           <p:nvPr/>
         </p:nvSpPr>
         <p:spPr>
           <a:xfrm>
-            <a:off x="6309360" y="1691640"/>
-            <a:ext cx="5394960" cy="1280160"/>
+            <a:off x="365760" y="685800"/>
+            <a:ext cx="2651760" cy="1508760"/>
           </a:xfrm>
           <a:prstGeom prst="rect">
             <a:avLst/>
@@ -8351,82 +7692,82 @@
       </p:sp>
       <p:sp>
         <p:nvSpPr>
-          <p:cNvPr id="6" name="TextBox 5"/>
-          <p:cNvSpPr txBox="1"/>
-          <p:nvPr/>
-        </p:nvSpPr>
-        <p:spPr>
-          <a:xfrm>
-            <a:off x="6446520" y="1828800"/>
-            <a:ext cx="5120640" cy="228600"/>
-          </a:xfrm>
-          <a:prstGeom prst="rect">
-            <a:avLst/>
-          </a:prstGeom>
-          <a:noFill/>
-        </p:spPr>
-        <p:txBody>
-          <a:bodyPr wrap="square">
-            <a:spAutoFit/>
-          </a:bodyPr>
-          <a:lstStyle/>
-          <a:p>
-            <a:pPr algn="l"/>
-            <a:r>
-              <a:rPr sz="900" b="1" i="0">
-                <a:solidFill>
-                  <a:srgbClr val="FF453A"/>
-                </a:solidFill>
-              </a:rPr>
-              <a:t>GLASSES — WEAKEST CLASS</a:t>
-            </a:r>
-          </a:p>
-        </p:txBody>
-      </p:sp>
-      <p:sp>
-        <p:nvSpPr>
-          <p:cNvPr id="7" name="TextBox 6"/>
-          <p:cNvSpPr txBox="1"/>
-          <p:nvPr/>
-        </p:nvSpPr>
-        <p:spPr>
-          <a:xfrm>
-            <a:off x="6446520" y="2651760"/>
-            <a:ext cx="5120640" cy="457200"/>
-          </a:xfrm>
-          <a:prstGeom prst="rect">
-            <a:avLst/>
-          </a:prstGeom>
-          <a:noFill/>
-        </p:spPr>
-        <p:txBody>
-          <a:bodyPr wrap="square">
-            <a:spAutoFit/>
-          </a:bodyPr>
-          <a:lstStyle/>
-          <a:p>
-            <a:pPr algn="l"/>
-            <a:r>
-              <a:rPr sz="1300" b="0" i="0">
+          <p:cNvPr id="4" name="TextBox 3"/>
+          <p:cNvSpPr txBox="1"/>
+          <p:nvPr/>
+        </p:nvSpPr>
+        <p:spPr>
+          <a:xfrm>
+            <a:off x="365760" y="841248"/>
+            <a:ext cx="2651760" cy="685800"/>
+          </a:xfrm>
+          <a:prstGeom prst="rect">
+            <a:avLst/>
+          </a:prstGeom>
+          <a:noFill/>
+        </p:spPr>
+        <p:txBody>
+          <a:bodyPr wrap="square">
+            <a:spAutoFit/>
+          </a:bodyPr>
+          <a:lstStyle/>
+          <a:p>
+            <a:pPr algn="ctr"/>
+            <a:r>
+              <a:rPr sz="3600" b="1" i="0">
+                <a:solidFill>
+                  <a:srgbClr val="2997FF"/>
+                </a:solidFill>
+              </a:rPr>
+              <a:t>10</a:t>
+            </a:r>
+          </a:p>
+        </p:txBody>
+      </p:sp>
+      <p:sp>
+        <p:nvSpPr>
+          <p:cNvPr id="5" name="TextBox 4"/>
+          <p:cNvSpPr txBox="1"/>
+          <p:nvPr/>
+        </p:nvSpPr>
+        <p:spPr>
+          <a:xfrm>
+            <a:off x="365760" y="1554480"/>
+            <a:ext cx="2651760" cy="365760"/>
+          </a:xfrm>
+          <a:prstGeom prst="rect">
+            <a:avLst/>
+          </a:prstGeom>
+          <a:noFill/>
+        </p:spPr>
+        <p:txBody>
+          <a:bodyPr wrap="square">
+            <a:spAutoFit/>
+          </a:bodyPr>
+          <a:lstStyle/>
+          <a:p>
+            <a:pPr algn="ctr"/>
+            <a:r>
+              <a:rPr sz="1200" b="0" i="0">
                 <a:solidFill>
                   <a:srgbClr val="86868B"/>
                 </a:solidFill>
               </a:rPr>
-              <a:t>Web crawl mixed eyeglasses with drinking glasses. The model had no way to separate them.</a:t>
-            </a:r>
-          </a:p>
-        </p:txBody>
-      </p:sp>
-      <p:sp>
-        <p:nvSpPr>
-          <p:cNvPr id="8" name="Rectangle 7"/>
+              <a:t>object classes</a:t>
+            </a:r>
+          </a:p>
+        </p:txBody>
+      </p:sp>
+      <p:sp>
+        <p:nvSpPr>
+          <p:cNvPr id="6" name="Rectangle 5"/>
           <p:cNvSpPr/>
           <p:nvPr/>
         </p:nvSpPr>
         <p:spPr>
           <a:xfrm>
-            <a:off x="6309360" y="3108960"/>
-            <a:ext cx="5394960" cy="1280160"/>
+            <a:off x="3200400" y="685800"/>
+            <a:ext cx="2651760" cy="1508760"/>
           </a:xfrm>
           <a:prstGeom prst="rect">
             <a:avLst/>
@@ -8464,92 +7805,92 @@
       </p:sp>
       <p:sp>
         <p:nvSpPr>
-          <p:cNvPr id="9" name="TextBox 8"/>
-          <p:cNvSpPr txBox="1"/>
-          <p:nvPr/>
-        </p:nvSpPr>
-        <p:spPr>
-          <a:xfrm>
-            <a:off x="6446520" y="3246120"/>
-            <a:ext cx="5120640" cy="228600"/>
-          </a:xfrm>
-          <a:prstGeom prst="rect">
-            <a:avLst/>
-          </a:prstGeom>
-          <a:noFill/>
-        </p:spPr>
-        <p:txBody>
-          <a:bodyPr wrap="square">
-            <a:spAutoFit/>
-          </a:bodyPr>
-          <a:lstStyle/>
-          <a:p>
-            <a:pPr algn="l"/>
-            <a:r>
-              <a:rPr sz="900" b="1" i="0">
-                <a:solidFill>
-                  <a:srgbClr val="FFD60A"/>
-                </a:solidFill>
-              </a:rPr>
-              <a:t>TABLET ↔ PHONE CONFUSION</a:t>
-            </a:r>
-          </a:p>
-        </p:txBody>
-      </p:sp>
-      <p:sp>
-        <p:nvSpPr>
-          <p:cNvPr id="10" name="TextBox 9"/>
-          <p:cNvSpPr txBox="1"/>
-          <p:nvPr/>
-        </p:nvSpPr>
-        <p:spPr>
-          <a:xfrm>
-            <a:off x="6446520" y="4069080"/>
-            <a:ext cx="5120640" cy="457200"/>
-          </a:xfrm>
-          <a:prstGeom prst="rect">
-            <a:avLst/>
-          </a:prstGeom>
-          <a:noFill/>
-        </p:spPr>
-        <p:txBody>
-          <a:bodyPr wrap="square">
-            <a:spAutoFit/>
-          </a:bodyPr>
-          <a:lstStyle/>
-          <a:p>
-            <a:pPr algn="l"/>
-            <a:r>
-              <a:rPr sz="1300" b="0" i="0">
+          <p:cNvPr id="7" name="TextBox 6"/>
+          <p:cNvSpPr txBox="1"/>
+          <p:nvPr/>
+        </p:nvSpPr>
+        <p:spPr>
+          <a:xfrm>
+            <a:off x="3200400" y="841248"/>
+            <a:ext cx="2651760" cy="685800"/>
+          </a:xfrm>
+          <a:prstGeom prst="rect">
+            <a:avLst/>
+          </a:prstGeom>
+          <a:noFill/>
+        </p:spPr>
+        <p:txBody>
+          <a:bodyPr wrap="square">
+            <a:spAutoFit/>
+          </a:bodyPr>
+          <a:lstStyle/>
+          <a:p>
+            <a:pPr algn="ctr"/>
+            <a:r>
+              <a:rPr sz="3600" b="1" i="0">
+                <a:solidFill>
+                  <a:srgbClr val="30D158"/>
+                </a:solidFill>
+              </a:rPr>
+              <a:t>88.8%</a:t>
+            </a:r>
+          </a:p>
+        </p:txBody>
+      </p:sp>
+      <p:sp>
+        <p:nvSpPr>
+          <p:cNvPr id="8" name="TextBox 7"/>
+          <p:cNvSpPr txBox="1"/>
+          <p:nvPr/>
+        </p:nvSpPr>
+        <p:spPr>
+          <a:xfrm>
+            <a:off x="3200400" y="1554480"/>
+            <a:ext cx="2651760" cy="365760"/>
+          </a:xfrm>
+          <a:prstGeom prst="rect">
+            <a:avLst/>
+          </a:prstGeom>
+          <a:noFill/>
+        </p:spPr>
+        <p:txBody>
+          <a:bodyPr wrap="square">
+            <a:spAutoFit/>
+          </a:bodyPr>
+          <a:lstStyle/>
+          <a:p>
+            <a:pPr algn="ctr"/>
+            <a:r>
+              <a:rPr sz="1200" b="0" i="0">
                 <a:solidFill>
                   <a:srgbClr val="86868B"/>
                 </a:solidFill>
               </a:rPr>
-              <a:t>Flat rectangles look alike at certain angles. The AR screenshot shows this exact case live.</a:t>
-            </a:r>
-          </a:p>
-        </p:txBody>
-      </p:sp>
-      <p:sp>
-        <p:nvSpPr>
-          <p:cNvPr id="11" name="Rectangle 10"/>
+              <a:t>test accuracy</a:t>
+            </a:r>
+          </a:p>
+        </p:txBody>
+      </p:sp>
+      <p:sp>
+        <p:nvSpPr>
+          <p:cNvPr id="9" name="Rectangle 8"/>
           <p:cNvSpPr/>
           <p:nvPr/>
         </p:nvSpPr>
         <p:spPr>
           <a:xfrm>
-            <a:off x="6309360" y="4526280"/>
-            <a:ext cx="5394960" cy="1188720"/>
+            <a:off x="6035040" y="685800"/>
+            <a:ext cx="2651760" cy="1508760"/>
           </a:xfrm>
           <a:prstGeom prst="rect">
             <a:avLst/>
           </a:prstGeom>
           <a:solidFill>
-            <a:srgbClr val="0A1929"/>
+            <a:srgbClr val="161617"/>
           </a:solidFill>
           <a:ln w="12700">
             <a:solidFill>
-              <a:srgbClr val="1A6FC4"/>
+              <a:srgbClr val="2D2D2F"/>
             </a:solidFill>
           </a:ln>
         </p:spPr>
@@ -8577,268 +7918,82 @@
       </p:sp>
       <p:sp>
         <p:nvSpPr>
-          <p:cNvPr id="12" name="TextBox 11"/>
-          <p:cNvSpPr txBox="1"/>
-          <p:nvPr/>
-        </p:nvSpPr>
-        <p:spPr>
-          <a:xfrm>
-            <a:off x="6446520" y="4663440"/>
-            <a:ext cx="5120640" cy="228600"/>
-          </a:xfrm>
-          <a:prstGeom prst="rect">
-            <a:avLst/>
-          </a:prstGeom>
-          <a:noFill/>
-        </p:spPr>
-        <p:txBody>
-          <a:bodyPr wrap="square">
-            <a:spAutoFit/>
-          </a:bodyPr>
-          <a:lstStyle/>
-          <a:p>
-            <a:pPr algn="l"/>
-            <a:r>
-              <a:rPr sz="900" b="1" i="0">
+          <p:cNvPr id="10" name="TextBox 9"/>
+          <p:cNvSpPr txBox="1"/>
+          <p:nvPr/>
+        </p:nvSpPr>
+        <p:spPr>
+          <a:xfrm>
+            <a:off x="6035040" y="841248"/>
+            <a:ext cx="2651760" cy="685800"/>
+          </a:xfrm>
+          <a:prstGeom prst="rect">
+            <a:avLst/>
+          </a:prstGeom>
+          <a:noFill/>
+        </p:spPr>
+        <p:txBody>
+          <a:bodyPr wrap="square">
+            <a:spAutoFit/>
+          </a:bodyPr>
+          <a:lstStyle/>
+          <a:p>
+            <a:pPr algn="ctr"/>
+            <a:r>
+              <a:rPr sz="3600" b="1" i="0">
+                <a:solidFill>
+                  <a:srgbClr val="F5F5F7"/>
+                </a:solidFill>
+              </a:rPr>
+              <a:t>20-30</a:t>
+            </a:r>
+          </a:p>
+        </p:txBody>
+      </p:sp>
+      <p:sp>
+        <p:nvSpPr>
+          <p:cNvPr id="11" name="TextBox 10"/>
+          <p:cNvSpPr txBox="1"/>
+          <p:nvPr/>
+        </p:nvSpPr>
+        <p:spPr>
+          <a:xfrm>
+            <a:off x="6035040" y="1554480"/>
+            <a:ext cx="2651760" cy="365760"/>
+          </a:xfrm>
+          <a:prstGeom prst="rect">
+            <a:avLst/>
+          </a:prstGeom>
+          <a:noFill/>
+        </p:spPr>
+        <p:txBody>
+          <a:bodyPr wrap="square">
+            <a:spAutoFit/>
+          </a:bodyPr>
+          <a:lstStyle/>
+          <a:p>
+            <a:pPr algn="ctr"/>
+            <a:r>
+              <a:rPr sz="1200" b="0" i="0">
                 <a:solidFill>
                   <a:srgbClr val="86868B"/>
                 </a:solidFill>
               </a:rPr>
-              <a:t>ROOT CAUSE</a:t>
-            </a:r>
-          </a:p>
-        </p:txBody>
-      </p:sp>
-      <p:sp>
-        <p:nvSpPr>
-          <p:cNvPr id="13" name="TextBox 12"/>
-          <p:cNvSpPr txBox="1"/>
-          <p:nvPr/>
-        </p:nvSpPr>
-        <p:spPr>
-          <a:xfrm>
-            <a:off x="6446520" y="5486400"/>
-            <a:ext cx="5120640" cy="457200"/>
-          </a:xfrm>
-          <a:prstGeom prst="rect">
-            <a:avLst/>
-          </a:prstGeom>
-          <a:noFill/>
-        </p:spPr>
-        <p:txBody>
-          <a:bodyPr wrap="square">
-            <a:spAutoFit/>
-          </a:bodyPr>
-          <a:lstStyle/>
-          <a:p>
-            <a:pPr algn="l"/>
-            <a:r>
-              <a:rPr sz="1300" b="0" i="0">
-                <a:solidFill>
-                  <a:srgbClr val="86868B"/>
-                </a:solidFill>
-              </a:rPr>
-              <a:t>All 5 weak classes used web images only. Webcam-captured classes had near-perfect scores.</a:t>
-            </a:r>
-          </a:p>
-        </p:txBody>
-      </p:sp>
-    </p:spTree>
-  </p:cSld>
-  <p:clrMapOvr>
-    <a:masterClrMapping/>
-  </p:clrMapOvr>
-</p:sld>
-</file>
-
-<file path=ppt/slides/slide8.xml><?xml version="1.0" encoding="utf-8"?>
-<p:sld xmlns:a="http://schemas.openxmlformats.org/drawingml/2006/main" xmlns:p="http://schemas.openxmlformats.org/presentationml/2006/main" xmlns:r="http://schemas.openxmlformats.org/officeDocument/2006/relationships">
-  <p:cSld>
-    <p:bg>
-      <p:bgPr>
-        <a:solidFill>
-          <a:srgbClr val="0A0A0A"/>
-        </a:solidFill>
-        <a:effectLst/>
-      </p:bgPr>
-    </p:bg>
-    <p:spTree>
-      <p:nvGrpSpPr>
-        <p:cNvPr id="1" name=""/>
-        <p:cNvGrpSpPr/>
-        <p:nvPr/>
-      </p:nvGrpSpPr>
-      <p:grpSpPr/>
-      <p:sp>
-        <p:nvSpPr>
-          <p:cNvPr id="2" name="TextBox 1"/>
-          <p:cNvSpPr txBox="1"/>
-          <p:nvPr/>
-        </p:nvSpPr>
-        <p:spPr>
-          <a:xfrm>
-            <a:off x="0" y="411480"/>
-            <a:ext cx="12188952" cy="365760"/>
-          </a:xfrm>
-          <a:prstGeom prst="rect">
-            <a:avLst/>
-          </a:prstGeom>
-          <a:noFill/>
-        </p:spPr>
-        <p:txBody>
-          <a:bodyPr wrap="square">
-            <a:spAutoFit/>
-          </a:bodyPr>
-          <a:lstStyle/>
-          <a:p>
-            <a:pPr algn="ctr"/>
-            <a:r>
-              <a:rPr sz="1100" b="1" i="0">
-                <a:solidFill>
-                  <a:srgbClr val="2997FF"/>
-                </a:solidFill>
-              </a:rPr>
-              <a:t>LIVE DEMO</a:t>
-            </a:r>
-          </a:p>
-        </p:txBody>
-      </p:sp>
-      <p:sp>
-        <p:nvSpPr>
-          <p:cNvPr id="3" name="TextBox 2"/>
-          <p:cNvSpPr txBox="1"/>
-          <p:nvPr/>
-        </p:nvSpPr>
-        <p:spPr>
-          <a:xfrm>
-            <a:off x="457200" y="777240"/>
-            <a:ext cx="11274552" cy="914400"/>
-          </a:xfrm>
-          <a:prstGeom prst="rect">
-            <a:avLst/>
-          </a:prstGeom>
-          <a:noFill/>
-        </p:spPr>
-        <p:txBody>
-          <a:bodyPr wrap="square">
-            <a:spAutoFit/>
-          </a:bodyPr>
-          <a:lstStyle/>
-          <a:p>
-            <a:pPr algn="ctr"/>
-            <a:r>
-              <a:rPr sz="3600" b="1" i="0">
-                <a:solidFill>
-                  <a:srgbClr val="F5F5F7"/>
-                </a:solidFill>
-              </a:rPr>
-              <a:t>AR overlay in action</a:t>
-            </a:r>
-          </a:p>
-        </p:txBody>
-      </p:sp>
-      <p:pic>
-        <p:nvPicPr>
-          <p:cNvPr id="4" name="Picture 3" descr="ar_screenshot.png"/>
-          <p:cNvPicPr>
-            <a:picLocks noChangeAspect="1"/>
-          </p:cNvPicPr>
-          <p:nvPr/>
-        </p:nvPicPr>
-        <p:blipFill>
-          <a:blip r:embed="rId2"/>
-          <a:stretch>
-            <a:fillRect/>
-          </a:stretch>
-        </p:blipFill>
-        <p:spPr>
-          <a:xfrm>
-            <a:off x="365760" y="1691640"/>
-            <a:ext cx="5486400" cy="3086100"/>
-          </a:xfrm>
-          <a:prstGeom prst="rect">
-            <a:avLst/>
-          </a:prstGeom>
-        </p:spPr>
-      </p:pic>
-      <p:sp>
-        <p:nvSpPr>
-          <p:cNvPr id="5" name="TextBox 4"/>
-          <p:cNvSpPr txBox="1"/>
-          <p:nvPr/>
-        </p:nvSpPr>
-        <p:spPr>
-          <a:xfrm>
-            <a:off x="6309360" y="1691640"/>
-            <a:ext cx="5486400" cy="640080"/>
-          </a:xfrm>
-          <a:prstGeom prst="rect">
-            <a:avLst/>
-          </a:prstGeom>
-          <a:noFill/>
-        </p:spPr>
-        <p:txBody>
-          <a:bodyPr wrap="square">
-            <a:spAutoFit/>
-          </a:bodyPr>
-          <a:lstStyle/>
-          <a:p>
-            <a:pPr algn="l"/>
-            <a:r>
-              <a:rPr sz="1500" b="0" i="0">
-                <a:solidFill>
-                  <a:srgbClr val="F5F5F7"/>
-                </a:solidFill>
-              </a:rPr>
-              <a:t>A tablet is in frame. The model predicts phone at 84% confidence.</a:t>
-            </a:r>
-          </a:p>
-        </p:txBody>
-      </p:sp>
-      <p:sp>
-        <p:nvSpPr>
-          <p:cNvPr id="6" name="TextBox 5"/>
-          <p:cNvSpPr txBox="1"/>
-          <p:nvPr/>
-        </p:nvSpPr>
-        <p:spPr>
-          <a:xfrm>
-            <a:off x="6309360" y="2423160"/>
-            <a:ext cx="5486400" cy="731520"/>
-          </a:xfrm>
-          <a:prstGeom prst="rect">
-            <a:avLst/>
-          </a:prstGeom>
-          <a:noFill/>
-        </p:spPr>
-        <p:txBody>
-          <a:bodyPr wrap="square">
-            <a:spAutoFit/>
-          </a:bodyPr>
-          <a:lstStyle/>
-          <a:p>
-            <a:pPr algn="l"/>
-            <a:r>
-              <a:rPr sz="1300" b="0" i="0">
-                <a:solidFill>
-                  <a:srgbClr val="86868B"/>
-                </a:solidFill>
-              </a:rPr>
-              <a:t>The 3D wireframe box and label are rendered correctly around the detected region even though the class is wrong — the AR pipeline itself is robust.</a:t>
-            </a:r>
-          </a:p>
-        </p:txBody>
-      </p:sp>
-      <p:sp>
-        <p:nvSpPr>
-          <p:cNvPr id="7" name="Rectangle 6"/>
+              <a:t>fps live</a:t>
+            </a:r>
+          </a:p>
+        </p:txBody>
+      </p:sp>
+      <p:sp>
+        <p:nvSpPr>
+          <p:cNvPr id="12" name="Rectangle 11"/>
           <p:cNvSpPr/>
           <p:nvPr/>
         </p:nvSpPr>
         <p:spPr>
           <a:xfrm>
-            <a:off x="6309360" y="3291840"/>
-            <a:ext cx="5486400" cy="1371600"/>
+            <a:off x="8869680" y="685800"/>
+            <a:ext cx="2651760" cy="1508760"/>
           </a:xfrm>
           <a:prstGeom prst="rect">
             <a:avLst/>
@@ -8876,14 +8031,82 @@
       </p:sp>
       <p:sp>
         <p:nvSpPr>
-          <p:cNvPr id="8" name="TextBox 7"/>
-          <p:cNvSpPr txBox="1"/>
-          <p:nvPr/>
-        </p:nvSpPr>
-        <p:spPr>
-          <a:xfrm>
-            <a:off x="6400800" y="3337560"/>
-            <a:ext cx="2286000" cy="274320"/>
+          <p:cNvPr id="13" name="TextBox 12"/>
+          <p:cNvSpPr txBox="1"/>
+          <p:nvPr/>
+        </p:nvSpPr>
+        <p:spPr>
+          <a:xfrm>
+            <a:off x="8869680" y="841248"/>
+            <a:ext cx="2651760" cy="685800"/>
+          </a:xfrm>
+          <a:prstGeom prst="rect">
+            <a:avLst/>
+          </a:prstGeom>
+          <a:noFill/>
+        </p:spPr>
+        <p:txBody>
+          <a:bodyPr wrap="square">
+            <a:spAutoFit/>
+          </a:bodyPr>
+          <a:lstStyle/>
+          <a:p>
+            <a:pPr algn="ctr"/>
+            <a:r>
+              <a:rPr sz="3600" b="1" i="0">
+                <a:solidFill>
+                  <a:srgbClr val="FFD60A"/>
+                </a:solidFill>
+              </a:rPr>
+              <a:t>0</a:t>
+            </a:r>
+          </a:p>
+        </p:txBody>
+      </p:sp>
+      <p:sp>
+        <p:nvSpPr>
+          <p:cNvPr id="14" name="TextBox 13"/>
+          <p:cNvSpPr txBox="1"/>
+          <p:nvPr/>
+        </p:nvSpPr>
+        <p:spPr>
+          <a:xfrm>
+            <a:off x="8869680" y="1554480"/>
+            <a:ext cx="2651760" cy="365760"/>
+          </a:xfrm>
+          <a:prstGeom prst="rect">
+            <a:avLst/>
+          </a:prstGeom>
+          <a:noFill/>
+        </p:spPr>
+        <p:txBody>
+          <a:bodyPr wrap="square">
+            <a:spAutoFit/>
+          </a:bodyPr>
+          <a:lstStyle/>
+          <a:p>
+            <a:pPr algn="ctr"/>
+            <a:r>
+              <a:rPr sz="1200" b="0" i="0">
+                <a:solidFill>
+                  <a:srgbClr val="86868B"/>
+                </a:solidFill>
+              </a:rPr>
+              <a:t>printed markers</a:t>
+            </a:r>
+          </a:p>
+        </p:txBody>
+      </p:sp>
+      <p:sp>
+        <p:nvSpPr>
+          <p:cNvPr id="15" name="TextBox 14"/>
+          <p:cNvSpPr txBox="1"/>
+          <p:nvPr/>
+        </p:nvSpPr>
+        <p:spPr>
+          <a:xfrm>
+            <a:off x="365760" y="2468880"/>
+            <a:ext cx="5486400" cy="274320"/>
           </a:xfrm>
           <a:prstGeom prst="rect">
             <a:avLst/>
@@ -8898,289 +8121,25 @@
           <a:p>
             <a:pPr algn="l"/>
             <a:r>
-              <a:rPr sz="900" b="1" i="0">
-                <a:solidFill>
-                  <a:srgbClr val="86868B"/>
-                </a:solidFill>
-              </a:rPr>
-              <a:t>● LIVE STATS</a:t>
-            </a:r>
-          </a:p>
-        </p:txBody>
-      </p:sp>
-      <p:sp>
-        <p:nvSpPr>
-          <p:cNvPr id="9" name="TextBox 8"/>
-          <p:cNvSpPr txBox="1"/>
-          <p:nvPr/>
-        </p:nvSpPr>
-        <p:spPr>
-          <a:xfrm>
-            <a:off x="6400800" y="3657600"/>
-            <a:ext cx="1371600" cy="457200"/>
-          </a:xfrm>
-          <a:prstGeom prst="rect">
-            <a:avLst/>
-          </a:prstGeom>
-          <a:noFill/>
-        </p:spPr>
-        <p:txBody>
-          <a:bodyPr wrap="square">
-            <a:spAutoFit/>
-          </a:bodyPr>
-          <a:lstStyle/>
-          <a:p>
-            <a:pPr algn="l"/>
-            <a:r>
-              <a:rPr sz="2800" b="1" i="0">
-                <a:solidFill>
-                  <a:srgbClr val="30D158"/>
-                </a:solidFill>
-              </a:rPr>
-              <a:t>29.8</a:t>
-            </a:r>
-          </a:p>
-        </p:txBody>
-      </p:sp>
-      <p:sp>
-        <p:nvSpPr>
-          <p:cNvPr id="10" name="TextBox 9"/>
-          <p:cNvSpPr txBox="1"/>
-          <p:nvPr/>
-        </p:nvSpPr>
-        <p:spPr>
-          <a:xfrm>
-            <a:off x="6400800" y="4114800"/>
-            <a:ext cx="1371600" cy="274320"/>
-          </a:xfrm>
-          <a:prstGeom prst="rect">
-            <a:avLst/>
-          </a:prstGeom>
-          <a:noFill/>
-        </p:spPr>
-        <p:txBody>
-          <a:bodyPr wrap="square">
-            <a:spAutoFit/>
-          </a:bodyPr>
-          <a:lstStyle/>
-          <a:p>
-            <a:pPr algn="l"/>
-            <a:r>
-              <a:rPr sz="1100" b="0" i="0">
-                <a:solidFill>
-                  <a:srgbClr val="86868B"/>
-                </a:solidFill>
-              </a:rPr>
-              <a:t>FPS live</a:t>
-            </a:r>
-          </a:p>
-        </p:txBody>
-      </p:sp>
-      <p:sp>
-        <p:nvSpPr>
-          <p:cNvPr id="11" name="TextBox 10"/>
-          <p:cNvSpPr txBox="1"/>
-          <p:nvPr/>
-        </p:nvSpPr>
-        <p:spPr>
-          <a:xfrm>
-            <a:off x="8412480" y="3657600"/>
-            <a:ext cx="1371600" cy="457200"/>
-          </a:xfrm>
-          <a:prstGeom prst="rect">
-            <a:avLst/>
-          </a:prstGeom>
-          <a:noFill/>
-        </p:spPr>
-        <p:txBody>
-          <a:bodyPr wrap="square">
-            <a:spAutoFit/>
-          </a:bodyPr>
-          <a:lstStyle/>
-          <a:p>
-            <a:pPr algn="l"/>
-            <a:r>
-              <a:rPr sz="2800" b="1" i="0">
-                <a:solidFill>
-                  <a:srgbClr val="2997FF"/>
-                </a:solidFill>
-              </a:rPr>
-              <a:t>0.60</a:t>
-            </a:r>
-          </a:p>
-        </p:txBody>
-      </p:sp>
-      <p:sp>
-        <p:nvSpPr>
-          <p:cNvPr id="12" name="TextBox 11"/>
-          <p:cNvSpPr txBox="1"/>
-          <p:nvPr/>
-        </p:nvSpPr>
-        <p:spPr>
-          <a:xfrm>
-            <a:off x="8412480" y="4114800"/>
-            <a:ext cx="2286000" cy="274320"/>
-          </a:xfrm>
-          <a:prstGeom prst="rect">
-            <a:avLst/>
-          </a:prstGeom>
-          <a:noFill/>
-        </p:spPr>
-        <p:txBody>
-          <a:bodyPr wrap="square">
-            <a:spAutoFit/>
-          </a:bodyPr>
-          <a:lstStyle/>
-          <a:p>
-            <a:pPr algn="l"/>
-            <a:r>
-              <a:rPr sz="1100" b="0" i="0">
-                <a:solidFill>
-                  <a:srgbClr val="86868B"/>
-                </a:solidFill>
-              </a:rPr>
-              <a:t>Confidence threshold</a:t>
-            </a:r>
-          </a:p>
-        </p:txBody>
-      </p:sp>
-    </p:spTree>
-  </p:cSld>
-  <p:clrMapOvr>
-    <a:masterClrMapping/>
-  </p:clrMapOvr>
-</p:sld>
-</file>
-
-<file path=ppt/slides/slide9.xml><?xml version="1.0" encoding="utf-8"?>
-<p:sld xmlns:a="http://schemas.openxmlformats.org/drawingml/2006/main" xmlns:p="http://schemas.openxmlformats.org/presentationml/2006/main" xmlns:r="http://schemas.openxmlformats.org/officeDocument/2006/relationships">
-  <p:cSld>
-    <p:bg>
-      <p:bgPr>
-        <a:solidFill>
-          <a:srgbClr val="0A0A0A"/>
-        </a:solidFill>
-        <a:effectLst/>
-      </p:bgPr>
-    </p:bg>
-    <p:spTree>
-      <p:nvGrpSpPr>
-        <p:cNvPr id="1" name=""/>
-        <p:cNvGrpSpPr/>
-        <p:nvPr/>
-      </p:nvGrpSpPr>
-      <p:grpSpPr/>
-      <p:sp>
-        <p:nvSpPr>
-          <p:cNvPr id="2" name="TextBox 1"/>
-          <p:cNvSpPr txBox="1"/>
-          <p:nvPr/>
-        </p:nvSpPr>
-        <p:spPr>
-          <a:xfrm>
-            <a:off x="0" y="411480"/>
-            <a:ext cx="12188952" cy="365760"/>
-          </a:xfrm>
-          <a:prstGeom prst="rect">
-            <a:avLst/>
-          </a:prstGeom>
-          <a:noFill/>
-        </p:spPr>
-        <p:txBody>
-          <a:bodyPr wrap="square">
-            <a:spAutoFit/>
-          </a:bodyPr>
-          <a:lstStyle/>
-          <a:p>
-            <a:pPr algn="ctr"/>
-            <a:r>
-              <a:rPr sz="1100" b="1" i="0">
-                <a:solidFill>
-                  <a:srgbClr val="2997FF"/>
-                </a:solidFill>
-              </a:rPr>
-              <a:t>LIMITATIONS &amp; NEXT STEPS</a:t>
-            </a:r>
-          </a:p>
-        </p:txBody>
-      </p:sp>
-      <p:sp>
-        <p:nvSpPr>
-          <p:cNvPr id="3" name="TextBox 2"/>
-          <p:cNvSpPr txBox="1"/>
-          <p:nvPr/>
-        </p:nvSpPr>
-        <p:spPr>
-          <a:xfrm>
-            <a:off x="457200" y="777240"/>
-            <a:ext cx="11274552" cy="914400"/>
-          </a:xfrm>
-          <a:prstGeom prst="rect">
-            <a:avLst/>
-          </a:prstGeom>
-          <a:noFill/>
-        </p:spPr>
-        <p:txBody>
-          <a:bodyPr wrap="square">
-            <a:spAutoFit/>
-          </a:bodyPr>
-          <a:lstStyle/>
-          <a:p>
-            <a:pPr algn="ctr"/>
-            <a:r>
-              <a:rPr sz="3600" b="1" i="0">
-                <a:solidFill>
-                  <a:srgbClr val="F5F5F7"/>
-                </a:solidFill>
-              </a:rPr>
-              <a:t>Honest about the gaps</a:t>
-            </a:r>
-          </a:p>
-        </p:txBody>
-      </p:sp>
-      <p:sp>
-        <p:nvSpPr>
-          <p:cNvPr id="4" name="TextBox 3"/>
-          <p:cNvSpPr txBox="1"/>
-          <p:nvPr/>
-        </p:nvSpPr>
-        <p:spPr>
-          <a:xfrm>
-            <a:off x="457200" y="1691640"/>
-            <a:ext cx="5303520" cy="274320"/>
-          </a:xfrm>
-          <a:prstGeom prst="rect">
-            <a:avLst/>
-          </a:prstGeom>
-          <a:noFill/>
-        </p:spPr>
-        <p:txBody>
-          <a:bodyPr wrap="square">
-            <a:spAutoFit/>
-          </a:bodyPr>
-          <a:lstStyle/>
-          <a:p>
-            <a:pPr algn="l"/>
-            <a:r>
               <a:rPr sz="1000" b="1" i="0">
                 <a:solidFill>
                   <a:srgbClr val="FF453A"/>
                 </a:solidFill>
               </a:rPr>
-              <a:t>CURRENT LIMITATIONS</a:t>
-            </a:r>
-          </a:p>
-        </p:txBody>
-      </p:sp>
-      <p:sp>
-        <p:nvSpPr>
-          <p:cNvPr id="5" name="Oval 4"/>
+              <a:t>REMAINING LIMITATIONS</a:t>
+            </a:r>
+          </a:p>
+        </p:txBody>
+      </p:sp>
+      <p:sp>
+        <p:nvSpPr>
+          <p:cNvPr id="16" name="Oval 15"/>
           <p:cNvSpPr/>
           <p:nvPr/>
         </p:nvSpPr>
         <p:spPr>
           <a:xfrm>
-            <a:off x="457200" y="2057400"/>
+            <a:off x="365760" y="2871216"/>
             <a:ext cx="347472" cy="347472"/>
           </a:xfrm>
           <a:prstGeom prst="ellipse">
@@ -9217,13 +8176,13 @@
       </p:sp>
       <p:sp>
         <p:nvSpPr>
-          <p:cNvPr id="6" name="TextBox 5"/>
-          <p:cNvSpPr txBox="1"/>
-          <p:nvPr/>
-        </p:nvSpPr>
-        <p:spPr>
-          <a:xfrm>
-            <a:off x="457200" y="2029968"/>
+          <p:cNvPr id="17" name="TextBox 16"/>
+          <p:cNvSpPr txBox="1"/>
+          <p:nvPr/>
+        </p:nvSpPr>
+        <p:spPr>
+          <a:xfrm>
+            <a:off x="365760" y="2843784"/>
             <a:ext cx="347472" cy="347472"/>
           </a:xfrm>
           <a:prstGeom prst="rect">
@@ -9251,13 +8210,13 @@
       </p:sp>
       <p:sp>
         <p:nvSpPr>
-          <p:cNvPr id="7" name="TextBox 6"/>
-          <p:cNvSpPr txBox="1"/>
-          <p:nvPr/>
-        </p:nvSpPr>
-        <p:spPr>
-          <a:xfrm>
-            <a:off x="960120" y="2011680"/>
+          <p:cNvPr id="18" name="TextBox 17"/>
+          <p:cNvSpPr txBox="1"/>
+          <p:nvPr/>
+        </p:nvSpPr>
+        <p:spPr>
+          <a:xfrm>
+            <a:off x="868680" y="2834640"/>
             <a:ext cx="4754880" cy="274320"/>
           </a:xfrm>
           <a:prstGeom prst="rect">
@@ -9285,13 +8244,13 @@
       </p:sp>
       <p:sp>
         <p:nvSpPr>
-          <p:cNvPr id="8" name="TextBox 7"/>
-          <p:cNvSpPr txBox="1"/>
-          <p:nvPr/>
-        </p:nvSpPr>
-        <p:spPr>
-          <a:xfrm>
-            <a:off x="960120" y="2304288"/>
+          <p:cNvPr id="19" name="TextBox 18"/>
+          <p:cNvSpPr txBox="1"/>
+          <p:nvPr/>
+        </p:nvSpPr>
+        <p:spPr>
+          <a:xfrm>
+            <a:off x="868680" y="3127248"/>
             <a:ext cx="4754880" cy="365760"/>
           </a:xfrm>
           <a:prstGeom prst="rect">
@@ -9312,20 +8271,20 @@
                   <a:srgbClr val="86868B"/>
                 </a:solidFill>
               </a:rPr>
-              <a:t>Only detects objects at center of frame</a:t>
-            </a:r>
-          </a:p>
-        </p:txBody>
-      </p:sp>
-      <p:sp>
-        <p:nvSpPr>
-          <p:cNvPr id="9" name="Oval 8"/>
+              <a:t>Objects off to the side are not detected</a:t>
+            </a:r>
+          </a:p>
+        </p:txBody>
+      </p:sp>
+      <p:sp>
+        <p:nvSpPr>
+          <p:cNvPr id="20" name="Oval 19"/>
           <p:cNvSpPr/>
           <p:nvPr/>
         </p:nvSpPr>
         <p:spPr>
           <a:xfrm>
-            <a:off x="457200" y="3063240"/>
+            <a:off x="365760" y="3877056"/>
             <a:ext cx="347472" cy="347472"/>
           </a:xfrm>
           <a:prstGeom prst="ellipse">
@@ -9362,13 +8321,13 @@
       </p:sp>
       <p:sp>
         <p:nvSpPr>
-          <p:cNvPr id="10" name="TextBox 9"/>
-          <p:cNvSpPr txBox="1"/>
-          <p:nvPr/>
-        </p:nvSpPr>
-        <p:spPr>
-          <a:xfrm>
-            <a:off x="457200" y="3035808"/>
+          <p:cNvPr id="21" name="TextBox 20"/>
+          <p:cNvSpPr txBox="1"/>
+          <p:nvPr/>
+        </p:nvSpPr>
+        <p:spPr>
+          <a:xfrm>
+            <a:off x="365760" y="3849624"/>
             <a:ext cx="347472" cy="347472"/>
           </a:xfrm>
           <a:prstGeom prst="rect">
@@ -9396,13 +8355,13 @@
       </p:sp>
       <p:sp>
         <p:nvSpPr>
-          <p:cNvPr id="11" name="TextBox 10"/>
-          <p:cNvSpPr txBox="1"/>
-          <p:nvPr/>
-        </p:nvSpPr>
-        <p:spPr>
-          <a:xfrm>
-            <a:off x="960120" y="3017520"/>
+          <p:cNvPr id="22" name="TextBox 21"/>
+          <p:cNvSpPr txBox="1"/>
+          <p:nvPr/>
+        </p:nvSpPr>
+        <p:spPr>
+          <a:xfrm>
+            <a:off x="868680" y="3840480"/>
             <a:ext cx="4754880" cy="274320"/>
           </a:xfrm>
           <a:prstGeom prst="rect">
@@ -9430,13 +8389,13 @@
       </p:sp>
       <p:sp>
         <p:nvSpPr>
-          <p:cNvPr id="12" name="TextBox 11"/>
-          <p:cNvSpPr txBox="1"/>
-          <p:nvPr/>
-        </p:nvSpPr>
-        <p:spPr>
-          <a:xfrm>
-            <a:off x="960120" y="3310128"/>
+          <p:cNvPr id="23" name="TextBox 22"/>
+          <p:cNvSpPr txBox="1"/>
+          <p:nvPr/>
+        </p:nvSpPr>
+        <p:spPr>
+          <a:xfrm>
+            <a:off x="868680" y="4133088"/>
             <a:ext cx="4754880" cy="365760"/>
           </a:xfrm>
           <a:prstGeom prst="rect">
@@ -9457,27 +8416,61 @@
                   <a:srgbClr val="86868B"/>
                 </a:solidFill>
               </a:rPr>
-              <a:t>Box scale is wrong at very close or far distances</a:t>
-            </a:r>
-          </a:p>
-        </p:txBody>
-      </p:sp>
-      <p:sp>
-        <p:nvSpPr>
-          <p:cNvPr id="13" name="Oval 12"/>
+              <a:t>Box scale is incorrect at very different distances</a:t>
+            </a:r>
+          </a:p>
+        </p:txBody>
+      </p:sp>
+      <p:sp>
+        <p:nvSpPr>
+          <p:cNvPr id="24" name="TextBox 23"/>
+          <p:cNvSpPr txBox="1"/>
+          <p:nvPr/>
+        </p:nvSpPr>
+        <p:spPr>
+          <a:xfrm>
+            <a:off x="6400800" y="2468880"/>
+            <a:ext cx="5486400" cy="274320"/>
+          </a:xfrm>
+          <a:prstGeom prst="rect">
+            <a:avLst/>
+          </a:prstGeom>
+          <a:noFill/>
+        </p:spPr>
+        <p:txBody>
+          <a:bodyPr wrap="square">
+            <a:spAutoFit/>
+          </a:bodyPr>
+          <a:lstStyle/>
+          <a:p>
+            <a:pPr algn="l"/>
+            <a:r>
+              <a:rPr sz="1000" b="1" i="0">
+                <a:solidFill>
+                  <a:srgbClr val="2997FF"/>
+                </a:solidFill>
+              </a:rPr>
+              <a:t>ALREADY ADDRESSED</a:t>
+            </a:r>
+          </a:p>
+        </p:txBody>
+      </p:sp>
+      <p:sp>
+        <p:nvSpPr>
+          <p:cNvPr id="25" name="Oval 24"/>
           <p:cNvSpPr/>
           <p:nvPr/>
         </p:nvSpPr>
         <p:spPr>
           <a:xfrm>
-            <a:off x="457200" y="4069080"/>
+            <a:off x="6400800" y="2871216"/>
             <a:ext cx="347472" cy="347472"/>
           </a:xfrm>
           <a:prstGeom prst="ellipse">
             <a:avLst/>
           </a:prstGeom>
           <a:solidFill>
-            <a:srgbClr val="3A1010"/>
+            <a:srgbClr val="2997FF"/>
           </a:solidFill>
           <a:ln>
             <a:noFill/>
@@ -9507,13 +8500,13 @@
       </p:sp>
       <p:sp>
         <p:nvSpPr>
-          <p:cNvPr id="14" name="TextBox 13"/>
-          <p:cNvSpPr txBox="1"/>
-          <p:nvPr/>
-        </p:nvSpPr>
-        <p:spPr>
-          <a:xfrm>
-            <a:off x="457200" y="4041648"/>
+          <p:cNvPr id="26" name="TextBox 25"/>
+          <p:cNvSpPr txBox="1"/>
+          <p:nvPr/>
+        </p:nvSpPr>
+        <p:spPr>
+          <a:xfrm>
+            <a:off x="6400800" y="2843784"/>
             <a:ext cx="347472" cy="347472"/>
           </a:xfrm>
           <a:prstGeom prst="rect">
@@ -9531,24 +8524,24 @@
             <a:r>
               <a:rPr sz="1300" b="1" i="0">
                 <a:solidFill>
-                  <a:srgbClr val="FF453A"/>
-                </a:solidFill>
-              </a:rPr>
-              <a:t>!</a:t>
-            </a:r>
-          </a:p>
-        </p:txBody>
-      </p:sp>
-      <p:sp>
-        <p:nvSpPr>
-          <p:cNvPr id="15" name="TextBox 14"/>
-          <p:cNvSpPr txBox="1"/>
-          <p:nvPr/>
-        </p:nvSpPr>
-        <p:spPr>
-          <a:xfrm>
-            <a:off x="960120" y="4023360"/>
-            <a:ext cx="4754880" cy="274320"/>
+                  <a:srgbClr val="0A0A0A"/>
+                </a:solidFill>
+              </a:rPr>
+              <a:t>✓</a:t>
+            </a:r>
+          </a:p>
+        </p:txBody>
+      </p:sp>
+      <p:sp>
+        <p:nvSpPr>
+          <p:cNvPr id="27" name="TextBox 26"/>
+          <p:cNvSpPr txBox="1"/>
+          <p:nvPr/>
+        </p:nvSpPr>
+        <p:spPr>
+          <a:xfrm>
+            <a:off x="6903720" y="2834640"/>
+            <a:ext cx="5029200" cy="594360"/>
           </a:xfrm>
           <a:prstGeom prst="rect">
             <a:avLst/>
@@ -9563,66 +8556,32 @@
           <a:p>
             <a:pPr algn="l"/>
             <a:r>
-              <a:rPr sz="1400" b="1" i="0">
+              <a:rPr sz="1300" b="0" i="0">
                 <a:solidFill>
                   <a:srgbClr val="F5F5F7"/>
                 </a:solidFill>
               </a:rPr>
-              <a:t>No background class</a:t>
-            </a:r>
-          </a:p>
-        </p:txBody>
-      </p:sp>
-      <p:sp>
-        <p:nvSpPr>
-          <p:cNvPr id="16" name="TextBox 15"/>
-          <p:cNvSpPr txBox="1"/>
-          <p:nvPr/>
-        </p:nvSpPr>
-        <p:spPr>
-          <a:xfrm>
-            <a:off x="960120" y="4315968"/>
-            <a:ext cx="4754880" cy="365760"/>
-          </a:xfrm>
-          <a:prstGeom prst="rect">
-            <a:avLst/>
-          </a:prstGeom>
-          <a:noFill/>
-        </p:spPr>
-        <p:txBody>
-          <a:bodyPr wrap="square">
-            <a:spAutoFit/>
-          </a:bodyPr>
-          <a:lstStyle/>
-          <a:p>
-            <a:pPr algn="l"/>
-            <a:r>
-              <a:rPr sz="1200" b="0" i="0">
-                <a:solidFill>
-                  <a:srgbClr val="86868B"/>
-                </a:solidFill>
-              </a:rPr>
-              <a:t>Always outputs a class even when nothing is there</a:t>
-            </a:r>
-          </a:p>
-        </p:txBody>
-      </p:sp>
-      <p:sp>
-        <p:nvSpPr>
-          <p:cNvPr id="17" name="Oval 16"/>
+              <a:t>5-frame majority-vote buffer eliminates label flickering</a:t>
+            </a:r>
+          </a:p>
+        </p:txBody>
+      </p:sp>
+      <p:sp>
+        <p:nvSpPr>
+          <p:cNvPr id="28" name="Oval 27"/>
           <p:cNvSpPr/>
           <p:nvPr/>
         </p:nvSpPr>
         <p:spPr>
           <a:xfrm>
-            <a:off x="457200" y="5074920"/>
+            <a:off x="6400800" y="3877056"/>
             <a:ext cx="347472" cy="347472"/>
           </a:xfrm>
           <a:prstGeom prst="ellipse">
             <a:avLst/>
           </a:prstGeom>
           <a:solidFill>
-            <a:srgbClr val="3A1010"/>
+            <a:srgbClr val="2997FF"/>
           </a:solidFill>
           <a:ln>
             <a:noFill/>
@@ -9652,13 +8611,13 @@
       </p:sp>
       <p:sp>
         <p:nvSpPr>
-          <p:cNvPr id="18" name="TextBox 17"/>
-          <p:cNvSpPr txBox="1"/>
-          <p:nvPr/>
-        </p:nvSpPr>
-        <p:spPr>
-          <a:xfrm>
-            <a:off x="457200" y="5047488"/>
+          <p:cNvPr id="29" name="TextBox 28"/>
+          <p:cNvSpPr txBox="1"/>
+          <p:nvPr/>
+        </p:nvSpPr>
+        <p:spPr>
+          <a:xfrm>
+            <a:off x="6400800" y="3849624"/>
             <a:ext cx="347472" cy="347472"/>
           </a:xfrm>
           <a:prstGeom prst="rect">
@@ -9676,24 +8635,24 @@
             <a:r>
               <a:rPr sz="1300" b="1" i="0">
                 <a:solidFill>
-                  <a:srgbClr val="FF453A"/>
-                </a:solidFill>
-              </a:rPr>
-              <a:t>!</a:t>
-            </a:r>
-          </a:p>
-        </p:txBody>
-      </p:sp>
-      <p:sp>
-        <p:nvSpPr>
-          <p:cNvPr id="19" name="TextBox 18"/>
-          <p:cNvSpPr txBox="1"/>
-          <p:nvPr/>
-        </p:nvSpPr>
-        <p:spPr>
-          <a:xfrm>
-            <a:off x="960120" y="5029200"/>
-            <a:ext cx="4754880" cy="274320"/>
+                  <a:srgbClr val="0A0A0A"/>
+                </a:solidFill>
+              </a:rPr>
+              <a:t>✓</a:t>
+            </a:r>
+          </a:p>
+        </p:txBody>
+      </p:sp>
+      <p:sp>
+        <p:nvSpPr>
+          <p:cNvPr id="30" name="TextBox 29"/>
+          <p:cNvSpPr txBox="1"/>
+          <p:nvPr/>
+        </p:nvSpPr>
+        <p:spPr>
+          <a:xfrm>
+            <a:off x="6903720" y="3840480"/>
+            <a:ext cx="5029200" cy="594360"/>
           </a:xfrm>
           <a:prstGeom prst="rect">
             <a:avLst/>
@@ -9708,524 +8667,46 @@
           <a:p>
             <a:pPr algn="l"/>
             <a:r>
-              <a:rPr sz="1400" b="1" i="0">
+              <a:rPr sz="1300" b="0" i="0">
                 <a:solidFill>
                   <a:srgbClr val="F5F5F7"/>
                 </a:solidFill>
               </a:rPr>
-              <a:t>Prediction flicker</a:t>
-            </a:r>
-          </a:p>
-        </p:txBody>
-      </p:sp>
-      <p:sp>
-        <p:nvSpPr>
-          <p:cNvPr id="20" name="TextBox 19"/>
-          <p:cNvSpPr txBox="1"/>
-          <p:nvPr/>
-        </p:nvSpPr>
-        <p:spPr>
-          <a:xfrm>
-            <a:off x="960120" y="5321808"/>
-            <a:ext cx="4754880" cy="365760"/>
-          </a:xfrm>
-          <a:prstGeom prst="rect">
-            <a:avLst/>
-          </a:prstGeom>
-          <a:noFill/>
-        </p:spPr>
-        <p:txBody>
-          <a:bodyPr wrap="square">
-            <a:spAutoFit/>
-          </a:bodyPr>
-          <a:lstStyle/>
-          <a:p>
-            <a:pPr algn="l"/>
-            <a:r>
-              <a:rPr sz="1200" b="0" i="0">
+              <a:t>Entropy-based rejection shows Unknown when no familiar object is present</a:t>
+            </a:r>
+          </a:p>
+        </p:txBody>
+      </p:sp>
+      <p:sp>
+        <p:nvSpPr>
+          <p:cNvPr id="31" name="TextBox 30"/>
+          <p:cNvSpPr txBox="1"/>
+          <p:nvPr/>
+        </p:nvSpPr>
+        <p:spPr>
+          <a:xfrm>
+            <a:off x="0" y="6263640"/>
+            <a:ext cx="12188952" cy="365760"/>
+          </a:xfrm>
+          <a:prstGeom prst="rect">
+            <a:avLst/>
+          </a:prstGeom>
+          <a:noFill/>
+        </p:spPr>
+        <p:txBody>
+          <a:bodyPr wrap="square">
+            <a:spAutoFit/>
+          </a:bodyPr>
+          <a:lstStyle/>
+          <a:p>
+            <a:pPr algn="ctr"/>
+            <a:r>
+              <a:rPr sz="1100" b="0" i="0">
                 <a:solidFill>
                   <a:srgbClr val="86868B"/>
                 </a:solidFill>
               </a:rPr>
-              <a:t>No temporal smoothing between frames</a:t>
-            </a:r>
-          </a:p>
-        </p:txBody>
-      </p:sp>
-      <p:sp>
-        <p:nvSpPr>
-          <p:cNvPr id="21" name="TextBox 20"/>
-          <p:cNvSpPr txBox="1"/>
-          <p:nvPr/>
-        </p:nvSpPr>
-        <p:spPr>
-          <a:xfrm>
-            <a:off x="6400800" y="1691640"/>
-            <a:ext cx="5303520" cy="274320"/>
-          </a:xfrm>
-          <a:prstGeom prst="rect">
-            <a:avLst/>
-          </a:prstGeom>
-          <a:noFill/>
-        </p:spPr>
-        <p:txBody>
-          <a:bodyPr wrap="square">
-            <a:spAutoFit/>
-          </a:bodyPr>
-          <a:lstStyle/>
-          <a:p>
-            <a:pPr algn="l"/>
-            <a:r>
-              <a:rPr sz="1000" b="1" i="0">
-                <a:solidFill>
-                  <a:srgbClr val="2997FF"/>
-                </a:solidFill>
-              </a:rPr>
-              <a:t>EASY WINS NEXT</a:t>
-            </a:r>
-          </a:p>
-        </p:txBody>
-      </p:sp>
-      <p:sp>
-        <p:nvSpPr>
-          <p:cNvPr id="22" name="Oval 21"/>
-          <p:cNvSpPr/>
-          <p:nvPr/>
-        </p:nvSpPr>
-        <p:spPr>
-          <a:xfrm>
-            <a:off x="6400800" y="2057400"/>
-            <a:ext cx="347472" cy="347472"/>
-          </a:xfrm>
-          <a:prstGeom prst="ellipse">
-            <a:avLst/>
-          </a:prstGeom>
-          <a:solidFill>
-            <a:srgbClr val="2997FF"/>
-          </a:solidFill>
-          <a:ln>
-            <a:noFill/>
-          </a:ln>
-        </p:spPr>
-        <p:style>
-          <a:lnRef idx="1">
-            <a:schemeClr val="accent1"/>
-          </a:lnRef>
-          <a:fillRef idx="3">
-            <a:schemeClr val="accent1"/>
-          </a:fillRef>
-          <a:effectRef idx="2">
-            <a:schemeClr val="accent1"/>
-          </a:effectRef>
-          <a:fontRef idx="minor">
-            <a:schemeClr val="lt1"/>
-          </a:fontRef>
-        </p:style>
-        <p:txBody>
-          <a:bodyPr rtlCol="0" anchor="ctr"/>
-          <a:lstStyle/>
-          <a:p>
-            <a:pPr algn="ctr"/>
-          </a:p>
-        </p:txBody>
-      </p:sp>
-      <p:sp>
-        <p:nvSpPr>
-          <p:cNvPr id="23" name="TextBox 22"/>
-          <p:cNvSpPr txBox="1"/>
-          <p:nvPr/>
-        </p:nvSpPr>
-        <p:spPr>
-          <a:xfrm>
-            <a:off x="6400800" y="2029968"/>
-            <a:ext cx="347472" cy="347472"/>
-          </a:xfrm>
-          <a:prstGeom prst="rect">
-            <a:avLst/>
-          </a:prstGeom>
-          <a:noFill/>
-        </p:spPr>
-        <p:txBody>
-          <a:bodyPr wrap="square">
-            <a:spAutoFit/>
-          </a:bodyPr>
-          <a:lstStyle/>
-          <a:p>
-            <a:pPr algn="ctr"/>
-            <a:r>
-              <a:rPr sz="1300" b="1" i="0">
-                <a:solidFill>
-                  <a:srgbClr val="0A0A0A"/>
-                </a:solidFill>
-              </a:rPr>
-              <a:t>→</a:t>
-            </a:r>
-          </a:p>
-        </p:txBody>
-      </p:sp>
-      <p:sp>
-        <p:nvSpPr>
-          <p:cNvPr id="24" name="TextBox 23"/>
-          <p:cNvSpPr txBox="1"/>
-          <p:nvPr/>
-        </p:nvSpPr>
-        <p:spPr>
-          <a:xfrm>
-            <a:off x="6903720" y="2011680"/>
-            <a:ext cx="4754880" cy="594360"/>
-          </a:xfrm>
-          <a:prstGeom prst="rect">
-            <a:avLst/>
-          </a:prstGeom>
-          <a:noFill/>
-        </p:spPr>
-        <p:txBody>
-          <a:bodyPr wrap="square">
-            <a:spAutoFit/>
-          </a:bodyPr>
-          <a:lstStyle/>
-          <a:p>
-            <a:pPr algn="l"/>
-            <a:r>
-              <a:rPr sz="1300" b="0" i="0">
-                <a:solidFill>
-                  <a:srgbClr val="F5F5F7"/>
-                </a:solidFill>
-              </a:rPr>
-              <a:t>Collect webcam images for the 5 web-only classes → push accuracy above 90%</a:t>
-            </a:r>
-          </a:p>
-        </p:txBody>
-      </p:sp>
-      <p:sp>
-        <p:nvSpPr>
-          <p:cNvPr id="25" name="Oval 24"/>
-          <p:cNvSpPr/>
-          <p:nvPr/>
-        </p:nvSpPr>
-        <p:spPr>
-          <a:xfrm>
-            <a:off x="6400800" y="3063240"/>
-            <a:ext cx="347472" cy="347472"/>
-          </a:xfrm>
-          <a:prstGeom prst="ellipse">
-            <a:avLst/>
-          </a:prstGeom>
-          <a:solidFill>
-            <a:srgbClr val="2997FF"/>
-          </a:solidFill>
-          <a:ln>
-            <a:noFill/>
-          </a:ln>
-        </p:spPr>
-        <p:style>
-          <a:lnRef idx="1">
-            <a:schemeClr val="accent1"/>
-          </a:lnRef>
-          <a:fillRef idx="3">
-            <a:schemeClr val="accent1"/>
-          </a:fillRef>
-          <a:effectRef idx="2">
-            <a:schemeClr val="accent1"/>
-          </a:effectRef>
-          <a:fontRef idx="minor">
-            <a:schemeClr val="lt1"/>
-          </a:fontRef>
-        </p:style>
-        <p:txBody>
-          <a:bodyPr rtlCol="0" anchor="ctr"/>
-          <a:lstStyle/>
-          <a:p>
-            <a:pPr algn="ctr"/>
-          </a:p>
-        </p:txBody>
-      </p:sp>
-      <p:sp>
-        <p:nvSpPr>
-          <p:cNvPr id="26" name="TextBox 25"/>
-          <p:cNvSpPr txBox="1"/>
-          <p:nvPr/>
-        </p:nvSpPr>
-        <p:spPr>
-          <a:xfrm>
-            <a:off x="6400800" y="3035808"/>
-            <a:ext cx="347472" cy="347472"/>
-          </a:xfrm>
-          <a:prstGeom prst="rect">
-            <a:avLst/>
-          </a:prstGeom>
-          <a:noFill/>
-        </p:spPr>
-        <p:txBody>
-          <a:bodyPr wrap="square">
-            <a:spAutoFit/>
-          </a:bodyPr>
-          <a:lstStyle/>
-          <a:p>
-            <a:pPr algn="ctr"/>
-            <a:r>
-              <a:rPr sz="1300" b="1" i="0">
-                <a:solidFill>
-                  <a:srgbClr val="0A0A0A"/>
-                </a:solidFill>
-              </a:rPr>
-              <a:t>→</a:t>
-            </a:r>
-          </a:p>
-        </p:txBody>
-      </p:sp>
-      <p:sp>
-        <p:nvSpPr>
-          <p:cNvPr id="27" name="TextBox 26"/>
-          <p:cNvSpPr txBox="1"/>
-          <p:nvPr/>
-        </p:nvSpPr>
-        <p:spPr>
-          <a:xfrm>
-            <a:off x="6903720" y="3017520"/>
-            <a:ext cx="4754880" cy="594360"/>
-          </a:xfrm>
-          <a:prstGeom prst="rect">
-            <a:avLst/>
-          </a:prstGeom>
-          <a:noFill/>
-        </p:spPr>
-        <p:txBody>
-          <a:bodyPr wrap="square">
-            <a:spAutoFit/>
-          </a:bodyPr>
-          <a:lstStyle/>
-          <a:p>
-            <a:pPr algn="l"/>
-            <a:r>
-              <a:rPr sz="1300" b="0" i="0">
-                <a:solidFill>
-                  <a:srgbClr val="F5F5F7"/>
-                </a:solidFill>
-              </a:rPr>
-              <a:t>Add a 5-frame history buffer to smooth out prediction flickering</a:t>
-            </a:r>
-          </a:p>
-        </p:txBody>
-      </p:sp>
-      <p:sp>
-        <p:nvSpPr>
-          <p:cNvPr id="28" name="Oval 27"/>
-          <p:cNvSpPr/>
-          <p:nvPr/>
-        </p:nvSpPr>
-        <p:spPr>
-          <a:xfrm>
-            <a:off x="6400800" y="4069080"/>
-            <a:ext cx="347472" cy="347472"/>
-          </a:xfrm>
-          <a:prstGeom prst="ellipse">
-            <a:avLst/>
-          </a:prstGeom>
-          <a:solidFill>
-            <a:srgbClr val="2997FF"/>
-          </a:solidFill>
-          <a:ln>
-            <a:noFill/>
-          </a:ln>
-        </p:spPr>
-        <p:style>
-          <a:lnRef idx="1">
-            <a:schemeClr val="accent1"/>
-          </a:lnRef>
-          <a:fillRef idx="3">
-            <a:schemeClr val="accent1"/>
-          </a:fillRef>
-          <a:effectRef idx="2">
-            <a:schemeClr val="accent1"/>
-          </a:effectRef>
-          <a:fontRef idx="minor">
-            <a:schemeClr val="lt1"/>
-          </a:fontRef>
-        </p:style>
-        <p:txBody>
-          <a:bodyPr rtlCol="0" anchor="ctr"/>
-          <a:lstStyle/>
-          <a:p>
-            <a:pPr algn="ctr"/>
-          </a:p>
-        </p:txBody>
-      </p:sp>
-      <p:sp>
-        <p:nvSpPr>
-          <p:cNvPr id="29" name="TextBox 28"/>
-          <p:cNvSpPr txBox="1"/>
-          <p:nvPr/>
-        </p:nvSpPr>
-        <p:spPr>
-          <a:xfrm>
-            <a:off x="6400800" y="4041648"/>
-            <a:ext cx="347472" cy="347472"/>
-          </a:xfrm>
-          <a:prstGeom prst="rect">
-            <a:avLst/>
-          </a:prstGeom>
-          <a:noFill/>
-        </p:spPr>
-        <p:txBody>
-          <a:bodyPr wrap="square">
-            <a:spAutoFit/>
-          </a:bodyPr>
-          <a:lstStyle/>
-          <a:p>
-            <a:pPr algn="ctr"/>
-            <a:r>
-              <a:rPr sz="1300" b="1" i="0">
-                <a:solidFill>
-                  <a:srgbClr val="0A0A0A"/>
-                </a:solidFill>
-              </a:rPr>
-              <a:t>→</a:t>
-            </a:r>
-          </a:p>
-        </p:txBody>
-      </p:sp>
-      <p:sp>
-        <p:nvSpPr>
-          <p:cNvPr id="30" name="TextBox 29"/>
-          <p:cNvSpPr txBox="1"/>
-          <p:nvPr/>
-        </p:nvSpPr>
-        <p:spPr>
-          <a:xfrm>
-            <a:off x="6903720" y="4023360"/>
-            <a:ext cx="4754880" cy="594360"/>
-          </a:xfrm>
-          <a:prstGeom prst="rect">
-            <a:avLst/>
-          </a:prstGeom>
-          <a:noFill/>
-        </p:spPr>
-        <p:txBody>
-          <a:bodyPr wrap="square">
-            <a:spAutoFit/>
-          </a:bodyPr>
-          <a:lstStyle/>
-          <a:p>
-            <a:pPr algn="l"/>
-            <a:r>
-              <a:rPr sz="1300" b="0" i="0">
-                <a:solidFill>
-                  <a:srgbClr val="F5F5F7"/>
-                </a:solidFill>
-              </a:rPr>
-              <a:t>Add a background class so the system can say "I don't know"</a:t>
-            </a:r>
-          </a:p>
-        </p:txBody>
-      </p:sp>
-      <p:sp>
-        <p:nvSpPr>
-          <p:cNvPr id="31" name="Oval 30"/>
-          <p:cNvSpPr/>
-          <p:nvPr/>
-        </p:nvSpPr>
-        <p:spPr>
-          <a:xfrm>
-            <a:off x="6400800" y="5074920"/>
-            <a:ext cx="347472" cy="347472"/>
-          </a:xfrm>
-          <a:prstGeom prst="ellipse">
-            <a:avLst/>
-          </a:prstGeom>
-          <a:solidFill>
-            <a:srgbClr val="2997FF"/>
-          </a:solidFill>
-          <a:ln>
-            <a:noFill/>
-          </a:ln>
-        </p:spPr>
-        <p:style>
-          <a:lnRef idx="1">
-            <a:schemeClr val="accent1"/>
-          </a:lnRef>
-          <a:fillRef idx="3">
-            <a:schemeClr val="accent1"/>
-          </a:fillRef>
-          <a:effectRef idx="2">
-            <a:schemeClr val="accent1"/>
-          </a:effectRef>
-          <a:fontRef idx="minor">
-            <a:schemeClr val="lt1"/>
-          </a:fontRef>
-        </p:style>
-        <p:txBody>
-          <a:bodyPr rtlCol="0" anchor="ctr"/>
-          <a:lstStyle/>
-          <a:p>
-            <a:pPr algn="ctr"/>
-          </a:p>
-        </p:txBody>
-      </p:sp>
-      <p:sp>
-        <p:nvSpPr>
-          <p:cNvPr id="32" name="TextBox 31"/>
-          <p:cNvSpPr txBox="1"/>
-          <p:nvPr/>
-        </p:nvSpPr>
-        <p:spPr>
-          <a:xfrm>
-            <a:off x="6400800" y="5047488"/>
-            <a:ext cx="347472" cy="347472"/>
-          </a:xfrm>
-          <a:prstGeom prst="rect">
-            <a:avLst/>
-          </a:prstGeom>
-          <a:noFill/>
-        </p:spPr>
-        <p:txBody>
-          <a:bodyPr wrap="square">
-            <a:spAutoFit/>
-          </a:bodyPr>
-          <a:lstStyle/>
-          <a:p>
-            <a:pPr algn="ctr"/>
-            <a:r>
-              <a:rPr sz="1300" b="1" i="0">
-                <a:solidFill>
-                  <a:srgbClr val="0A0A0A"/>
-                </a:solidFill>
-              </a:rPr>
-              <a:t>→</a:t>
-            </a:r>
-          </a:p>
-        </p:txBody>
-      </p:sp>
-      <p:sp>
-        <p:nvSpPr>
-          <p:cNvPr id="33" name="TextBox 32"/>
-          <p:cNvSpPr txBox="1"/>
-          <p:nvPr/>
-        </p:nvSpPr>
-        <p:spPr>
-          <a:xfrm>
-            <a:off x="6903720" y="5029200"/>
-            <a:ext cx="4754880" cy="594360"/>
-          </a:xfrm>
-          <a:prstGeom prst="rect">
-            <a:avLst/>
-          </a:prstGeom>
-          <a:noFill/>
-        </p:spPr>
-        <p:txBody>
-          <a:bodyPr wrap="square">
-            <a:spAutoFit/>
-          </a:bodyPr>
-          <a:lstStyle/>
-          <a:p>
-            <a:pPr algn="l"/>
-            <a:r>
-              <a:rPr sz="1300" b="0" i="0">
-                <a:solidFill>
-                  <a:srgbClr val="F5F5F7"/>
-                </a:solidFill>
-              </a:rPr>
-              <a:t>Replace the fixed ROI with a sliding-window or YOLO-based detector</a:t>
+              <a:t>Sangeeth Deleep Menon  ·  NUID 002524579  ·  Raj Gupta  ·  NUID 002068701  ·  CS5330 Spring 2026  ·  Northeastern University</a:t>
             </a:r>
           </a:p>
         </p:txBody>

--- a/presentation/presentation.pptx
+++ b/presentation/presentation.pptx
@@ -7239,7 +7239,7 @@
                   <a:srgbClr val="2997FF"/>
                 </a:solidFill>
               </a:rPr>
-              <a:t>LIVE DEMO</a:t>
+              <a:t>DEMO CAPTURE</a:t>
             </a:r>
           </a:p>
         </p:txBody>
@@ -7478,7 +7478,7 @@
                   <a:srgbClr val="30D158"/>
                 </a:solidFill>
               </a:rPr>
-              <a:t>22-30</a:t>
+              <a:t>20-30</a:t>
             </a:r>
           </a:p>
         </p:txBody>
